--- a/Project Report.pptx
+++ b/Project Report.pptx
@@ -10,14 +10,18 @@
     <p:sldId id="258" r:id="rId4"/>
     <p:sldId id="268" r:id="rId5"/>
     <p:sldId id="259" r:id="rId6"/>
-    <p:sldId id="260" r:id="rId7"/>
-    <p:sldId id="267" r:id="rId8"/>
-    <p:sldId id="261" r:id="rId9"/>
-    <p:sldId id="262" r:id="rId10"/>
-    <p:sldId id="263" r:id="rId11"/>
-    <p:sldId id="264" r:id="rId12"/>
-    <p:sldId id="265" r:id="rId13"/>
-    <p:sldId id="266" r:id="rId14"/>
+    <p:sldId id="269" r:id="rId7"/>
+    <p:sldId id="260" r:id="rId8"/>
+    <p:sldId id="267" r:id="rId9"/>
+    <p:sldId id="270" r:id="rId10"/>
+    <p:sldId id="261" r:id="rId11"/>
+    <p:sldId id="262" r:id="rId12"/>
+    <p:sldId id="263" r:id="rId13"/>
+    <p:sldId id="264" r:id="rId14"/>
+    <p:sldId id="271" r:id="rId15"/>
+    <p:sldId id="265" r:id="rId16"/>
+    <p:sldId id="272" r:id="rId17"/>
+    <p:sldId id="266" r:id="rId18"/>
   </p:sldIdLst>
   <p:sldSz cx="12192000" cy="6858000"/>
   <p:notesSz cx="6858000" cy="9144000"/>
@@ -320,9 +324,9 @@
           <a:p>
             <a:fld id="{2C82815D-FF58-430A-8B24-CC8A4A7E8BCF}" type="datetimeFigureOut">
               <a:rPr lang="en-IN" smtClean="0"/>
-              <a:t>10-12-2025</a:t>
+              <a:t>14-07-2026</a:t>
             </a:fld>
-            <a:endParaRPr lang="en-IN"/>
+            <a:endParaRPr lang="en-IN" dirty="0"/>
           </a:p>
         </p:txBody>
       </p:sp>
@@ -341,7 +345,7 @@
           <a:bodyPr/>
           <a:lstStyle/>
           <a:p>
-            <a:endParaRPr lang="en-IN"/>
+            <a:endParaRPr lang="en-IN" dirty="0"/>
           </a:p>
         </p:txBody>
       </p:sp>
@@ -426,6 +430,13 @@
             <a:noFill/>
           </a:ln>
         </p:spPr>
+        <p:txBody>
+          <a:bodyPr/>
+          <a:lstStyle/>
+          <a:p>
+            <a:endParaRPr lang="en-US" dirty="0"/>
+          </a:p>
+        </p:txBody>
       </p:sp>
       <p:sp>
         <p:nvSpPr>
@@ -451,7 +462,7 @@
               <a:rPr lang="en-IN" smtClean="0"/>
               <a:t>‹#›</a:t>
             </a:fld>
-            <a:endParaRPr lang="en-IN"/>
+            <a:endParaRPr lang="en-IN" dirty="0"/>
           </a:p>
         </p:txBody>
       </p:sp>
@@ -658,9 +669,9 @@
           <a:p>
             <a:fld id="{2C82815D-FF58-430A-8B24-CC8A4A7E8BCF}" type="datetimeFigureOut">
               <a:rPr lang="en-IN" smtClean="0"/>
-              <a:t>10-12-2025</a:t>
+              <a:t>14-07-2026</a:t>
             </a:fld>
-            <a:endParaRPr lang="en-IN"/>
+            <a:endParaRPr lang="en-IN" dirty="0"/>
           </a:p>
         </p:txBody>
       </p:sp>
@@ -679,7 +690,7 @@
           <a:bodyPr/>
           <a:lstStyle/>
           <a:p>
-            <a:endParaRPr lang="en-IN"/>
+            <a:endParaRPr lang="en-IN" dirty="0"/>
           </a:p>
         </p:txBody>
       </p:sp>
@@ -764,6 +775,13 @@
             <a:noFill/>
           </a:ln>
         </p:spPr>
+        <p:txBody>
+          <a:bodyPr/>
+          <a:lstStyle/>
+          <a:p>
+            <a:endParaRPr lang="en-US" dirty="0"/>
+          </a:p>
+        </p:txBody>
       </p:sp>
       <p:sp>
         <p:nvSpPr>
@@ -789,7 +807,7 @@
               <a:rPr lang="en-IN" smtClean="0"/>
               <a:t>‹#›</a:t>
             </a:fld>
-            <a:endParaRPr lang="en-IN"/>
+            <a:endParaRPr lang="en-IN" dirty="0"/>
           </a:p>
         </p:txBody>
       </p:sp>
@@ -1059,9 +1077,9 @@
           <a:p>
             <a:fld id="{2C82815D-FF58-430A-8B24-CC8A4A7E8BCF}" type="datetimeFigureOut">
               <a:rPr lang="en-IN" smtClean="0"/>
-              <a:t>10-12-2025</a:t>
+              <a:t>14-07-2026</a:t>
             </a:fld>
-            <a:endParaRPr lang="en-IN"/>
+            <a:endParaRPr lang="en-IN" dirty="0"/>
           </a:p>
         </p:txBody>
       </p:sp>
@@ -1080,7 +1098,7 @@
           <a:bodyPr/>
           <a:lstStyle/>
           <a:p>
-            <a:endParaRPr lang="en-IN"/>
+            <a:endParaRPr lang="en-IN" dirty="0"/>
           </a:p>
         </p:txBody>
       </p:sp>
@@ -1165,6 +1183,13 @@
             <a:noFill/>
           </a:ln>
         </p:spPr>
+        <p:txBody>
+          <a:bodyPr/>
+          <a:lstStyle/>
+          <a:p>
+            <a:endParaRPr lang="en-US" dirty="0"/>
+          </a:p>
+        </p:txBody>
       </p:sp>
       <p:sp>
         <p:nvSpPr>
@@ -1190,7 +1215,7 @@
               <a:rPr lang="en-IN" smtClean="0"/>
               <a:t>‹#›</a:t>
             </a:fld>
-            <a:endParaRPr lang="en-IN"/>
+            <a:endParaRPr lang="en-IN" dirty="0"/>
           </a:p>
         </p:txBody>
       </p:sp>
@@ -1395,9 +1420,9 @@
           <a:p>
             <a:fld id="{2C82815D-FF58-430A-8B24-CC8A4A7E8BCF}" type="datetimeFigureOut">
               <a:rPr lang="en-IN" smtClean="0"/>
-              <a:t>10-12-2025</a:t>
+              <a:t>14-07-2026</a:t>
             </a:fld>
-            <a:endParaRPr lang="en-IN"/>
+            <a:endParaRPr lang="en-IN" dirty="0"/>
           </a:p>
         </p:txBody>
       </p:sp>
@@ -1416,7 +1441,7 @@
           <a:bodyPr/>
           <a:lstStyle/>
           <a:p>
-            <a:endParaRPr lang="en-IN"/>
+            <a:endParaRPr lang="en-IN" dirty="0"/>
           </a:p>
         </p:txBody>
       </p:sp>
@@ -1501,6 +1526,13 @@
             <a:noFill/>
           </a:ln>
         </p:spPr>
+        <p:txBody>
+          <a:bodyPr/>
+          <a:lstStyle/>
+          <a:p>
+            <a:endParaRPr lang="en-US" dirty="0"/>
+          </a:p>
+        </p:txBody>
       </p:sp>
       <p:sp>
         <p:nvSpPr>
@@ -1526,7 +1558,7 @@
               <a:rPr lang="en-IN" smtClean="0"/>
               <a:t>‹#›</a:t>
             </a:fld>
-            <a:endParaRPr lang="en-IN"/>
+            <a:endParaRPr lang="en-IN" dirty="0"/>
           </a:p>
         </p:txBody>
       </p:sp>
@@ -1715,9 +1747,9 @@
           <a:p>
             <a:fld id="{2C82815D-FF58-430A-8B24-CC8A4A7E8BCF}" type="datetimeFigureOut">
               <a:rPr lang="en-IN" smtClean="0"/>
-              <a:t>10-12-2025</a:t>
+              <a:t>14-07-2026</a:t>
             </a:fld>
-            <a:endParaRPr lang="en-IN"/>
+            <a:endParaRPr lang="en-IN" dirty="0"/>
           </a:p>
         </p:txBody>
       </p:sp>
@@ -1736,7 +1768,7 @@
           <a:bodyPr/>
           <a:lstStyle/>
           <a:p>
-            <a:endParaRPr lang="en-IN"/>
+            <a:endParaRPr lang="en-IN" dirty="0"/>
           </a:p>
         </p:txBody>
       </p:sp>
@@ -1821,6 +1853,13 @@
             <a:noFill/>
           </a:ln>
         </p:spPr>
+        <p:txBody>
+          <a:bodyPr/>
+          <a:lstStyle/>
+          <a:p>
+            <a:endParaRPr lang="en-US" dirty="0"/>
+          </a:p>
+        </p:txBody>
       </p:sp>
       <p:sp>
         <p:nvSpPr>
@@ -1846,7 +1885,7 @@
               <a:rPr lang="en-IN" smtClean="0"/>
               <a:t>‹#›</a:t>
             </a:fld>
-            <a:endParaRPr lang="en-IN"/>
+            <a:endParaRPr lang="en-IN" dirty="0"/>
           </a:p>
         </p:txBody>
       </p:sp>
@@ -2111,9 +2150,9 @@
           <a:p>
             <a:fld id="{2C82815D-FF58-430A-8B24-CC8A4A7E8BCF}" type="datetimeFigureOut">
               <a:rPr lang="en-IN" smtClean="0"/>
-              <a:t>10-12-2025</a:t>
+              <a:t>14-07-2026</a:t>
             </a:fld>
-            <a:endParaRPr lang="en-IN"/>
+            <a:endParaRPr lang="en-IN" dirty="0"/>
           </a:p>
         </p:txBody>
       </p:sp>
@@ -2132,7 +2171,7 @@
           <a:bodyPr/>
           <a:lstStyle/>
           <a:p>
-            <a:endParaRPr lang="en-IN"/>
+            <a:endParaRPr lang="en-IN" dirty="0"/>
           </a:p>
         </p:txBody>
       </p:sp>
@@ -2217,6 +2256,13 @@
             <a:noFill/>
           </a:ln>
         </p:spPr>
+        <p:txBody>
+          <a:bodyPr/>
+          <a:lstStyle/>
+          <a:p>
+            <a:endParaRPr lang="en-US" dirty="0"/>
+          </a:p>
+        </p:txBody>
       </p:sp>
       <p:sp>
         <p:nvSpPr>
@@ -2242,7 +2288,7 @@
               <a:rPr lang="en-IN" smtClean="0"/>
               <a:t>‹#›</a:t>
             </a:fld>
-            <a:endParaRPr lang="en-IN"/>
+            <a:endParaRPr lang="en-IN" dirty="0"/>
           </a:p>
         </p:txBody>
       </p:sp>
@@ -2368,9 +2414,9 @@
           <a:p>
             <a:fld id="{2C82815D-FF58-430A-8B24-CC8A4A7E8BCF}" type="datetimeFigureOut">
               <a:rPr lang="en-IN" smtClean="0"/>
-              <a:t>10-12-2025</a:t>
+              <a:t>14-07-2026</a:t>
             </a:fld>
-            <a:endParaRPr lang="en-IN"/>
+            <a:endParaRPr lang="en-IN" dirty="0"/>
           </a:p>
         </p:txBody>
       </p:sp>
@@ -2389,7 +2435,7 @@
           <a:bodyPr/>
           <a:lstStyle/>
           <a:p>
-            <a:endParaRPr lang="en-IN"/>
+            <a:endParaRPr lang="en-IN" dirty="0"/>
           </a:p>
         </p:txBody>
       </p:sp>
@@ -2474,6 +2520,13 @@
             <a:noFill/>
           </a:ln>
         </p:spPr>
+        <p:txBody>
+          <a:bodyPr/>
+          <a:lstStyle/>
+          <a:p>
+            <a:endParaRPr lang="en-US" dirty="0"/>
+          </a:p>
+        </p:txBody>
       </p:sp>
       <p:sp>
         <p:nvSpPr>
@@ -2494,7 +2547,7 @@
               <a:rPr lang="en-IN" smtClean="0"/>
               <a:t>‹#›</a:t>
             </a:fld>
-            <a:endParaRPr lang="en-IN"/>
+            <a:endParaRPr lang="en-IN" dirty="0"/>
           </a:p>
         </p:txBody>
       </p:sp>
@@ -2630,9 +2683,9 @@
           <a:p>
             <a:fld id="{2C82815D-FF58-430A-8B24-CC8A4A7E8BCF}" type="datetimeFigureOut">
               <a:rPr lang="en-IN" smtClean="0"/>
-              <a:t>10-12-2025</a:t>
+              <a:t>14-07-2026</a:t>
             </a:fld>
-            <a:endParaRPr lang="en-IN"/>
+            <a:endParaRPr lang="en-IN" dirty="0"/>
           </a:p>
         </p:txBody>
       </p:sp>
@@ -2651,7 +2704,7 @@
           <a:bodyPr/>
           <a:lstStyle/>
           <a:p>
-            <a:endParaRPr lang="en-IN"/>
+            <a:endParaRPr lang="en-IN" dirty="0"/>
           </a:p>
         </p:txBody>
       </p:sp>
@@ -2736,6 +2789,13 @@
             <a:noFill/>
           </a:ln>
         </p:spPr>
+        <p:txBody>
+          <a:bodyPr/>
+          <a:lstStyle/>
+          <a:p>
+            <a:endParaRPr lang="en-US" dirty="0"/>
+          </a:p>
+        </p:txBody>
       </p:sp>
       <p:sp>
         <p:nvSpPr>
@@ -2756,7 +2816,7 @@
               <a:rPr lang="en-IN" smtClean="0"/>
               <a:t>‹#›</a:t>
             </a:fld>
-            <a:endParaRPr lang="en-IN"/>
+            <a:endParaRPr lang="en-IN" dirty="0"/>
           </a:p>
         </p:txBody>
       </p:sp>
@@ -2892,9 +2952,9 @@
           <a:p>
             <a:fld id="{2C82815D-FF58-430A-8B24-CC8A4A7E8BCF}" type="datetimeFigureOut">
               <a:rPr lang="en-IN" smtClean="0"/>
-              <a:t>10-12-2025</a:t>
+              <a:t>14-07-2026</a:t>
             </a:fld>
-            <a:endParaRPr lang="en-IN"/>
+            <a:endParaRPr lang="en-IN" dirty="0"/>
           </a:p>
         </p:txBody>
       </p:sp>
@@ -2913,7 +2973,7 @@
           <a:bodyPr/>
           <a:lstStyle/>
           <a:p>
-            <a:endParaRPr lang="en-IN"/>
+            <a:endParaRPr lang="en-IN" dirty="0"/>
           </a:p>
         </p:txBody>
       </p:sp>
@@ -2998,6 +3058,13 @@
             <a:noFill/>
           </a:ln>
         </p:spPr>
+        <p:txBody>
+          <a:bodyPr/>
+          <a:lstStyle/>
+          <a:p>
+            <a:endParaRPr lang="en-US" dirty="0"/>
+          </a:p>
+        </p:txBody>
       </p:sp>
       <p:sp>
         <p:nvSpPr>
@@ -3018,7 +3085,7 @@
               <a:rPr lang="en-IN" smtClean="0"/>
               <a:t>‹#›</a:t>
             </a:fld>
-            <a:endParaRPr lang="en-IN"/>
+            <a:endParaRPr lang="en-IN" dirty="0"/>
           </a:p>
         </p:txBody>
       </p:sp>
@@ -3221,9 +3288,9 @@
           <a:p>
             <a:fld id="{2C82815D-FF58-430A-8B24-CC8A4A7E8BCF}" type="datetimeFigureOut">
               <a:rPr lang="en-IN" smtClean="0"/>
-              <a:t>10-12-2025</a:t>
+              <a:t>14-07-2026</a:t>
             </a:fld>
-            <a:endParaRPr lang="en-IN"/>
+            <a:endParaRPr lang="en-IN" dirty="0"/>
           </a:p>
         </p:txBody>
       </p:sp>
@@ -3242,7 +3309,7 @@
           <a:bodyPr/>
           <a:lstStyle/>
           <a:p>
-            <a:endParaRPr lang="en-IN"/>
+            <a:endParaRPr lang="en-IN" dirty="0"/>
           </a:p>
         </p:txBody>
       </p:sp>
@@ -3327,6 +3394,13 @@
             <a:noFill/>
           </a:ln>
         </p:spPr>
+        <p:txBody>
+          <a:bodyPr/>
+          <a:lstStyle/>
+          <a:p>
+            <a:endParaRPr lang="en-US" dirty="0"/>
+          </a:p>
+        </p:txBody>
       </p:sp>
       <p:sp>
         <p:nvSpPr>
@@ -3352,7 +3426,7 @@
               <a:rPr lang="en-IN" smtClean="0"/>
               <a:t>‹#›</a:t>
             </a:fld>
-            <a:endParaRPr lang="en-IN"/>
+            <a:endParaRPr lang="en-IN" dirty="0"/>
           </a:p>
         </p:txBody>
       </p:sp>
@@ -3544,9 +3618,9 @@
           <a:p>
             <a:fld id="{2C82815D-FF58-430A-8B24-CC8A4A7E8BCF}" type="datetimeFigureOut">
               <a:rPr lang="en-IN" smtClean="0"/>
-              <a:t>10-12-2025</a:t>
+              <a:t>14-07-2026</a:t>
             </a:fld>
-            <a:endParaRPr lang="en-IN"/>
+            <a:endParaRPr lang="en-IN" dirty="0"/>
           </a:p>
         </p:txBody>
       </p:sp>
@@ -3565,7 +3639,7 @@
           <a:bodyPr/>
           <a:lstStyle/>
           <a:p>
-            <a:endParaRPr lang="en-IN"/>
+            <a:endParaRPr lang="en-IN" dirty="0"/>
           </a:p>
         </p:txBody>
       </p:sp>
@@ -3650,6 +3724,13 @@
             <a:noFill/>
           </a:ln>
         </p:spPr>
+        <p:txBody>
+          <a:bodyPr/>
+          <a:lstStyle/>
+          <a:p>
+            <a:endParaRPr lang="en-US" dirty="0"/>
+          </a:p>
+        </p:txBody>
       </p:sp>
       <p:sp>
         <p:nvSpPr>
@@ -3675,7 +3756,7 @@
               <a:rPr lang="en-IN" smtClean="0"/>
               <a:t>‹#›</a:t>
             </a:fld>
-            <a:endParaRPr lang="en-IN"/>
+            <a:endParaRPr lang="en-IN" dirty="0"/>
           </a:p>
         </p:txBody>
       </p:sp>
@@ -4001,9 +4082,9 @@
           <a:p>
             <a:fld id="{2C82815D-FF58-430A-8B24-CC8A4A7E8BCF}" type="datetimeFigureOut">
               <a:rPr lang="en-IN" smtClean="0"/>
-              <a:t>10-12-2025</a:t>
+              <a:t>14-07-2026</a:t>
             </a:fld>
-            <a:endParaRPr lang="en-IN"/>
+            <a:endParaRPr lang="en-IN" dirty="0"/>
           </a:p>
         </p:txBody>
       </p:sp>
@@ -4022,7 +4103,7 @@
           <a:bodyPr/>
           <a:lstStyle/>
           <a:p>
-            <a:endParaRPr lang="en-IN"/>
+            <a:endParaRPr lang="en-IN" dirty="0"/>
           </a:p>
         </p:txBody>
       </p:sp>
@@ -4107,6 +4188,13 @@
             <a:noFill/>
           </a:ln>
         </p:spPr>
+        <p:txBody>
+          <a:bodyPr/>
+          <a:lstStyle/>
+          <a:p>
+            <a:endParaRPr lang="en-US" dirty="0"/>
+          </a:p>
+        </p:txBody>
       </p:sp>
       <p:sp>
         <p:nvSpPr>
@@ -4132,7 +4220,7 @@
               <a:rPr lang="en-IN" smtClean="0"/>
               <a:t>‹#›</a:t>
             </a:fld>
-            <a:endParaRPr lang="en-IN"/>
+            <a:endParaRPr lang="en-IN" dirty="0"/>
           </a:p>
         </p:txBody>
       </p:sp>
@@ -4206,9 +4294,9 @@
           <a:p>
             <a:fld id="{2C82815D-FF58-430A-8B24-CC8A4A7E8BCF}" type="datetimeFigureOut">
               <a:rPr lang="en-IN" smtClean="0"/>
-              <a:t>10-12-2025</a:t>
+              <a:t>14-07-2026</a:t>
             </a:fld>
-            <a:endParaRPr lang="en-IN"/>
+            <a:endParaRPr lang="en-IN" dirty="0"/>
           </a:p>
         </p:txBody>
       </p:sp>
@@ -4227,7 +4315,7 @@
           <a:bodyPr/>
           <a:lstStyle/>
           <a:p>
-            <a:endParaRPr lang="en-IN"/>
+            <a:endParaRPr lang="en-IN" dirty="0"/>
           </a:p>
         </p:txBody>
       </p:sp>
@@ -4312,6 +4400,13 @@
             <a:noFill/>
           </a:ln>
         </p:spPr>
+        <p:txBody>
+          <a:bodyPr/>
+          <a:lstStyle/>
+          <a:p>
+            <a:endParaRPr lang="en-US" dirty="0"/>
+          </a:p>
+        </p:txBody>
       </p:sp>
       <p:sp>
         <p:nvSpPr>
@@ -4332,7 +4427,7 @@
               <a:rPr lang="en-IN" smtClean="0"/>
               <a:t>‹#›</a:t>
             </a:fld>
-            <a:endParaRPr lang="en-IN"/>
+            <a:endParaRPr lang="en-IN" dirty="0"/>
           </a:p>
         </p:txBody>
       </p:sp>
@@ -4383,9 +4478,9 @@
           <a:p>
             <a:fld id="{2C82815D-FF58-430A-8B24-CC8A4A7E8BCF}" type="datetimeFigureOut">
               <a:rPr lang="en-IN" smtClean="0"/>
-              <a:t>10-12-2025</a:t>
+              <a:t>14-07-2026</a:t>
             </a:fld>
-            <a:endParaRPr lang="en-IN"/>
+            <a:endParaRPr lang="en-IN" dirty="0"/>
           </a:p>
         </p:txBody>
       </p:sp>
@@ -4404,7 +4499,7 @@
           <a:bodyPr/>
           <a:lstStyle/>
           <a:p>
-            <a:endParaRPr lang="en-IN"/>
+            <a:endParaRPr lang="en-IN" dirty="0"/>
           </a:p>
         </p:txBody>
       </p:sp>
@@ -4489,6 +4584,13 @@
             <a:noFill/>
           </a:ln>
         </p:spPr>
+        <p:txBody>
+          <a:bodyPr/>
+          <a:lstStyle/>
+          <a:p>
+            <a:endParaRPr lang="en-US" dirty="0"/>
+          </a:p>
+        </p:txBody>
       </p:sp>
       <p:sp>
         <p:nvSpPr>
@@ -4509,7 +4611,7 @@
               <a:rPr lang="en-IN" smtClean="0"/>
               <a:t>‹#›</a:t>
             </a:fld>
-            <a:endParaRPr lang="en-IN"/>
+            <a:endParaRPr lang="en-IN" dirty="0"/>
           </a:p>
         </p:txBody>
       </p:sp>
@@ -4716,9 +4818,9 @@
           <a:p>
             <a:fld id="{2C82815D-FF58-430A-8B24-CC8A4A7E8BCF}" type="datetimeFigureOut">
               <a:rPr lang="en-IN" smtClean="0"/>
-              <a:t>10-12-2025</a:t>
+              <a:t>14-07-2026</a:t>
             </a:fld>
-            <a:endParaRPr lang="en-IN"/>
+            <a:endParaRPr lang="en-IN" dirty="0"/>
           </a:p>
         </p:txBody>
       </p:sp>
@@ -4737,7 +4839,7 @@
           <a:bodyPr/>
           <a:lstStyle/>
           <a:p>
-            <a:endParaRPr lang="en-IN"/>
+            <a:endParaRPr lang="en-IN" dirty="0"/>
           </a:p>
         </p:txBody>
       </p:sp>
@@ -4822,6 +4924,13 @@
             <a:noFill/>
           </a:ln>
         </p:spPr>
+        <p:txBody>
+          <a:bodyPr/>
+          <a:lstStyle/>
+          <a:p>
+            <a:endParaRPr lang="en-US" dirty="0"/>
+          </a:p>
+        </p:txBody>
       </p:sp>
       <p:sp>
         <p:nvSpPr>
@@ -4842,7 +4951,7 @@
               <a:rPr lang="en-IN" smtClean="0"/>
               <a:t>‹#›</a:t>
             </a:fld>
-            <a:endParaRPr lang="en-IN"/>
+            <a:endParaRPr lang="en-IN" dirty="0"/>
           </a:p>
         </p:txBody>
       </p:sp>
@@ -4970,10 +5079,9 @@
           </a:lstStyle>
           <a:p>
             <a:r>
-              <a:rPr lang="en-US"/>
+              <a:rPr lang="en-US" dirty="0"/>
               <a:t>Click icon to add picture</a:t>
             </a:r>
-            <a:endParaRPr lang="en-US" dirty="0"/>
           </a:p>
         </p:txBody>
       </p:sp>
@@ -5061,9 +5169,9 @@
           <a:p>
             <a:fld id="{2C82815D-FF58-430A-8B24-CC8A4A7E8BCF}" type="datetimeFigureOut">
               <a:rPr lang="en-IN" smtClean="0"/>
-              <a:t>10-12-2025</a:t>
+              <a:t>14-07-2026</a:t>
             </a:fld>
-            <a:endParaRPr lang="en-IN"/>
+            <a:endParaRPr lang="en-IN" dirty="0"/>
           </a:p>
         </p:txBody>
       </p:sp>
@@ -5082,7 +5190,7 @@
           <a:bodyPr/>
           <a:lstStyle/>
           <a:p>
-            <a:endParaRPr lang="en-IN"/>
+            <a:endParaRPr lang="en-IN" dirty="0"/>
           </a:p>
         </p:txBody>
       </p:sp>
@@ -5167,6 +5275,13 @@
             <a:noFill/>
           </a:ln>
         </p:spPr>
+        <p:txBody>
+          <a:bodyPr/>
+          <a:lstStyle/>
+          <a:p>
+            <a:endParaRPr lang="en-US" dirty="0"/>
+          </a:p>
+        </p:txBody>
       </p:sp>
       <p:sp>
         <p:nvSpPr>
@@ -5192,7 +5307,7 @@
               <a:rPr lang="en-IN" smtClean="0"/>
               <a:t>‹#›</a:t>
             </a:fld>
-            <a:endParaRPr lang="en-IN"/>
+            <a:endParaRPr lang="en-IN" dirty="0"/>
           </a:p>
         </p:txBody>
       </p:sp>
@@ -5305,6 +5420,13 @@
               <a:noFill/>
             </a:ln>
           </p:spPr>
+          <p:txBody>
+            <a:bodyPr/>
+            <a:lstStyle/>
+            <a:p>
+              <a:endParaRPr lang="en-US" dirty="0"/>
+            </a:p>
+          </p:txBody>
         </p:sp>
         <p:sp>
           <p:nvSpPr>
@@ -5371,6 +5493,13 @@
               <a:noFill/>
             </a:ln>
           </p:spPr>
+          <p:txBody>
+            <a:bodyPr/>
+            <a:lstStyle/>
+            <a:p>
+              <a:endParaRPr lang="en-US" dirty="0"/>
+            </a:p>
+          </p:txBody>
         </p:sp>
         <p:sp>
           <p:nvSpPr>
@@ -5442,6 +5571,13 @@
               <a:noFill/>
             </a:ln>
           </p:spPr>
+          <p:txBody>
+            <a:bodyPr/>
+            <a:lstStyle/>
+            <a:p>
+              <a:endParaRPr lang="en-US" dirty="0"/>
+            </a:p>
+          </p:txBody>
         </p:sp>
         <p:sp>
           <p:nvSpPr>
@@ -5493,6 +5629,13 @@
               <a:noFill/>
             </a:ln>
           </p:spPr>
+          <p:txBody>
+            <a:bodyPr/>
+            <a:lstStyle/>
+            <a:p>
+              <a:endParaRPr lang="en-US" dirty="0"/>
+            </a:p>
+          </p:txBody>
         </p:sp>
         <p:sp>
           <p:nvSpPr>
@@ -5579,6 +5722,13 @@
               <a:noFill/>
             </a:ln>
           </p:spPr>
+          <p:txBody>
+            <a:bodyPr/>
+            <a:lstStyle/>
+            <a:p>
+              <a:endParaRPr lang="en-US" dirty="0"/>
+            </a:p>
+          </p:txBody>
         </p:sp>
         <p:sp>
           <p:nvSpPr>
@@ -5660,6 +5810,13 @@
               <a:noFill/>
             </a:ln>
           </p:spPr>
+          <p:txBody>
+            <a:bodyPr/>
+            <a:lstStyle/>
+            <a:p>
+              <a:endParaRPr lang="en-US" dirty="0"/>
+            </a:p>
+          </p:txBody>
         </p:sp>
         <p:sp>
           <p:nvSpPr>
@@ -5721,6 +5878,13 @@
               <a:noFill/>
             </a:ln>
           </p:spPr>
+          <p:txBody>
+            <a:bodyPr/>
+            <a:lstStyle/>
+            <a:p>
+              <a:endParaRPr lang="en-US" dirty="0"/>
+            </a:p>
+          </p:txBody>
         </p:sp>
         <p:sp>
           <p:nvSpPr>
@@ -5802,6 +5966,13 @@
               <a:noFill/>
             </a:ln>
           </p:spPr>
+          <p:txBody>
+            <a:bodyPr/>
+            <a:lstStyle/>
+            <a:p>
+              <a:endParaRPr lang="en-US" dirty="0"/>
+            </a:p>
+          </p:txBody>
         </p:sp>
         <p:sp>
           <p:nvSpPr>
@@ -5918,6 +6089,13 @@
               <a:noFill/>
             </a:ln>
           </p:spPr>
+          <p:txBody>
+            <a:bodyPr/>
+            <a:lstStyle/>
+            <a:p>
+              <a:endParaRPr lang="en-US" dirty="0"/>
+            </a:p>
+          </p:txBody>
         </p:sp>
         <p:sp>
           <p:nvSpPr>
@@ -5969,6 +6147,13 @@
               <a:noFill/>
             </a:ln>
           </p:spPr>
+          <p:txBody>
+            <a:bodyPr/>
+            <a:lstStyle/>
+            <a:p>
+              <a:endParaRPr lang="en-US" dirty="0"/>
+            </a:p>
+          </p:txBody>
         </p:sp>
         <p:sp>
           <p:nvSpPr>
@@ -6030,6 +6215,13 @@
               <a:noFill/>
             </a:ln>
           </p:spPr>
+          <p:txBody>
+            <a:bodyPr/>
+            <a:lstStyle/>
+            <a:p>
+              <a:endParaRPr lang="en-US" dirty="0"/>
+            </a:p>
+          </p:txBody>
         </p:sp>
         <p:sp>
           <p:nvSpPr>
@@ -6101,6 +6293,13 @@
               <a:noFill/>
             </a:ln>
           </p:spPr>
+          <p:txBody>
+            <a:bodyPr/>
+            <a:lstStyle/>
+            <a:p>
+              <a:endParaRPr lang="en-US" dirty="0"/>
+            </a:p>
+          </p:txBody>
         </p:sp>
       </p:grpSp>
       <p:grpSp>
@@ -6220,6 +6419,13 @@
               <a:noFill/>
             </a:ln>
           </p:spPr>
+          <p:txBody>
+            <a:bodyPr/>
+            <a:lstStyle/>
+            <a:p>
+              <a:endParaRPr lang="en-US" dirty="0"/>
+            </a:p>
+          </p:txBody>
         </p:sp>
         <p:sp>
           <p:nvSpPr>
@@ -6289,6 +6495,13 @@
               <a:noFill/>
             </a:ln>
           </p:spPr>
+          <p:txBody>
+            <a:bodyPr/>
+            <a:lstStyle/>
+            <a:p>
+              <a:endParaRPr lang="en-US" dirty="0"/>
+            </a:p>
+          </p:txBody>
         </p:sp>
         <p:sp>
           <p:nvSpPr>
@@ -6358,6 +6571,13 @@
               <a:noFill/>
             </a:ln>
           </p:spPr>
+          <p:txBody>
+            <a:bodyPr/>
+            <a:lstStyle/>
+            <a:p>
+              <a:endParaRPr lang="en-US" dirty="0"/>
+            </a:p>
+          </p:txBody>
         </p:sp>
         <p:sp>
           <p:nvSpPr>
@@ -6442,6 +6662,13 @@
               <a:noFill/>
             </a:ln>
           </p:spPr>
+          <p:txBody>
+            <a:bodyPr/>
+            <a:lstStyle/>
+            <a:p>
+              <a:endParaRPr lang="en-US" dirty="0"/>
+            </a:p>
+          </p:txBody>
         </p:sp>
         <p:sp>
           <p:nvSpPr>
@@ -6536,6 +6763,13 @@
               <a:noFill/>
             </a:ln>
           </p:spPr>
+          <p:txBody>
+            <a:bodyPr/>
+            <a:lstStyle/>
+            <a:p>
+              <a:endParaRPr lang="en-US" dirty="0"/>
+            </a:p>
+          </p:txBody>
         </p:sp>
         <p:sp>
           <p:nvSpPr>
@@ -6585,6 +6819,13 @@
               <a:noFill/>
             </a:ln>
           </p:spPr>
+          <p:txBody>
+            <a:bodyPr/>
+            <a:lstStyle/>
+            <a:p>
+              <a:endParaRPr lang="en-US" dirty="0"/>
+            </a:p>
+          </p:txBody>
         </p:sp>
         <p:sp>
           <p:nvSpPr>
@@ -6649,6 +6890,13 @@
               <a:noFill/>
             </a:ln>
           </p:spPr>
+          <p:txBody>
+            <a:bodyPr/>
+            <a:lstStyle/>
+            <a:p>
+              <a:endParaRPr lang="en-US" dirty="0"/>
+            </a:p>
+          </p:txBody>
         </p:sp>
         <p:sp>
           <p:nvSpPr>
@@ -6758,6 +7006,13 @@
               <a:noFill/>
             </a:ln>
           </p:spPr>
+          <p:txBody>
+            <a:bodyPr/>
+            <a:lstStyle/>
+            <a:p>
+              <a:endParaRPr lang="en-US" dirty="0"/>
+            </a:p>
+          </p:txBody>
         </p:sp>
         <p:sp>
           <p:nvSpPr>
@@ -6807,6 +7062,13 @@
               <a:noFill/>
             </a:ln>
           </p:spPr>
+          <p:txBody>
+            <a:bodyPr/>
+            <a:lstStyle/>
+            <a:p>
+              <a:endParaRPr lang="en-US" dirty="0"/>
+            </a:p>
+          </p:txBody>
         </p:sp>
         <p:sp>
           <p:nvSpPr>
@@ -6876,6 +7138,13 @@
               <a:noFill/>
             </a:ln>
           </p:spPr>
+          <p:txBody>
+            <a:bodyPr/>
+            <a:lstStyle/>
+            <a:p>
+              <a:endParaRPr lang="en-US" dirty="0"/>
+            </a:p>
+          </p:txBody>
         </p:sp>
         <p:sp>
           <p:nvSpPr>
@@ -6940,6 +7209,13 @@
               <a:noFill/>
             </a:ln>
           </p:spPr>
+          <p:txBody>
+            <a:bodyPr/>
+            <a:lstStyle/>
+            <a:p>
+              <a:endParaRPr lang="en-US" dirty="0"/>
+            </a:p>
+          </p:txBody>
         </p:sp>
         <p:sp>
           <p:nvSpPr>
@@ -7009,6 +7285,13 @@
               <a:noFill/>
             </a:ln>
           </p:spPr>
+          <p:txBody>
+            <a:bodyPr/>
+            <a:lstStyle/>
+            <a:p>
+              <a:endParaRPr lang="en-US" dirty="0"/>
+            </a:p>
+          </p:txBody>
         </p:sp>
       </p:grpSp>
       <p:sp>
@@ -7047,6 +7330,13 @@
             <a:schemeClr val="lt1"/>
           </a:fontRef>
         </p:style>
+        <p:txBody>
+          <a:bodyPr/>
+          <a:lstStyle/>
+          <a:p>
+            <a:endParaRPr lang="en-US" dirty="0"/>
+          </a:p>
+        </p:txBody>
       </p:sp>
       <p:sp>
         <p:nvSpPr>
@@ -7178,9 +7468,9 @@
           <a:p>
             <a:fld id="{2C82815D-FF58-430A-8B24-CC8A4A7E8BCF}" type="datetimeFigureOut">
               <a:rPr lang="en-IN" smtClean="0"/>
-              <a:t>10-12-2025</a:t>
+              <a:t>14-07-2026</a:t>
             </a:fld>
-            <a:endParaRPr lang="en-IN"/>
+            <a:endParaRPr lang="en-IN" dirty="0"/>
           </a:p>
         </p:txBody>
       </p:sp>
@@ -7217,7 +7507,7 @@
             </a:lvl1pPr>
           </a:lstStyle>
           <a:p>
-            <a:endParaRPr lang="en-IN"/>
+            <a:endParaRPr lang="en-IN" dirty="0"/>
           </a:p>
         </p:txBody>
       </p:sp>
@@ -7256,7 +7546,7 @@
               <a:rPr lang="en-IN" smtClean="0"/>
               <a:t>‹#›</a:t>
             </a:fld>
-            <a:endParaRPr lang="en-IN"/>
+            <a:endParaRPr lang="en-IN" dirty="0"/>
           </a:p>
         </p:txBody>
       </p:sp>
@@ -7878,33 +8168,7 @@
                 <a:latin typeface="Times New Roman" panose="02020603050405020304" pitchFamily="18" charset="0"/>
                 <a:cs typeface="Times New Roman" panose="02020603050405020304" pitchFamily="18" charset="0"/>
               </a:rPr>
-              <a:t>Ankit </a:t>
-            </a:r>
-            <a:r>
-              <a:rPr lang="en-IN" sz="2400" dirty="0" err="1">
-                <a:solidFill>
-                  <a:schemeClr val="tx1">
-                    <a:lumMod val="95000"/>
-                    <a:lumOff val="5000"/>
-                  </a:schemeClr>
-                </a:solidFill>
-                <a:latin typeface="Times New Roman" panose="02020603050405020304" pitchFamily="18" charset="0"/>
-                <a:cs typeface="Times New Roman" panose="02020603050405020304" pitchFamily="18" charset="0"/>
-              </a:rPr>
-              <a:t>Pramanick</a:t>
-            </a:r>
-            <a:r>
-              <a:rPr lang="en-IN" sz="2400" dirty="0">
-                <a:solidFill>
-                  <a:schemeClr val="tx1">
-                    <a:lumMod val="95000"/>
-                    <a:lumOff val="5000"/>
-                  </a:schemeClr>
-                </a:solidFill>
-                <a:latin typeface="Times New Roman" panose="02020603050405020304" pitchFamily="18" charset="0"/>
-                <a:cs typeface="Times New Roman" panose="02020603050405020304" pitchFamily="18" charset="0"/>
-              </a:rPr>
-              <a:t> (17600122063)</a:t>
+              <a:t>Ankit Pramanick (17600122063)</a:t>
             </a:r>
           </a:p>
           <a:p>
@@ -8071,7 +8335,7 @@
           <p:cNvPr id="2" name="Title 1">
             <a:extLst>
               <a:ext uri="{FF2B5EF4-FFF2-40B4-BE49-F238E27FC236}">
-                <a16:creationId xmlns:a16="http://schemas.microsoft.com/office/drawing/2014/main" id="{79DC8F7E-8D94-4CDF-879A-50676E8405EF}"/>
+                <a16:creationId xmlns:a16="http://schemas.microsoft.com/office/drawing/2014/main" id="{AC79467F-34C8-37FA-5608-B2897B3F2DBF}"/>
               </a:ext>
             </a:extLst>
           </p:cNvPr>
@@ -8084,8 +8348,8 @@
         </p:nvSpPr>
         <p:spPr>
           <a:xfrm>
-            <a:off x="1790699" y="657554"/>
-            <a:ext cx="8610600" cy="853412"/>
+            <a:off x="1473264" y="969743"/>
+            <a:ext cx="9245472" cy="858253"/>
           </a:xfrm>
         </p:spPr>
         <p:txBody>
@@ -8106,284 +8370,321 @@
                 <a:latin typeface="Times New Roman" panose="02020603050405020304" pitchFamily="18" charset="0"/>
                 <a:cs typeface="Times New Roman" panose="02020603050405020304" pitchFamily="18" charset="0"/>
               </a:rPr>
-              <a:t>CHALLENGES</a:t>
-            </a:r>
-          </a:p>
-        </p:txBody>
-      </p:sp>
-      <p:sp>
-        <p:nvSpPr>
-          <p:cNvPr id="4" name="Rectangle 1">
+              <a:t>TECHNOLOGIES USED (TECH STACK)</a:t>
+            </a:r>
+          </a:p>
+        </p:txBody>
+      </p:sp>
+      <p:sp>
+        <p:nvSpPr>
+          <p:cNvPr id="3" name="Content Placeholder 2">
             <a:extLst>
               <a:ext uri="{FF2B5EF4-FFF2-40B4-BE49-F238E27FC236}">
-                <a16:creationId xmlns:a16="http://schemas.microsoft.com/office/drawing/2014/main" id="{118669F8-778B-C649-FE1B-70BDCFEEB936}"/>
+                <a16:creationId xmlns:a16="http://schemas.microsoft.com/office/drawing/2014/main" id="{EE125DE4-D226-4656-86A5-7EF3EF3D4E0E}"/>
               </a:ext>
             </a:extLst>
           </p:cNvPr>
           <p:cNvSpPr>
-            <a:spLocks noGrp="1" noChangeArrowheads="1"/>
+            <a:spLocks noGrp="1"/>
           </p:cNvSpPr>
           <p:nvPr>
             <p:ph idx="1"/>
           </p:nvPr>
         </p:nvSpPr>
-        <p:spPr bwMode="auto">
+        <p:spPr>
           <a:xfrm>
-            <a:off x="2166394" y="1945801"/>
-            <a:ext cx="7859209" cy="3971536"/>
+            <a:off x="1591734" y="2301267"/>
+            <a:ext cx="3581845" cy="3586990"/>
+          </a:xfrm>
+        </p:spPr>
+        <p:txBody>
+          <a:bodyPr>
+            <a:normAutofit/>
+          </a:bodyPr>
+          <a:lstStyle/>
+          <a:p>
+            <a:pPr marL="0" indent="0">
+              <a:buNone/>
+            </a:pPr>
+            <a:r>
+              <a:rPr lang="en-US" sz="2600" b="1" dirty="0">
+                <a:solidFill>
+                  <a:schemeClr val="tx1">
+                    <a:lumMod val="95000"/>
+                    <a:lumOff val="5000"/>
+                  </a:schemeClr>
+                </a:solidFill>
+                <a:latin typeface="Times New Roman" panose="02020603050405020304" pitchFamily="18" charset="0"/>
+                <a:cs typeface="Times New Roman" panose="02020603050405020304" pitchFamily="18" charset="0"/>
+              </a:rPr>
+              <a:t>Programming                   </a:t>
+            </a:r>
+          </a:p>
+          <a:p>
+            <a:pPr>
+              <a:buFont typeface="Courier New" panose="02070309020205020404" pitchFamily="49" charset="0"/>
+              <a:buChar char="o"/>
+            </a:pPr>
+            <a:r>
+              <a:rPr lang="en-US" sz="2600" dirty="0">
+                <a:solidFill>
+                  <a:schemeClr val="tx1">
+                    <a:lumMod val="95000"/>
+                    <a:lumOff val="5000"/>
+                  </a:schemeClr>
+                </a:solidFill>
+                <a:latin typeface="Times New Roman" panose="02020603050405020304" pitchFamily="18" charset="0"/>
+                <a:cs typeface="Times New Roman" panose="02020603050405020304" pitchFamily="18" charset="0"/>
+              </a:rPr>
+              <a:t> Python</a:t>
+            </a:r>
+          </a:p>
+          <a:p>
+            <a:pPr>
+              <a:buFont typeface="Courier New" panose="02070309020205020404" pitchFamily="49" charset="0"/>
+              <a:buChar char="o"/>
+            </a:pPr>
+            <a:r>
+              <a:rPr lang="en-US" sz="2600" dirty="0">
+                <a:solidFill>
+                  <a:schemeClr val="tx1">
+                    <a:lumMod val="95000"/>
+                    <a:lumOff val="5000"/>
+                  </a:schemeClr>
+                </a:solidFill>
+                <a:latin typeface="Times New Roman" panose="02020603050405020304" pitchFamily="18" charset="0"/>
+                <a:cs typeface="Times New Roman" panose="02020603050405020304" pitchFamily="18" charset="0"/>
+              </a:rPr>
+              <a:t> Flask (web interface)</a:t>
+            </a:r>
+          </a:p>
+          <a:p>
+            <a:pPr marL="0" indent="0">
+              <a:buNone/>
+            </a:pPr>
+            <a:r>
+              <a:rPr lang="en-US" sz="2600" b="1" dirty="0">
+                <a:solidFill>
+                  <a:schemeClr val="tx1">
+                    <a:lumMod val="95000"/>
+                    <a:lumOff val="5000"/>
+                  </a:schemeClr>
+                </a:solidFill>
+                <a:latin typeface="Times New Roman" panose="02020603050405020304" pitchFamily="18" charset="0"/>
+                <a:cs typeface="Times New Roman" panose="02020603050405020304" pitchFamily="18" charset="0"/>
+              </a:rPr>
+              <a:t>Machine Learning</a:t>
+            </a:r>
+          </a:p>
+          <a:p>
+            <a:pPr>
+              <a:buFont typeface="Courier New" panose="02070309020205020404" pitchFamily="49" charset="0"/>
+              <a:buChar char="o"/>
+            </a:pPr>
+            <a:r>
+              <a:rPr lang="en-US" sz="2600" dirty="0">
+                <a:solidFill>
+                  <a:schemeClr val="tx1">
+                    <a:lumMod val="95000"/>
+                    <a:lumOff val="5000"/>
+                  </a:schemeClr>
+                </a:solidFill>
+                <a:latin typeface="Times New Roman" panose="02020603050405020304" pitchFamily="18" charset="0"/>
+                <a:cs typeface="Times New Roman" panose="02020603050405020304" pitchFamily="18" charset="0"/>
+              </a:rPr>
+              <a:t> Scikit-learn</a:t>
+            </a:r>
+          </a:p>
+          <a:p>
+            <a:pPr>
+              <a:buFont typeface="Courier New" panose="02070309020205020404" pitchFamily="49" charset="0"/>
+              <a:buChar char="o"/>
+            </a:pPr>
+            <a:r>
+              <a:rPr lang="en-US" sz="2600" dirty="0">
+                <a:solidFill>
+                  <a:schemeClr val="tx1">
+                    <a:lumMod val="95000"/>
+                    <a:lumOff val="5000"/>
+                  </a:schemeClr>
+                </a:solidFill>
+                <a:latin typeface="Times New Roman" panose="02020603050405020304" pitchFamily="18" charset="0"/>
+                <a:cs typeface="Times New Roman" panose="02020603050405020304" pitchFamily="18" charset="0"/>
+              </a:rPr>
+              <a:t> XGBoost</a:t>
+            </a:r>
+          </a:p>
+        </p:txBody>
+      </p:sp>
+      <p:sp>
+        <p:nvSpPr>
+          <p:cNvPr id="5" name="TextBox 4">
+            <a:extLst>
+              <a:ext uri="{FF2B5EF4-FFF2-40B4-BE49-F238E27FC236}">
+                <a16:creationId xmlns:a16="http://schemas.microsoft.com/office/drawing/2014/main" id="{EEE8BA7D-0838-7985-C0E9-69846FC55840}"/>
+              </a:ext>
+            </a:extLst>
+          </p:cNvPr>
+          <p:cNvSpPr txBox="1"/>
+          <p:nvPr/>
+        </p:nvSpPr>
+        <p:spPr>
+          <a:xfrm>
+            <a:off x="5405512" y="2301267"/>
+            <a:ext cx="6100010" cy="3293209"/>
           </a:xfrm>
           <a:prstGeom prst="rect">
             <a:avLst/>
           </a:prstGeom>
           <a:noFill/>
-          <a:ln>
-            <a:noFill/>
-          </a:ln>
-          <a:effectLst/>
-          <a:extLst>
-            <a:ext uri="{909E8E84-426E-40DD-AFC4-6F175D3DCCD1}">
-              <a14:hiddenFill xmlns:a14="http://schemas.microsoft.com/office/drawing/2010/main">
-                <a:solidFill>
-                  <a:schemeClr val="accent1"/>
-                </a:solidFill>
-              </a14:hiddenFill>
-            </a:ext>
-            <a:ext uri="{91240B29-F687-4F45-9708-019B960494DF}">
-              <a14:hiddenLine xmlns:a14="http://schemas.microsoft.com/office/drawing/2010/main" w="9525">
-                <a:solidFill>
-                  <a:schemeClr val="tx1"/>
-                </a:solidFill>
-                <a:miter lim="800000"/>
-                <a:headEnd/>
-                <a:tailEnd/>
-              </a14:hiddenLine>
-            </a:ext>
-            <a:ext uri="{AF507438-7753-43E0-B8FC-AC1667EBCBE1}">
-              <a14:hiddenEffects xmlns:a14="http://schemas.microsoft.com/office/drawing/2010/main">
-                <a:effectLst>
-                  <a:outerShdw dist="35921" dir="2700000" algn="ctr" rotWithShape="0">
-                    <a:schemeClr val="bg2"/>
-                  </a:outerShdw>
-                </a:effectLst>
-              </a14:hiddenEffects>
-            </a:ext>
-          </a:extLst>
         </p:spPr>
         <p:txBody>
-          <a:bodyPr vert="horz" wrap="square" lIns="91440" tIns="45720" rIns="91440" bIns="45720" numCol="1" anchor="ctr" anchorCtr="0" compatLnSpc="1">
-            <a:prstTxWarp prst="textNoShape">
-              <a:avLst/>
-            </a:prstTxWarp>
+          <a:bodyPr wrap="square">
             <a:spAutoFit/>
           </a:bodyPr>
           <a:lstStyle/>
           <a:p>
-            <a:pPr marR="0" lvl="0" algn="l" defTabSz="914400" rtl="0" eaLnBrk="0" fontAlgn="base" latinLnBrk="0" hangingPunct="0">
-              <a:lnSpc>
-                <a:spcPct val="200000"/>
-              </a:lnSpc>
-              <a:spcBef>
-                <a:spcPct val="0"/>
-              </a:spcBef>
-              <a:spcAft>
-                <a:spcPct val="0"/>
-              </a:spcAft>
-              <a:buClrTx/>
-              <a:buSzTx/>
+            <a:r>
+              <a:rPr lang="en-IN" sz="2600" b="1" dirty="0">
+                <a:solidFill>
+                  <a:schemeClr val="tx1">
+                    <a:lumMod val="95000"/>
+                    <a:lumOff val="5000"/>
+                  </a:schemeClr>
+                </a:solidFill>
+                <a:latin typeface="Times New Roman" panose="02020603050405020304" pitchFamily="18" charset="0"/>
+                <a:cs typeface="Times New Roman" panose="02020603050405020304" pitchFamily="18" charset="0"/>
+              </a:rPr>
+              <a:t>Routing / Maps</a:t>
+            </a:r>
+          </a:p>
+          <a:p>
+            <a:pPr marL="457200" indent="-457200">
               <a:buFont typeface="Courier New" panose="02070309020205020404" pitchFamily="49" charset="0"/>
               <a:buChar char="o"/>
-              <a:tabLst/>
             </a:pPr>
             <a:r>
-              <a:rPr kumimoji="0" lang="en-US" altLang="en-US" sz="2600" b="0" i="0" u="none" strike="noStrike" cap="none" normalizeH="0" baseline="0" dirty="0">
-                <a:ln>
-                  <a:noFill/>
-                </a:ln>
+              <a:rPr lang="en-IN" sz="2600" dirty="0">
                 <a:solidFill>
                   <a:schemeClr val="tx1">
                     <a:lumMod val="95000"/>
                     <a:lumOff val="5000"/>
                   </a:schemeClr>
                 </a:solidFill>
-                <a:effectLst/>
-                <a:latin typeface="Times New Roman" panose="02020603050405020304" pitchFamily="18" charset="0"/>
-                <a:cs typeface="Times New Roman" panose="02020603050405020304" pitchFamily="18" charset="0"/>
-              </a:rPr>
-              <a:t> Cleaning the large </a:t>
-            </a:r>
-            <a:r>
-              <a:rPr kumimoji="0" lang="en-US" altLang="en-US" sz="2600" b="0" i="0" u="none" strike="noStrike" cap="none" normalizeH="0" baseline="0" dirty="0" err="1">
-                <a:ln>
-                  <a:noFill/>
-                </a:ln>
+                <a:latin typeface="Times New Roman" panose="02020603050405020304" pitchFamily="18" charset="0"/>
+                <a:cs typeface="Times New Roman" panose="02020603050405020304" pitchFamily="18" charset="0"/>
+              </a:rPr>
+              <a:t>OSRM</a:t>
+            </a:r>
+          </a:p>
+          <a:p>
+            <a:pPr marL="457200" indent="-457200">
+              <a:buFont typeface="Courier New" panose="02070309020205020404" pitchFamily="49" charset="0"/>
+              <a:buChar char="o"/>
+            </a:pPr>
+            <a:r>
+              <a:rPr lang="en-IN" sz="2600" dirty="0">
                 <a:solidFill>
                   <a:schemeClr val="tx1">
                     <a:lumMod val="95000"/>
                     <a:lumOff val="5000"/>
                   </a:schemeClr>
                 </a:solidFill>
-                <a:effectLst/>
-                <a:latin typeface="Times New Roman" panose="02020603050405020304" pitchFamily="18" charset="0"/>
-                <a:cs typeface="Times New Roman" panose="02020603050405020304" pitchFamily="18" charset="0"/>
-              </a:rPr>
-              <a:t>eVED</a:t>
-            </a:r>
-            <a:r>
-              <a:rPr kumimoji="0" lang="en-US" altLang="en-US" sz="2600" b="0" i="0" u="none" strike="noStrike" cap="none" normalizeH="0" baseline="0" dirty="0">
-                <a:ln>
-                  <a:noFill/>
-                </a:ln>
+                <a:latin typeface="Times New Roman" panose="02020603050405020304" pitchFamily="18" charset="0"/>
+                <a:cs typeface="Times New Roman" panose="02020603050405020304" pitchFamily="18" charset="0"/>
+              </a:rPr>
+              <a:t>OSMnx</a:t>
+            </a:r>
+          </a:p>
+          <a:p>
+            <a:pPr marL="457200" indent="-457200">
+              <a:buFont typeface="Courier New" panose="02070309020205020404" pitchFamily="49" charset="0"/>
+              <a:buChar char="o"/>
+            </a:pPr>
+            <a:r>
+              <a:rPr lang="en-IN" sz="2600" dirty="0">
                 <a:solidFill>
                   <a:schemeClr val="tx1">
                     <a:lumMod val="95000"/>
                     <a:lumOff val="5000"/>
                   </a:schemeClr>
                 </a:solidFill>
-                <a:effectLst/>
-                <a:latin typeface="Times New Roman" panose="02020603050405020304" pitchFamily="18" charset="0"/>
-                <a:cs typeface="Times New Roman" panose="02020603050405020304" pitchFamily="18" charset="0"/>
-              </a:rPr>
-              <a:t> dataset</a:t>
-            </a:r>
-          </a:p>
-          <a:p>
-            <a:pPr marR="0" lvl="0" algn="l" defTabSz="914400" rtl="0" eaLnBrk="0" fontAlgn="base" latinLnBrk="0" hangingPunct="0">
-              <a:lnSpc>
-                <a:spcPct val="200000"/>
-              </a:lnSpc>
-              <a:spcBef>
-                <a:spcPct val="0"/>
-              </a:spcBef>
-              <a:spcAft>
-                <a:spcPct val="0"/>
-              </a:spcAft>
-              <a:buClrTx/>
-              <a:buSzTx/>
+                <a:latin typeface="Times New Roman" panose="02020603050405020304" pitchFamily="18" charset="0"/>
+                <a:cs typeface="Times New Roman" panose="02020603050405020304" pitchFamily="18" charset="0"/>
+              </a:rPr>
+              <a:t>OpenStreetMap</a:t>
+            </a:r>
+          </a:p>
+          <a:p>
+            <a:r>
+              <a:rPr lang="en-IN" sz="2600" b="1" dirty="0">
+                <a:solidFill>
+                  <a:schemeClr val="tx1">
+                    <a:lumMod val="95000"/>
+                    <a:lumOff val="5000"/>
+                  </a:schemeClr>
+                </a:solidFill>
+                <a:latin typeface="Times New Roman" panose="02020603050405020304" pitchFamily="18" charset="0"/>
+                <a:cs typeface="Times New Roman" panose="02020603050405020304" pitchFamily="18" charset="0"/>
+              </a:rPr>
+              <a:t>Data Sources</a:t>
+            </a:r>
+          </a:p>
+          <a:p>
+            <a:pPr marL="457200" indent="-457200">
               <a:buFont typeface="Courier New" panose="02070309020205020404" pitchFamily="49" charset="0"/>
               <a:buChar char="o"/>
-              <a:tabLst/>
             </a:pPr>
             <a:r>
-              <a:rPr kumimoji="0" lang="en-US" altLang="en-US" sz="2600" b="0" i="0" u="none" strike="noStrike" cap="none" normalizeH="0" baseline="0" dirty="0">
-                <a:ln>
-                  <a:noFill/>
-                </a:ln>
+              <a:rPr lang="en-IN" sz="2600" dirty="0">
                 <a:solidFill>
                   <a:schemeClr val="tx1">
                     <a:lumMod val="95000"/>
                     <a:lumOff val="5000"/>
                   </a:schemeClr>
                 </a:solidFill>
-                <a:effectLst/>
-                <a:latin typeface="Times New Roman" panose="02020603050405020304" pitchFamily="18" charset="0"/>
-                <a:cs typeface="Times New Roman" panose="02020603050405020304" pitchFamily="18" charset="0"/>
-              </a:rPr>
-              <a:t> Mapping GPS points with elevation data</a:t>
-            </a:r>
-          </a:p>
-          <a:p>
-            <a:pPr marR="0" lvl="0" algn="l" defTabSz="914400" rtl="0" eaLnBrk="0" fontAlgn="base" latinLnBrk="0" hangingPunct="0">
-              <a:lnSpc>
-                <a:spcPct val="200000"/>
-              </a:lnSpc>
-              <a:spcBef>
-                <a:spcPct val="0"/>
-              </a:spcBef>
-              <a:spcAft>
-                <a:spcPct val="0"/>
-              </a:spcAft>
-              <a:buClrTx/>
-              <a:buSzTx/>
+                <a:latin typeface="Times New Roman" panose="02020603050405020304" pitchFamily="18" charset="0"/>
+                <a:cs typeface="Times New Roman" panose="02020603050405020304" pitchFamily="18" charset="0"/>
+              </a:rPr>
+              <a:t>eVED Dataset</a:t>
+            </a:r>
+          </a:p>
+          <a:p>
+            <a:pPr marL="457200" indent="-457200">
               <a:buFont typeface="Courier New" panose="02070309020205020404" pitchFamily="49" charset="0"/>
               <a:buChar char="o"/>
-              <a:tabLst/>
             </a:pPr>
             <a:r>
-              <a:rPr kumimoji="0" lang="en-US" altLang="en-US" sz="2600" b="0" i="0" u="none" strike="noStrike" cap="none" normalizeH="0" baseline="0" dirty="0">
-                <a:ln>
-                  <a:noFill/>
-                </a:ln>
+              <a:rPr lang="en-IN" sz="2600" dirty="0">
                 <a:solidFill>
                   <a:schemeClr val="tx1">
                     <a:lumMod val="95000"/>
                     <a:lumOff val="5000"/>
                   </a:schemeClr>
                 </a:solidFill>
-                <a:effectLst/>
-                <a:latin typeface="Times New Roman" panose="02020603050405020304" pitchFamily="18" charset="0"/>
-                <a:cs typeface="Times New Roman" panose="02020603050405020304" pitchFamily="18" charset="0"/>
-              </a:rPr>
-              <a:t> Integrating multiple APIs together</a:t>
-            </a:r>
-          </a:p>
-          <a:p>
-            <a:pPr marR="0" lvl="0" algn="l" defTabSz="914400" rtl="0" eaLnBrk="0" fontAlgn="base" latinLnBrk="0" hangingPunct="0">
-              <a:lnSpc>
-                <a:spcPct val="200000"/>
-              </a:lnSpc>
-              <a:spcBef>
-                <a:spcPct val="0"/>
-              </a:spcBef>
-              <a:spcAft>
-                <a:spcPct val="0"/>
-              </a:spcAft>
-              <a:buClrTx/>
-              <a:buSzTx/>
+                <a:latin typeface="Times New Roman" panose="02020603050405020304" pitchFamily="18" charset="0"/>
+                <a:cs typeface="Times New Roman" panose="02020603050405020304" pitchFamily="18" charset="0"/>
+              </a:rPr>
+              <a:t>NASA SRTM Elevation</a:t>
+            </a:r>
+          </a:p>
+          <a:p>
+            <a:pPr marL="457200" indent="-457200">
               <a:buFont typeface="Courier New" panose="02070309020205020404" pitchFamily="49" charset="0"/>
               <a:buChar char="o"/>
-              <a:tabLst/>
             </a:pPr>
             <a:r>
-              <a:rPr kumimoji="0" lang="en-US" altLang="en-US" sz="2600" b="0" i="0" u="none" strike="noStrike" cap="none" normalizeH="0" baseline="0" dirty="0">
-                <a:ln>
-                  <a:noFill/>
-                </a:ln>
+              <a:rPr lang="en-IN" sz="2600" dirty="0">
                 <a:solidFill>
                   <a:schemeClr val="tx1">
                     <a:lumMod val="95000"/>
                     <a:lumOff val="5000"/>
                   </a:schemeClr>
                 </a:solidFill>
-                <a:effectLst/>
-                <a:latin typeface="Times New Roman" panose="02020603050405020304" pitchFamily="18" charset="0"/>
-                <a:cs typeface="Times New Roman" panose="02020603050405020304" pitchFamily="18" charset="0"/>
-              </a:rPr>
-              <a:t> Ensuring ML model accuracy</a:t>
-            </a:r>
-          </a:p>
-          <a:p>
-            <a:pPr marR="0" lvl="0" algn="l" defTabSz="914400" rtl="0" eaLnBrk="0" fontAlgn="base" latinLnBrk="0" hangingPunct="0">
-              <a:lnSpc>
-                <a:spcPct val="200000"/>
-              </a:lnSpc>
-              <a:spcBef>
-                <a:spcPct val="0"/>
-              </a:spcBef>
-              <a:spcAft>
-                <a:spcPct val="0"/>
-              </a:spcAft>
-              <a:buClrTx/>
-              <a:buSzTx/>
-              <a:buFont typeface="Courier New" panose="02070309020205020404" pitchFamily="49" charset="0"/>
-              <a:buChar char="o"/>
-              <a:tabLst/>
-            </a:pPr>
-            <a:r>
-              <a:rPr kumimoji="0" lang="en-US" altLang="en-US" sz="2600" b="0" i="0" u="none" strike="noStrike" cap="none" normalizeH="0" baseline="0" dirty="0">
-                <a:ln>
-                  <a:noFill/>
-                </a:ln>
-                <a:solidFill>
-                  <a:schemeClr val="tx1">
-                    <a:lumMod val="95000"/>
-                    <a:lumOff val="5000"/>
-                  </a:schemeClr>
-                </a:solidFill>
-                <a:effectLst/>
-                <a:latin typeface="Times New Roman" panose="02020603050405020304" pitchFamily="18" charset="0"/>
-                <a:cs typeface="Times New Roman" panose="02020603050405020304" pitchFamily="18" charset="0"/>
-              </a:rPr>
-              <a:t> Real-time traffic handling</a:t>
+                <a:latin typeface="Times New Roman" panose="02020603050405020304" pitchFamily="18" charset="0"/>
+                <a:cs typeface="Times New Roman" panose="02020603050405020304" pitchFamily="18" charset="0"/>
+              </a:rPr>
+              <a:t>Google Maps / TomTom Traffic API</a:t>
             </a:r>
           </a:p>
         </p:txBody>
@@ -8391,7 +8692,7 @@
     </p:spTree>
     <p:extLst>
       <p:ext uri="{BB962C8B-B14F-4D97-AF65-F5344CB8AC3E}">
-        <p14:creationId xmlns:p14="http://schemas.microsoft.com/office/powerpoint/2010/main" val="1801051199"/>
+        <p14:creationId xmlns:p14="http://schemas.microsoft.com/office/powerpoint/2010/main" val="298293338"/>
       </p:ext>
     </p:extLst>
   </p:cSld>
@@ -8423,7 +8724,7 @@
           <p:cNvPr id="2" name="Title 1">
             <a:extLst>
               <a:ext uri="{FF2B5EF4-FFF2-40B4-BE49-F238E27FC236}">
-                <a16:creationId xmlns:a16="http://schemas.microsoft.com/office/drawing/2014/main" id="{FE3A7009-EC58-0EAD-D0F2-66EB623795C3}"/>
+                <a16:creationId xmlns:a16="http://schemas.microsoft.com/office/drawing/2014/main" id="{274550BE-19B8-6016-C12D-BBB8175C74B5}"/>
               </a:ext>
             </a:extLst>
           </p:cNvPr>
@@ -8436,8 +8737,53 @@
         </p:nvSpPr>
         <p:spPr>
           <a:xfrm>
-            <a:off x="1790700" y="890103"/>
-            <a:ext cx="8610600" cy="694334"/>
+            <a:off x="1797666" y="832758"/>
+            <a:ext cx="8596668" cy="798095"/>
+          </a:xfrm>
+        </p:spPr>
+        <p:txBody>
+          <a:bodyPr>
+            <a:normAutofit/>
+          </a:bodyPr>
+          <a:lstStyle/>
+          <a:p>
+            <a:pPr algn="ctr"/>
+            <a:r>
+              <a:rPr lang="en-IN" sz="4000" dirty="0">
+                <a:solidFill>
+                  <a:schemeClr val="tx1">
+                    <a:lumMod val="95000"/>
+                    <a:lumOff val="5000"/>
+                  </a:schemeClr>
+                </a:solidFill>
+                <a:latin typeface="Times New Roman" panose="02020603050405020304" pitchFamily="18" charset="0"/>
+                <a:cs typeface="Times New Roman" panose="02020603050405020304" pitchFamily="18" charset="0"/>
+              </a:rPr>
+              <a:t>BENEFITS</a:t>
+            </a:r>
+          </a:p>
+        </p:txBody>
+      </p:sp>
+      <p:sp>
+        <p:nvSpPr>
+          <p:cNvPr id="3" name="Content Placeholder 2">
+            <a:extLst>
+              <a:ext uri="{FF2B5EF4-FFF2-40B4-BE49-F238E27FC236}">
+                <a16:creationId xmlns:a16="http://schemas.microsoft.com/office/drawing/2014/main" id="{3DEF2935-CCEA-6BEA-6EBF-58C2156FA466}"/>
+              </a:ext>
+            </a:extLst>
+          </p:cNvPr>
+          <p:cNvSpPr>
+            <a:spLocks noGrp="1"/>
+          </p:cNvSpPr>
+          <p:nvPr>
+            <p:ph idx="1"/>
+          </p:nvPr>
+        </p:nvSpPr>
+        <p:spPr>
+          <a:xfrm>
+            <a:off x="2274261" y="1841126"/>
+            <a:ext cx="8120073" cy="4501799"/>
           </a:xfrm>
         </p:spPr>
         <p:txBody>
@@ -8446,9 +8792,15 @@
           </a:bodyPr>
           <a:lstStyle/>
           <a:p>
-            <a:pPr algn="ctr"/>
-            <a:r>
-              <a:rPr lang="en-IN" sz="4000" dirty="0">
+            <a:pPr>
+              <a:lnSpc>
+                <a:spcPct val="150000"/>
+              </a:lnSpc>
+              <a:buFont typeface="Courier New" panose="02070309020205020404" pitchFamily="49" charset="0"/>
+              <a:buChar char="o"/>
+            </a:pPr>
+            <a:r>
+              <a:rPr lang="en-IN" sz="2600" dirty="0">
                 <a:solidFill>
                   <a:schemeClr val="tx1">
                     <a:lumMod val="95000"/>
@@ -8458,250 +8810,140 @@
                 <a:latin typeface="Times New Roman" panose="02020603050405020304" pitchFamily="18" charset="0"/>
                 <a:cs typeface="Times New Roman" panose="02020603050405020304" pitchFamily="18" charset="0"/>
               </a:rPr>
-              <a:t>LIMITATIONS </a:t>
-            </a:r>
-          </a:p>
-        </p:txBody>
-      </p:sp>
-      <p:sp>
-        <p:nvSpPr>
-          <p:cNvPr id="4" name="Rectangle 1">
-            <a:extLst>
-              <a:ext uri="{FF2B5EF4-FFF2-40B4-BE49-F238E27FC236}">
-                <a16:creationId xmlns:a16="http://schemas.microsoft.com/office/drawing/2014/main" id="{34D500E3-998C-1297-BB00-DB7949F65A6C}"/>
-              </a:ext>
-            </a:extLst>
-          </p:cNvPr>
-          <p:cNvSpPr>
-            <a:spLocks noGrp="1" noChangeArrowheads="1"/>
-          </p:cNvSpPr>
-          <p:nvPr>
-            <p:ph idx="1"/>
-          </p:nvPr>
-        </p:nvSpPr>
-        <p:spPr bwMode="auto">
-          <a:xfrm>
-            <a:off x="1871240" y="1996361"/>
-            <a:ext cx="8449519" cy="3971536"/>
-          </a:xfrm>
-          <a:prstGeom prst="rect">
-            <a:avLst/>
-          </a:prstGeom>
-          <a:noFill/>
-          <a:ln>
-            <a:noFill/>
-          </a:ln>
-          <a:effectLst/>
-          <a:extLst>
-            <a:ext uri="{909E8E84-426E-40DD-AFC4-6F175D3DCCD1}">
-              <a14:hiddenFill xmlns:a14="http://schemas.microsoft.com/office/drawing/2010/main">
-                <a:solidFill>
-                  <a:schemeClr val="accent1"/>
-                </a:solidFill>
-              </a14:hiddenFill>
-            </a:ext>
-            <a:ext uri="{91240B29-F687-4F45-9708-019B960494DF}">
-              <a14:hiddenLine xmlns:a14="http://schemas.microsoft.com/office/drawing/2010/main" w="9525">
-                <a:solidFill>
-                  <a:schemeClr val="tx1"/>
-                </a:solidFill>
-                <a:miter lim="800000"/>
-                <a:headEnd/>
-                <a:tailEnd/>
-              </a14:hiddenLine>
-            </a:ext>
-            <a:ext uri="{AF507438-7753-43E0-B8FC-AC1667EBCBE1}">
-              <a14:hiddenEffects xmlns:a14="http://schemas.microsoft.com/office/drawing/2010/main">
-                <a:effectLst>
-                  <a:outerShdw dist="35921" dir="2700000" algn="ctr" rotWithShape="0">
-                    <a:schemeClr val="bg2"/>
-                  </a:outerShdw>
-                </a:effectLst>
-              </a14:hiddenEffects>
-            </a:ext>
-          </a:extLst>
-        </p:spPr>
-        <p:txBody>
-          <a:bodyPr vert="horz" wrap="square" lIns="91440" tIns="45720" rIns="91440" bIns="45720" numCol="1" anchor="ctr" anchorCtr="0" compatLnSpc="1">
-            <a:prstTxWarp prst="textNoShape">
-              <a:avLst/>
-            </a:prstTxWarp>
-            <a:spAutoFit/>
-          </a:bodyPr>
-          <a:lstStyle/>
-          <a:p>
-            <a:pPr marR="0" lvl="0" algn="l" defTabSz="914400" rtl="0" eaLnBrk="0" fontAlgn="base" latinLnBrk="0" hangingPunct="0">
+              <a:t> Saves fuel cost</a:t>
+            </a:r>
+          </a:p>
+          <a:p>
+            <a:pPr>
               <a:lnSpc>
-                <a:spcPct val="200000"/>
+                <a:spcPct val="150000"/>
               </a:lnSpc>
-              <a:spcBef>
-                <a:spcPct val="0"/>
-              </a:spcBef>
-              <a:spcAft>
-                <a:spcPct val="0"/>
-              </a:spcAft>
-              <a:buClrTx/>
-              <a:buSzTx/>
               <a:buFont typeface="Courier New" panose="02070309020205020404" pitchFamily="49" charset="0"/>
               <a:buChar char="o"/>
-              <a:tabLst/>
             </a:pPr>
             <a:r>
-              <a:rPr kumimoji="0" lang="en-US" altLang="en-US" sz="2600" b="0" i="0" u="none" strike="noStrike" cap="none" normalizeH="0" baseline="0" dirty="0">
-                <a:ln>
-                  <a:noFill/>
-                </a:ln>
+              <a:rPr lang="en-IN" sz="2600" dirty="0">
                 <a:solidFill>
                   <a:schemeClr val="tx1">
                     <a:lumMod val="95000"/>
                     <a:lumOff val="5000"/>
                   </a:schemeClr>
                 </a:solidFill>
-                <a:effectLst/>
-                <a:latin typeface="Times New Roman" panose="02020603050405020304" pitchFamily="18" charset="0"/>
-                <a:cs typeface="Times New Roman" panose="02020603050405020304" pitchFamily="18" charset="0"/>
-              </a:rPr>
-              <a:t> Dependent on availability of API data</a:t>
-            </a:r>
-          </a:p>
-          <a:p>
-            <a:pPr marR="0" lvl="0" algn="l" defTabSz="914400" rtl="0" eaLnBrk="0" fontAlgn="base" latinLnBrk="0" hangingPunct="0">
+                <a:latin typeface="Times New Roman" panose="02020603050405020304" pitchFamily="18" charset="0"/>
+                <a:cs typeface="Times New Roman" panose="02020603050405020304" pitchFamily="18" charset="0"/>
+              </a:rPr>
+              <a:t> Reduces CO₂ emissions</a:t>
+            </a:r>
+          </a:p>
+          <a:p>
+            <a:pPr>
               <a:lnSpc>
-                <a:spcPct val="200000"/>
+                <a:spcPct val="150000"/>
               </a:lnSpc>
-              <a:spcBef>
-                <a:spcPct val="0"/>
-              </a:spcBef>
-              <a:spcAft>
-                <a:spcPct val="0"/>
-              </a:spcAft>
-              <a:buClrTx/>
-              <a:buSzTx/>
               <a:buFont typeface="Courier New" panose="02070309020205020404" pitchFamily="49" charset="0"/>
               <a:buChar char="o"/>
-              <a:tabLst/>
             </a:pPr>
             <a:r>
-              <a:rPr kumimoji="0" lang="en-US" altLang="en-US" sz="2600" b="0" i="0" u="none" strike="noStrike" cap="none" normalizeH="0" baseline="0" dirty="0">
-                <a:ln>
-                  <a:noFill/>
-                </a:ln>
+              <a:rPr lang="en-IN" sz="2600" dirty="0">
                 <a:solidFill>
                   <a:schemeClr val="tx1">
                     <a:lumMod val="95000"/>
                     <a:lumOff val="5000"/>
                   </a:schemeClr>
                 </a:solidFill>
-                <a:effectLst/>
-                <a:latin typeface="Times New Roman" panose="02020603050405020304" pitchFamily="18" charset="0"/>
-                <a:cs typeface="Times New Roman" panose="02020603050405020304" pitchFamily="18" charset="0"/>
-              </a:rPr>
-              <a:t> Not real-time without constant updates</a:t>
-            </a:r>
-          </a:p>
-          <a:p>
-            <a:pPr marR="0" lvl="0" algn="l" defTabSz="914400" rtl="0" eaLnBrk="0" fontAlgn="base" latinLnBrk="0" hangingPunct="0">
+                <a:latin typeface="Times New Roman" panose="02020603050405020304" pitchFamily="18" charset="0"/>
+                <a:cs typeface="Times New Roman" panose="02020603050405020304" pitchFamily="18" charset="0"/>
+              </a:rPr>
+              <a:t> Considers real driving </a:t>
+            </a:r>
+            <a:r>
+              <a:rPr lang="en-IN" sz="2600" dirty="0" err="1">
+                <a:solidFill>
+                  <a:schemeClr val="tx1">
+                    <a:lumMod val="95000"/>
+                    <a:lumOff val="5000"/>
+                  </a:schemeClr>
+                </a:solidFill>
+                <a:latin typeface="Times New Roman" panose="02020603050405020304" pitchFamily="18" charset="0"/>
+                <a:cs typeface="Times New Roman" panose="02020603050405020304" pitchFamily="18" charset="0"/>
+              </a:rPr>
+              <a:t>behavior</a:t>
+            </a:r>
+            <a:endParaRPr lang="en-IN" sz="2600" dirty="0">
+              <a:solidFill>
+                <a:schemeClr val="tx1">
+                  <a:lumMod val="95000"/>
+                  <a:lumOff val="5000"/>
+                </a:schemeClr>
+              </a:solidFill>
+              <a:latin typeface="Times New Roman" panose="02020603050405020304" pitchFamily="18" charset="0"/>
+              <a:cs typeface="Times New Roman" panose="02020603050405020304" pitchFamily="18" charset="0"/>
+            </a:endParaRPr>
+          </a:p>
+          <a:p>
+            <a:pPr>
               <a:lnSpc>
-                <a:spcPct val="200000"/>
+                <a:spcPct val="150000"/>
               </a:lnSpc>
-              <a:spcBef>
-                <a:spcPct val="0"/>
-              </a:spcBef>
-              <a:spcAft>
-                <a:spcPct val="0"/>
-              </a:spcAft>
-              <a:buClrTx/>
-              <a:buSzTx/>
               <a:buFont typeface="Courier New" panose="02070309020205020404" pitchFamily="49" charset="0"/>
               <a:buChar char="o"/>
-              <a:tabLst/>
             </a:pPr>
             <a:r>
-              <a:rPr kumimoji="0" lang="en-US" altLang="en-US" sz="2600" b="0" i="0" u="none" strike="noStrike" cap="none" normalizeH="0" baseline="0" dirty="0">
-                <a:ln>
-                  <a:noFill/>
-                </a:ln>
+              <a:rPr lang="en-IN" sz="2600" dirty="0">
                 <a:solidFill>
                   <a:schemeClr val="tx1">
                     <a:lumMod val="95000"/>
                     <a:lumOff val="5000"/>
                   </a:schemeClr>
                 </a:solidFill>
-                <a:effectLst/>
-                <a:latin typeface="Times New Roman" panose="02020603050405020304" pitchFamily="18" charset="0"/>
-                <a:cs typeface="Times New Roman" panose="02020603050405020304" pitchFamily="18" charset="0"/>
-              </a:rPr>
-              <a:t> Accuracy depends on dataset quality</a:t>
-            </a:r>
-          </a:p>
-          <a:p>
-            <a:pPr marR="0" lvl="0" algn="l" defTabSz="914400" rtl="0" eaLnBrk="0" fontAlgn="base" latinLnBrk="0" hangingPunct="0">
+                <a:latin typeface="Times New Roman" panose="02020603050405020304" pitchFamily="18" charset="0"/>
+                <a:cs typeface="Times New Roman" panose="02020603050405020304" pitchFamily="18" charset="0"/>
+              </a:rPr>
+              <a:t> Better than traditional shortest-path apps</a:t>
+            </a:r>
+          </a:p>
+          <a:p>
+            <a:pPr>
               <a:lnSpc>
-                <a:spcPct val="200000"/>
+                <a:spcPct val="150000"/>
               </a:lnSpc>
-              <a:spcBef>
-                <a:spcPct val="0"/>
-              </a:spcBef>
-              <a:spcAft>
-                <a:spcPct val="0"/>
-              </a:spcAft>
-              <a:buClrTx/>
-              <a:buSzTx/>
               <a:buFont typeface="Courier New" panose="02070309020205020404" pitchFamily="49" charset="0"/>
               <a:buChar char="o"/>
-              <a:tabLst/>
             </a:pPr>
             <a:r>
-              <a:rPr kumimoji="0" lang="en-US" altLang="en-US" sz="2600" b="0" i="0" u="none" strike="noStrike" cap="none" normalizeH="0" baseline="0" dirty="0">
-                <a:ln>
-                  <a:noFill/>
-                </a:ln>
+              <a:rPr lang="en-IN" sz="2600" dirty="0">
                 <a:solidFill>
                   <a:schemeClr val="tx1">
                     <a:lumMod val="95000"/>
                     <a:lumOff val="5000"/>
                   </a:schemeClr>
                 </a:solidFill>
-                <a:effectLst/>
-                <a:latin typeface="Times New Roman" panose="02020603050405020304" pitchFamily="18" charset="0"/>
-                <a:cs typeface="Times New Roman" panose="02020603050405020304" pitchFamily="18" charset="0"/>
-              </a:rPr>
-              <a:t> Heavy computation for long routes</a:t>
-            </a:r>
-          </a:p>
-          <a:p>
-            <a:pPr marR="0" lvl="0" algn="l" defTabSz="914400" rtl="0" eaLnBrk="0" fontAlgn="base" latinLnBrk="0" hangingPunct="0">
+                <a:latin typeface="Times New Roman" panose="02020603050405020304" pitchFamily="18" charset="0"/>
+                <a:cs typeface="Times New Roman" panose="02020603050405020304" pitchFamily="18" charset="0"/>
+              </a:rPr>
+              <a:t> Suitable for navigation apps &amp; logistics</a:t>
+            </a:r>
+          </a:p>
+          <a:p>
+            <a:pPr>
               <a:lnSpc>
-                <a:spcPct val="200000"/>
+                <a:spcPct val="150000"/>
               </a:lnSpc>
-              <a:spcBef>
-                <a:spcPct val="0"/>
-              </a:spcBef>
-              <a:spcAft>
-                <a:spcPct val="0"/>
-              </a:spcAft>
-              <a:buClrTx/>
-              <a:buSzTx/>
               <a:buFont typeface="Courier New" panose="02070309020205020404" pitchFamily="49" charset="0"/>
               <a:buChar char="o"/>
-              <a:tabLst/>
             </a:pPr>
             <a:r>
-              <a:rPr kumimoji="0" lang="en-US" altLang="en-US" sz="2600" b="0" i="0" u="none" strike="noStrike" cap="none" normalizeH="0" baseline="0" dirty="0">
-                <a:ln>
-                  <a:noFill/>
-                </a:ln>
+              <a:rPr lang="en-IN" sz="2600" dirty="0">
                 <a:solidFill>
                   <a:schemeClr val="tx1">
                     <a:lumMod val="95000"/>
                     <a:lumOff val="5000"/>
                   </a:schemeClr>
                 </a:solidFill>
-                <a:effectLst/>
-                <a:latin typeface="Times New Roman" panose="02020603050405020304" pitchFamily="18" charset="0"/>
-                <a:cs typeface="Times New Roman" panose="02020603050405020304" pitchFamily="18" charset="0"/>
-              </a:rPr>
-              <a:t> Traffic data may sometimes be inaccurate</a:t>
+                <a:latin typeface="Times New Roman" panose="02020603050405020304" pitchFamily="18" charset="0"/>
+                <a:cs typeface="Times New Roman" panose="02020603050405020304" pitchFamily="18" charset="0"/>
+              </a:rPr>
+              <a:t>Supports sustainable transportation</a:t>
             </a:r>
           </a:p>
         </p:txBody>
@@ -8709,7 +8951,7 @@
     </p:spTree>
     <p:extLst>
       <p:ext uri="{BB962C8B-B14F-4D97-AF65-F5344CB8AC3E}">
-        <p14:creationId xmlns:p14="http://schemas.microsoft.com/office/powerpoint/2010/main" val="238556372"/>
+        <p14:creationId xmlns:p14="http://schemas.microsoft.com/office/powerpoint/2010/main" val="3857748052"/>
       </p:ext>
     </p:extLst>
   </p:cSld>
@@ -8741,6 +8983,870 @@
           <p:cNvPr id="2" name="Title 1">
             <a:extLst>
               <a:ext uri="{FF2B5EF4-FFF2-40B4-BE49-F238E27FC236}">
+                <a16:creationId xmlns:a16="http://schemas.microsoft.com/office/drawing/2014/main" id="{79DC8F7E-8D94-4CDF-879A-50676E8405EF}"/>
+              </a:ext>
+            </a:extLst>
+          </p:cNvPr>
+          <p:cNvSpPr>
+            <a:spLocks noGrp="1"/>
+          </p:cNvSpPr>
+          <p:nvPr>
+            <p:ph type="title"/>
+          </p:nvPr>
+        </p:nvSpPr>
+        <p:spPr>
+          <a:xfrm>
+            <a:off x="1790699" y="657554"/>
+            <a:ext cx="8610600" cy="853412"/>
+          </a:xfrm>
+        </p:spPr>
+        <p:txBody>
+          <a:bodyPr>
+            <a:normAutofit/>
+          </a:bodyPr>
+          <a:lstStyle/>
+          <a:p>
+            <a:pPr algn="ctr"/>
+            <a:r>
+              <a:rPr lang="en-IN" sz="4000" dirty="0">
+                <a:solidFill>
+                  <a:schemeClr val="tx1">
+                    <a:lumMod val="95000"/>
+                    <a:lumOff val="5000"/>
+                  </a:schemeClr>
+                </a:solidFill>
+                <a:latin typeface="Times New Roman" panose="02020603050405020304" pitchFamily="18" charset="0"/>
+                <a:cs typeface="Times New Roman" panose="02020603050405020304" pitchFamily="18" charset="0"/>
+              </a:rPr>
+              <a:t>CHALLENGES</a:t>
+            </a:r>
+          </a:p>
+        </p:txBody>
+      </p:sp>
+      <p:sp>
+        <p:nvSpPr>
+          <p:cNvPr id="4" name="Rectangle 1">
+            <a:extLst>
+              <a:ext uri="{FF2B5EF4-FFF2-40B4-BE49-F238E27FC236}">
+                <a16:creationId xmlns:a16="http://schemas.microsoft.com/office/drawing/2014/main" id="{118669F8-778B-C649-FE1B-70BDCFEEB936}"/>
+              </a:ext>
+            </a:extLst>
+          </p:cNvPr>
+          <p:cNvSpPr>
+            <a:spLocks noGrp="1" noChangeArrowheads="1"/>
+          </p:cNvSpPr>
+          <p:nvPr>
+            <p:ph idx="1"/>
+          </p:nvPr>
+        </p:nvSpPr>
+        <p:spPr bwMode="auto">
+          <a:xfrm>
+            <a:off x="2166394" y="1945801"/>
+            <a:ext cx="7859209" cy="3971536"/>
+          </a:xfrm>
+          <a:prstGeom prst="rect">
+            <a:avLst/>
+          </a:prstGeom>
+          <a:noFill/>
+          <a:ln>
+            <a:noFill/>
+          </a:ln>
+          <a:effectLst/>
+          <a:extLst>
+            <a:ext uri="{909E8E84-426E-40DD-AFC4-6F175D3DCCD1}">
+              <a14:hiddenFill xmlns:a14="http://schemas.microsoft.com/office/drawing/2010/main">
+                <a:solidFill>
+                  <a:schemeClr val="accent1"/>
+                </a:solidFill>
+              </a14:hiddenFill>
+            </a:ext>
+            <a:ext uri="{91240B29-F687-4F45-9708-019B960494DF}">
+              <a14:hiddenLine xmlns:a14="http://schemas.microsoft.com/office/drawing/2010/main" w="9525">
+                <a:solidFill>
+                  <a:schemeClr val="tx1"/>
+                </a:solidFill>
+                <a:miter lim="800000"/>
+                <a:headEnd/>
+                <a:tailEnd/>
+              </a14:hiddenLine>
+            </a:ext>
+            <a:ext uri="{AF507438-7753-43E0-B8FC-AC1667EBCBE1}">
+              <a14:hiddenEffects xmlns:a14="http://schemas.microsoft.com/office/drawing/2010/main">
+                <a:effectLst>
+                  <a:outerShdw dist="35921" dir="2700000" algn="ctr" rotWithShape="0">
+                    <a:schemeClr val="bg2"/>
+                  </a:outerShdw>
+                </a:effectLst>
+              </a14:hiddenEffects>
+            </a:ext>
+          </a:extLst>
+        </p:spPr>
+        <p:txBody>
+          <a:bodyPr vert="horz" wrap="square" lIns="91440" tIns="45720" rIns="91440" bIns="45720" numCol="1" anchor="ctr" anchorCtr="0" compatLnSpc="1">
+            <a:prstTxWarp prst="textNoShape">
+              <a:avLst/>
+            </a:prstTxWarp>
+            <a:spAutoFit/>
+          </a:bodyPr>
+          <a:lstStyle/>
+          <a:p>
+            <a:pPr marR="0" lvl="0" algn="l" defTabSz="914400" rtl="0" eaLnBrk="0" fontAlgn="base" latinLnBrk="0" hangingPunct="0">
+              <a:lnSpc>
+                <a:spcPct val="200000"/>
+              </a:lnSpc>
+              <a:spcBef>
+                <a:spcPct val="0"/>
+              </a:spcBef>
+              <a:spcAft>
+                <a:spcPct val="0"/>
+              </a:spcAft>
+              <a:buClrTx/>
+              <a:buSzTx/>
+              <a:buFont typeface="Courier New" panose="02070309020205020404" pitchFamily="49" charset="0"/>
+              <a:buChar char="o"/>
+              <a:tabLst/>
+            </a:pPr>
+            <a:r>
+              <a:rPr kumimoji="0" lang="en-US" altLang="en-US" sz="2600" b="0" i="0" u="none" strike="noStrike" cap="none" normalizeH="0" baseline="0" dirty="0">
+                <a:ln>
+                  <a:noFill/>
+                </a:ln>
+                <a:solidFill>
+                  <a:schemeClr val="tx1">
+                    <a:lumMod val="95000"/>
+                    <a:lumOff val="5000"/>
+                  </a:schemeClr>
+                </a:solidFill>
+                <a:effectLst/>
+                <a:latin typeface="Times New Roman" panose="02020603050405020304" pitchFamily="18" charset="0"/>
+                <a:cs typeface="Times New Roman" panose="02020603050405020304" pitchFamily="18" charset="0"/>
+              </a:rPr>
+              <a:t> Cleaning the large eVED dataset</a:t>
+            </a:r>
+          </a:p>
+          <a:p>
+            <a:pPr marR="0" lvl="0" algn="l" defTabSz="914400" rtl="0" eaLnBrk="0" fontAlgn="base" latinLnBrk="0" hangingPunct="0">
+              <a:lnSpc>
+                <a:spcPct val="200000"/>
+              </a:lnSpc>
+              <a:spcBef>
+                <a:spcPct val="0"/>
+              </a:spcBef>
+              <a:spcAft>
+                <a:spcPct val="0"/>
+              </a:spcAft>
+              <a:buClrTx/>
+              <a:buSzTx/>
+              <a:buFont typeface="Courier New" panose="02070309020205020404" pitchFamily="49" charset="0"/>
+              <a:buChar char="o"/>
+              <a:tabLst/>
+            </a:pPr>
+            <a:r>
+              <a:rPr kumimoji="0" lang="en-US" altLang="en-US" sz="2600" b="0" i="0" u="none" strike="noStrike" cap="none" normalizeH="0" baseline="0" dirty="0">
+                <a:ln>
+                  <a:noFill/>
+                </a:ln>
+                <a:solidFill>
+                  <a:schemeClr val="tx1">
+                    <a:lumMod val="95000"/>
+                    <a:lumOff val="5000"/>
+                  </a:schemeClr>
+                </a:solidFill>
+                <a:effectLst/>
+                <a:latin typeface="Times New Roman" panose="02020603050405020304" pitchFamily="18" charset="0"/>
+                <a:cs typeface="Times New Roman" panose="02020603050405020304" pitchFamily="18" charset="0"/>
+              </a:rPr>
+              <a:t> Mapping GPS points with elevation data</a:t>
+            </a:r>
+          </a:p>
+          <a:p>
+            <a:pPr marR="0" lvl="0" algn="l" defTabSz="914400" rtl="0" eaLnBrk="0" fontAlgn="base" latinLnBrk="0" hangingPunct="0">
+              <a:lnSpc>
+                <a:spcPct val="200000"/>
+              </a:lnSpc>
+              <a:spcBef>
+                <a:spcPct val="0"/>
+              </a:spcBef>
+              <a:spcAft>
+                <a:spcPct val="0"/>
+              </a:spcAft>
+              <a:buClrTx/>
+              <a:buSzTx/>
+              <a:buFont typeface="Courier New" panose="02070309020205020404" pitchFamily="49" charset="0"/>
+              <a:buChar char="o"/>
+              <a:tabLst/>
+            </a:pPr>
+            <a:r>
+              <a:rPr kumimoji="0" lang="en-US" altLang="en-US" sz="2600" b="0" i="0" u="none" strike="noStrike" cap="none" normalizeH="0" baseline="0" dirty="0">
+                <a:ln>
+                  <a:noFill/>
+                </a:ln>
+                <a:solidFill>
+                  <a:schemeClr val="tx1">
+                    <a:lumMod val="95000"/>
+                    <a:lumOff val="5000"/>
+                  </a:schemeClr>
+                </a:solidFill>
+                <a:effectLst/>
+                <a:latin typeface="Times New Roman" panose="02020603050405020304" pitchFamily="18" charset="0"/>
+                <a:cs typeface="Times New Roman" panose="02020603050405020304" pitchFamily="18" charset="0"/>
+              </a:rPr>
+              <a:t> Integrating multiple APIs together</a:t>
+            </a:r>
+          </a:p>
+          <a:p>
+            <a:pPr marR="0" lvl="0" algn="l" defTabSz="914400" rtl="0" eaLnBrk="0" fontAlgn="base" latinLnBrk="0" hangingPunct="0">
+              <a:lnSpc>
+                <a:spcPct val="200000"/>
+              </a:lnSpc>
+              <a:spcBef>
+                <a:spcPct val="0"/>
+              </a:spcBef>
+              <a:spcAft>
+                <a:spcPct val="0"/>
+              </a:spcAft>
+              <a:buClrTx/>
+              <a:buSzTx/>
+              <a:buFont typeface="Courier New" panose="02070309020205020404" pitchFamily="49" charset="0"/>
+              <a:buChar char="o"/>
+              <a:tabLst/>
+            </a:pPr>
+            <a:r>
+              <a:rPr kumimoji="0" lang="en-US" altLang="en-US" sz="2600" b="0" i="0" u="none" strike="noStrike" cap="none" normalizeH="0" baseline="0" dirty="0">
+                <a:ln>
+                  <a:noFill/>
+                </a:ln>
+                <a:solidFill>
+                  <a:schemeClr val="tx1">
+                    <a:lumMod val="95000"/>
+                    <a:lumOff val="5000"/>
+                  </a:schemeClr>
+                </a:solidFill>
+                <a:effectLst/>
+                <a:latin typeface="Times New Roman" panose="02020603050405020304" pitchFamily="18" charset="0"/>
+                <a:cs typeface="Times New Roman" panose="02020603050405020304" pitchFamily="18" charset="0"/>
+              </a:rPr>
+              <a:t> Ensuring ML model accuracy</a:t>
+            </a:r>
+          </a:p>
+          <a:p>
+            <a:pPr marR="0" lvl="0" algn="l" defTabSz="914400" rtl="0" eaLnBrk="0" fontAlgn="base" latinLnBrk="0" hangingPunct="0">
+              <a:lnSpc>
+                <a:spcPct val="200000"/>
+              </a:lnSpc>
+              <a:spcBef>
+                <a:spcPct val="0"/>
+              </a:spcBef>
+              <a:spcAft>
+                <a:spcPct val="0"/>
+              </a:spcAft>
+              <a:buClrTx/>
+              <a:buSzTx/>
+              <a:buFont typeface="Courier New" panose="02070309020205020404" pitchFamily="49" charset="0"/>
+              <a:buChar char="o"/>
+              <a:tabLst/>
+            </a:pPr>
+            <a:r>
+              <a:rPr kumimoji="0" lang="en-US" altLang="en-US" sz="2600" b="0" i="0" u="none" strike="noStrike" cap="none" normalizeH="0" baseline="0" dirty="0">
+                <a:ln>
+                  <a:noFill/>
+                </a:ln>
+                <a:solidFill>
+                  <a:schemeClr val="tx1">
+                    <a:lumMod val="95000"/>
+                    <a:lumOff val="5000"/>
+                  </a:schemeClr>
+                </a:solidFill>
+                <a:effectLst/>
+                <a:latin typeface="Times New Roman" panose="02020603050405020304" pitchFamily="18" charset="0"/>
+                <a:cs typeface="Times New Roman" panose="02020603050405020304" pitchFamily="18" charset="0"/>
+              </a:rPr>
+              <a:t> Real-time traffic handling</a:t>
+            </a:r>
+          </a:p>
+        </p:txBody>
+      </p:sp>
+    </p:spTree>
+    <p:extLst>
+      <p:ext uri="{BB962C8B-B14F-4D97-AF65-F5344CB8AC3E}">
+        <p14:creationId xmlns:p14="http://schemas.microsoft.com/office/powerpoint/2010/main" val="1801051199"/>
+      </p:ext>
+    </p:extLst>
+  </p:cSld>
+  <p:clrMapOvr>
+    <a:masterClrMapping/>
+  </p:clrMapOvr>
+</p:sld>
+</file>
+
+<file path=ppt/slides/slide13.xml><?xml version="1.0" encoding="utf-8"?>
+<p:sld xmlns:a="http://schemas.openxmlformats.org/drawingml/2006/main" xmlns:r="http://schemas.openxmlformats.org/officeDocument/2006/relationships" xmlns:p="http://schemas.openxmlformats.org/presentationml/2006/main">
+  <p:cSld>
+    <p:spTree>
+      <p:nvGrpSpPr>
+        <p:cNvPr id="1" name=""/>
+        <p:cNvGrpSpPr/>
+        <p:nvPr/>
+      </p:nvGrpSpPr>
+      <p:grpSpPr>
+        <a:xfrm>
+          <a:off x="0" y="0"/>
+          <a:ext cx="0" cy="0"/>
+          <a:chOff x="0" y="0"/>
+          <a:chExt cx="0" cy="0"/>
+        </a:xfrm>
+      </p:grpSpPr>
+      <p:sp>
+        <p:nvSpPr>
+          <p:cNvPr id="2" name="Title 1">
+            <a:extLst>
+              <a:ext uri="{FF2B5EF4-FFF2-40B4-BE49-F238E27FC236}">
+                <a16:creationId xmlns:a16="http://schemas.microsoft.com/office/drawing/2014/main" id="{FE3A7009-EC58-0EAD-D0F2-66EB623795C3}"/>
+              </a:ext>
+            </a:extLst>
+          </p:cNvPr>
+          <p:cNvSpPr>
+            <a:spLocks noGrp="1"/>
+          </p:cNvSpPr>
+          <p:nvPr>
+            <p:ph type="title"/>
+          </p:nvPr>
+        </p:nvSpPr>
+        <p:spPr>
+          <a:xfrm>
+            <a:off x="1790700" y="890103"/>
+            <a:ext cx="8610600" cy="694334"/>
+          </a:xfrm>
+        </p:spPr>
+        <p:txBody>
+          <a:bodyPr>
+            <a:noAutofit/>
+          </a:bodyPr>
+          <a:lstStyle/>
+          <a:p>
+            <a:pPr algn="ctr"/>
+            <a:r>
+              <a:rPr lang="en-IN" sz="4000" dirty="0">
+                <a:solidFill>
+                  <a:schemeClr val="tx1">
+                    <a:lumMod val="95000"/>
+                    <a:lumOff val="5000"/>
+                  </a:schemeClr>
+                </a:solidFill>
+                <a:latin typeface="Times New Roman" panose="02020603050405020304" pitchFamily="18" charset="0"/>
+                <a:cs typeface="Times New Roman" panose="02020603050405020304" pitchFamily="18" charset="0"/>
+              </a:rPr>
+              <a:t>LIMITATIONS </a:t>
+            </a:r>
+          </a:p>
+        </p:txBody>
+      </p:sp>
+      <p:sp>
+        <p:nvSpPr>
+          <p:cNvPr id="4" name="Rectangle 1">
+            <a:extLst>
+              <a:ext uri="{FF2B5EF4-FFF2-40B4-BE49-F238E27FC236}">
+                <a16:creationId xmlns:a16="http://schemas.microsoft.com/office/drawing/2014/main" id="{34D500E3-998C-1297-BB00-DB7949F65A6C}"/>
+              </a:ext>
+            </a:extLst>
+          </p:cNvPr>
+          <p:cNvSpPr>
+            <a:spLocks noGrp="1" noChangeArrowheads="1"/>
+          </p:cNvSpPr>
+          <p:nvPr>
+            <p:ph idx="1"/>
+          </p:nvPr>
+        </p:nvSpPr>
+        <p:spPr bwMode="auto">
+          <a:xfrm>
+            <a:off x="1871240" y="1996361"/>
+            <a:ext cx="8449519" cy="3971536"/>
+          </a:xfrm>
+          <a:prstGeom prst="rect">
+            <a:avLst/>
+          </a:prstGeom>
+          <a:noFill/>
+          <a:ln>
+            <a:noFill/>
+          </a:ln>
+          <a:effectLst/>
+          <a:extLst>
+            <a:ext uri="{909E8E84-426E-40DD-AFC4-6F175D3DCCD1}">
+              <a14:hiddenFill xmlns:a14="http://schemas.microsoft.com/office/drawing/2010/main">
+                <a:solidFill>
+                  <a:schemeClr val="accent1"/>
+                </a:solidFill>
+              </a14:hiddenFill>
+            </a:ext>
+            <a:ext uri="{91240B29-F687-4F45-9708-019B960494DF}">
+              <a14:hiddenLine xmlns:a14="http://schemas.microsoft.com/office/drawing/2010/main" w="9525">
+                <a:solidFill>
+                  <a:schemeClr val="tx1"/>
+                </a:solidFill>
+                <a:miter lim="800000"/>
+                <a:headEnd/>
+                <a:tailEnd/>
+              </a14:hiddenLine>
+            </a:ext>
+            <a:ext uri="{AF507438-7753-43E0-B8FC-AC1667EBCBE1}">
+              <a14:hiddenEffects xmlns:a14="http://schemas.microsoft.com/office/drawing/2010/main">
+                <a:effectLst>
+                  <a:outerShdw dist="35921" dir="2700000" algn="ctr" rotWithShape="0">
+                    <a:schemeClr val="bg2"/>
+                  </a:outerShdw>
+                </a:effectLst>
+              </a14:hiddenEffects>
+            </a:ext>
+          </a:extLst>
+        </p:spPr>
+        <p:txBody>
+          <a:bodyPr vert="horz" wrap="square" lIns="91440" tIns="45720" rIns="91440" bIns="45720" numCol="1" anchor="ctr" anchorCtr="0" compatLnSpc="1">
+            <a:prstTxWarp prst="textNoShape">
+              <a:avLst/>
+            </a:prstTxWarp>
+            <a:spAutoFit/>
+          </a:bodyPr>
+          <a:lstStyle/>
+          <a:p>
+            <a:pPr marR="0" lvl="0" algn="l" defTabSz="914400" rtl="0" eaLnBrk="0" fontAlgn="base" latinLnBrk="0" hangingPunct="0">
+              <a:lnSpc>
+                <a:spcPct val="200000"/>
+              </a:lnSpc>
+              <a:spcBef>
+                <a:spcPct val="0"/>
+              </a:spcBef>
+              <a:spcAft>
+                <a:spcPct val="0"/>
+              </a:spcAft>
+              <a:buClrTx/>
+              <a:buSzTx/>
+              <a:buFont typeface="Courier New" panose="02070309020205020404" pitchFamily="49" charset="0"/>
+              <a:buChar char="o"/>
+              <a:tabLst/>
+            </a:pPr>
+            <a:r>
+              <a:rPr kumimoji="0" lang="en-US" altLang="en-US" sz="2600" b="0" i="0" u="none" strike="noStrike" cap="none" normalizeH="0" baseline="0" dirty="0">
+                <a:ln>
+                  <a:noFill/>
+                </a:ln>
+                <a:solidFill>
+                  <a:schemeClr val="tx1">
+                    <a:lumMod val="95000"/>
+                    <a:lumOff val="5000"/>
+                  </a:schemeClr>
+                </a:solidFill>
+                <a:effectLst/>
+                <a:latin typeface="Times New Roman" panose="02020603050405020304" pitchFamily="18" charset="0"/>
+                <a:cs typeface="Times New Roman" panose="02020603050405020304" pitchFamily="18" charset="0"/>
+              </a:rPr>
+              <a:t> Dependent on availability of API data</a:t>
+            </a:r>
+          </a:p>
+          <a:p>
+            <a:pPr marR="0" lvl="0" algn="l" defTabSz="914400" rtl="0" eaLnBrk="0" fontAlgn="base" latinLnBrk="0" hangingPunct="0">
+              <a:lnSpc>
+                <a:spcPct val="200000"/>
+              </a:lnSpc>
+              <a:spcBef>
+                <a:spcPct val="0"/>
+              </a:spcBef>
+              <a:spcAft>
+                <a:spcPct val="0"/>
+              </a:spcAft>
+              <a:buClrTx/>
+              <a:buSzTx/>
+              <a:buFont typeface="Courier New" panose="02070309020205020404" pitchFamily="49" charset="0"/>
+              <a:buChar char="o"/>
+              <a:tabLst/>
+            </a:pPr>
+            <a:r>
+              <a:rPr kumimoji="0" lang="en-US" altLang="en-US" sz="2600" b="0" i="0" u="none" strike="noStrike" cap="none" normalizeH="0" baseline="0" dirty="0">
+                <a:ln>
+                  <a:noFill/>
+                </a:ln>
+                <a:solidFill>
+                  <a:schemeClr val="tx1">
+                    <a:lumMod val="95000"/>
+                    <a:lumOff val="5000"/>
+                  </a:schemeClr>
+                </a:solidFill>
+                <a:effectLst/>
+                <a:latin typeface="Times New Roman" panose="02020603050405020304" pitchFamily="18" charset="0"/>
+                <a:cs typeface="Times New Roman" panose="02020603050405020304" pitchFamily="18" charset="0"/>
+              </a:rPr>
+              <a:t> Not real-time without constant updates</a:t>
+            </a:r>
+          </a:p>
+          <a:p>
+            <a:pPr marR="0" lvl="0" algn="l" defTabSz="914400" rtl="0" eaLnBrk="0" fontAlgn="base" latinLnBrk="0" hangingPunct="0">
+              <a:lnSpc>
+                <a:spcPct val="200000"/>
+              </a:lnSpc>
+              <a:spcBef>
+                <a:spcPct val="0"/>
+              </a:spcBef>
+              <a:spcAft>
+                <a:spcPct val="0"/>
+              </a:spcAft>
+              <a:buClrTx/>
+              <a:buSzTx/>
+              <a:buFont typeface="Courier New" panose="02070309020205020404" pitchFamily="49" charset="0"/>
+              <a:buChar char="o"/>
+              <a:tabLst/>
+            </a:pPr>
+            <a:r>
+              <a:rPr kumimoji="0" lang="en-US" altLang="en-US" sz="2600" b="0" i="0" u="none" strike="noStrike" cap="none" normalizeH="0" baseline="0" dirty="0">
+                <a:ln>
+                  <a:noFill/>
+                </a:ln>
+                <a:solidFill>
+                  <a:schemeClr val="tx1">
+                    <a:lumMod val="95000"/>
+                    <a:lumOff val="5000"/>
+                  </a:schemeClr>
+                </a:solidFill>
+                <a:effectLst/>
+                <a:latin typeface="Times New Roman" panose="02020603050405020304" pitchFamily="18" charset="0"/>
+                <a:cs typeface="Times New Roman" panose="02020603050405020304" pitchFamily="18" charset="0"/>
+              </a:rPr>
+              <a:t> Accuracy depends on dataset quality</a:t>
+            </a:r>
+          </a:p>
+          <a:p>
+            <a:pPr marR="0" lvl="0" algn="l" defTabSz="914400" rtl="0" eaLnBrk="0" fontAlgn="base" latinLnBrk="0" hangingPunct="0">
+              <a:lnSpc>
+                <a:spcPct val="200000"/>
+              </a:lnSpc>
+              <a:spcBef>
+                <a:spcPct val="0"/>
+              </a:spcBef>
+              <a:spcAft>
+                <a:spcPct val="0"/>
+              </a:spcAft>
+              <a:buClrTx/>
+              <a:buSzTx/>
+              <a:buFont typeface="Courier New" panose="02070309020205020404" pitchFamily="49" charset="0"/>
+              <a:buChar char="o"/>
+              <a:tabLst/>
+            </a:pPr>
+            <a:r>
+              <a:rPr kumimoji="0" lang="en-US" altLang="en-US" sz="2600" b="0" i="0" u="none" strike="noStrike" cap="none" normalizeH="0" baseline="0" dirty="0">
+                <a:ln>
+                  <a:noFill/>
+                </a:ln>
+                <a:solidFill>
+                  <a:schemeClr val="tx1">
+                    <a:lumMod val="95000"/>
+                    <a:lumOff val="5000"/>
+                  </a:schemeClr>
+                </a:solidFill>
+                <a:effectLst/>
+                <a:latin typeface="Times New Roman" panose="02020603050405020304" pitchFamily="18" charset="0"/>
+                <a:cs typeface="Times New Roman" panose="02020603050405020304" pitchFamily="18" charset="0"/>
+              </a:rPr>
+              <a:t> Heavy computation for long routes</a:t>
+            </a:r>
+          </a:p>
+          <a:p>
+            <a:pPr marR="0" lvl="0" algn="l" defTabSz="914400" rtl="0" eaLnBrk="0" fontAlgn="base" latinLnBrk="0" hangingPunct="0">
+              <a:lnSpc>
+                <a:spcPct val="200000"/>
+              </a:lnSpc>
+              <a:spcBef>
+                <a:spcPct val="0"/>
+              </a:spcBef>
+              <a:spcAft>
+                <a:spcPct val="0"/>
+              </a:spcAft>
+              <a:buClrTx/>
+              <a:buSzTx/>
+              <a:buFont typeface="Courier New" panose="02070309020205020404" pitchFamily="49" charset="0"/>
+              <a:buChar char="o"/>
+              <a:tabLst/>
+            </a:pPr>
+            <a:r>
+              <a:rPr kumimoji="0" lang="en-US" altLang="en-US" sz="2600" b="0" i="0" u="none" strike="noStrike" cap="none" normalizeH="0" baseline="0" dirty="0">
+                <a:ln>
+                  <a:noFill/>
+                </a:ln>
+                <a:solidFill>
+                  <a:schemeClr val="tx1">
+                    <a:lumMod val="95000"/>
+                    <a:lumOff val="5000"/>
+                  </a:schemeClr>
+                </a:solidFill>
+                <a:effectLst/>
+                <a:latin typeface="Times New Roman" panose="02020603050405020304" pitchFamily="18" charset="0"/>
+                <a:cs typeface="Times New Roman" panose="02020603050405020304" pitchFamily="18" charset="0"/>
+              </a:rPr>
+              <a:t> Traffic data may sometimes be inaccurate</a:t>
+            </a:r>
+          </a:p>
+        </p:txBody>
+      </p:sp>
+    </p:spTree>
+    <p:extLst>
+      <p:ext uri="{BB962C8B-B14F-4D97-AF65-F5344CB8AC3E}">
+        <p14:creationId xmlns:p14="http://schemas.microsoft.com/office/powerpoint/2010/main" val="238556372"/>
+      </p:ext>
+    </p:extLst>
+  </p:cSld>
+  <p:clrMapOvr>
+    <a:masterClrMapping/>
+  </p:clrMapOvr>
+</p:sld>
+</file>
+
+<file path=ppt/slides/slide14.xml><?xml version="1.0" encoding="utf-8"?>
+<p:sld xmlns:a="http://schemas.openxmlformats.org/drawingml/2006/main" xmlns:r="http://schemas.openxmlformats.org/officeDocument/2006/relationships" xmlns:p="http://schemas.openxmlformats.org/presentationml/2006/main">
+  <p:cSld>
+    <p:spTree>
+      <p:nvGrpSpPr>
+        <p:cNvPr id="1" name=""/>
+        <p:cNvGrpSpPr/>
+        <p:nvPr/>
+      </p:nvGrpSpPr>
+      <p:grpSpPr>
+        <a:xfrm>
+          <a:off x="0" y="0"/>
+          <a:ext cx="0" cy="0"/>
+          <a:chOff x="0" y="0"/>
+          <a:chExt cx="0" cy="0"/>
+        </a:xfrm>
+      </p:grpSpPr>
+      <p:sp>
+        <p:nvSpPr>
+          <p:cNvPr id="2" name="Title 1">
+            <a:extLst>
+              <a:ext uri="{FF2B5EF4-FFF2-40B4-BE49-F238E27FC236}">
+                <a16:creationId xmlns:a16="http://schemas.microsoft.com/office/drawing/2014/main" id="{6C4BB1DA-3937-4CF1-4397-011DB3893B7A}"/>
+              </a:ext>
+            </a:extLst>
+          </p:cNvPr>
+          <p:cNvSpPr>
+            <a:spLocks noGrp="1"/>
+          </p:cNvSpPr>
+          <p:nvPr>
+            <p:ph type="title"/>
+          </p:nvPr>
+        </p:nvSpPr>
+        <p:spPr>
+          <a:xfrm>
+            <a:off x="1640156" y="230918"/>
+            <a:ext cx="8911687" cy="1280890"/>
+          </a:xfrm>
+        </p:spPr>
+        <p:txBody>
+          <a:bodyPr>
+            <a:normAutofit/>
+          </a:bodyPr>
+          <a:lstStyle/>
+          <a:p>
+            <a:pPr algn="ctr"/>
+            <a:r>
+              <a:rPr lang="en-US" sz="4000" dirty="0">
+                <a:latin typeface="Times New Roman" panose="02020603050405020304" pitchFamily="18" charset="0"/>
+                <a:cs typeface="Times New Roman" panose="02020603050405020304" pitchFamily="18" charset="0"/>
+              </a:rPr>
+              <a:t>FUTURE SCOPE</a:t>
+            </a:r>
+          </a:p>
+        </p:txBody>
+      </p:sp>
+      <p:sp>
+        <p:nvSpPr>
+          <p:cNvPr id="3" name="Content Placeholder 2">
+            <a:extLst>
+              <a:ext uri="{FF2B5EF4-FFF2-40B4-BE49-F238E27FC236}">
+                <a16:creationId xmlns:a16="http://schemas.microsoft.com/office/drawing/2014/main" id="{4AB4185B-92A2-FBD9-CE8D-CA9D13D02F65}"/>
+              </a:ext>
+            </a:extLst>
+          </p:cNvPr>
+          <p:cNvSpPr>
+            <a:spLocks noGrp="1"/>
+          </p:cNvSpPr>
+          <p:nvPr>
+            <p:ph idx="1"/>
+          </p:nvPr>
+        </p:nvSpPr>
+        <p:spPr>
+          <a:xfrm>
+            <a:off x="1640156" y="1136904"/>
+            <a:ext cx="8915400" cy="5199888"/>
+          </a:xfrm>
+        </p:spPr>
+        <p:txBody>
+          <a:bodyPr>
+            <a:normAutofit fontScale="85000" lnSpcReduction="10000"/>
+          </a:bodyPr>
+          <a:lstStyle/>
+          <a:p>
+            <a:pPr>
+              <a:lnSpc>
+                <a:spcPct val="160000"/>
+              </a:lnSpc>
+            </a:pPr>
+            <a:r>
+              <a:rPr lang="en-US" b="1" dirty="0">
+                <a:latin typeface="Times New Roman" panose="02020603050405020304" pitchFamily="18" charset="0"/>
+                <a:cs typeface="Times New Roman" panose="02020603050405020304" pitchFamily="18" charset="0"/>
+              </a:rPr>
+              <a:t>EV Battery-Aware Route Optimization:</a:t>
+            </a:r>
+            <a:r>
+              <a:rPr lang="en-US" dirty="0">
+                <a:latin typeface="Times New Roman" panose="02020603050405020304" pitchFamily="18" charset="0"/>
+                <a:cs typeface="Times New Roman" panose="02020603050405020304" pitchFamily="18" charset="0"/>
+              </a:rPr>
+              <a:t> Extend the system for electric vehicles by considering current battery status, distance, traffic, and available charging station locations to optimize energy-efficient travel.</a:t>
+            </a:r>
+          </a:p>
+          <a:p>
+            <a:pPr>
+              <a:lnSpc>
+                <a:spcPct val="160000"/>
+              </a:lnSpc>
+            </a:pPr>
+            <a:r>
+              <a:rPr lang="en-US" b="1" dirty="0">
+                <a:latin typeface="Times New Roman" panose="02020603050405020304" pitchFamily="18" charset="0"/>
+                <a:cs typeface="Times New Roman" panose="02020603050405020304" pitchFamily="18" charset="0"/>
+              </a:rPr>
+              <a:t>Real-Time Sensor Integration (OBD-II):</a:t>
+            </a:r>
+            <a:r>
+              <a:rPr lang="en-US" dirty="0">
+                <a:latin typeface="Times New Roman" panose="02020603050405020304" pitchFamily="18" charset="0"/>
+                <a:cs typeface="Times New Roman" panose="02020603050405020304" pitchFamily="18" charset="0"/>
+              </a:rPr>
+              <a:t> Connect with live vehicle data through OBD-II interface to access real-time speed, engine performance, and fuel usage — allowing dynamic route adjustment based on actual vehicle conditions.</a:t>
+            </a:r>
+          </a:p>
+          <a:p>
+            <a:pPr>
+              <a:lnSpc>
+                <a:spcPct val="160000"/>
+              </a:lnSpc>
+            </a:pPr>
+            <a:r>
+              <a:rPr lang="en-US" b="1" dirty="0">
+                <a:latin typeface="Times New Roman" panose="02020603050405020304" pitchFamily="18" charset="0"/>
+                <a:cs typeface="Times New Roman" panose="02020603050405020304" pitchFamily="18" charset="0"/>
+              </a:rPr>
+              <a:t>Pothole-Aware Routing:</a:t>
+            </a:r>
+            <a:r>
+              <a:rPr lang="en-US" dirty="0">
+                <a:latin typeface="Times New Roman" panose="02020603050405020304" pitchFamily="18" charset="0"/>
+                <a:cs typeface="Times New Roman" panose="02020603050405020304" pitchFamily="18" charset="0"/>
+              </a:rPr>
+              <a:t> Use vehicle sensor and smartphone data to detect road surface irregularities like potholes and recommend smoother alternative routes, improving ride comfort and reducing vehicle wear.</a:t>
+            </a:r>
+          </a:p>
+          <a:p>
+            <a:pPr>
+              <a:lnSpc>
+                <a:spcPct val="160000"/>
+              </a:lnSpc>
+            </a:pPr>
+            <a:r>
+              <a:rPr lang="en-US" b="1" dirty="0">
+                <a:latin typeface="Times New Roman" panose="02020603050405020304" pitchFamily="18" charset="0"/>
+                <a:cs typeface="Times New Roman" panose="02020603050405020304" pitchFamily="18" charset="0"/>
+              </a:rPr>
+              <a:t>Reinforcement Learning for Adaptive Eco-Routing:</a:t>
+            </a:r>
+            <a:r>
+              <a:rPr lang="en-US" dirty="0">
+                <a:latin typeface="Times New Roman" panose="02020603050405020304" pitchFamily="18" charset="0"/>
+                <a:cs typeface="Times New Roman" panose="02020603050405020304" pitchFamily="18" charset="0"/>
+              </a:rPr>
+              <a:t> Apply RL techniques that continuously learn from traffic patterns, road conditions, and driver </a:t>
+            </a:r>
+            <a:r>
+              <a:rPr lang="en-US" dirty="0" err="1">
+                <a:latin typeface="Times New Roman" panose="02020603050405020304" pitchFamily="18" charset="0"/>
+                <a:cs typeface="Times New Roman" panose="02020603050405020304" pitchFamily="18" charset="0"/>
+              </a:rPr>
+              <a:t>behaviour</a:t>
+            </a:r>
+            <a:r>
+              <a:rPr lang="en-US" dirty="0">
+                <a:latin typeface="Times New Roman" panose="02020603050405020304" pitchFamily="18" charset="0"/>
+                <a:cs typeface="Times New Roman" panose="02020603050405020304" pitchFamily="18" charset="0"/>
+              </a:rPr>
+              <a:t> over time — dynamically improving route suggestions for maximum fuel efficiency.</a:t>
+            </a:r>
+          </a:p>
+          <a:p>
+            <a:pPr>
+              <a:lnSpc>
+                <a:spcPct val="160000"/>
+              </a:lnSpc>
+            </a:pPr>
+            <a:r>
+              <a:rPr lang="en-US" b="1" dirty="0">
+                <a:latin typeface="Times New Roman" panose="02020603050405020304" pitchFamily="18" charset="0"/>
+                <a:cs typeface="Times New Roman" panose="02020603050405020304" pitchFamily="18" charset="0"/>
+              </a:rPr>
+              <a:t>Integration with Public Transport Systems:</a:t>
+            </a:r>
+            <a:r>
+              <a:rPr lang="en-US" dirty="0">
+                <a:latin typeface="Times New Roman" panose="02020603050405020304" pitchFamily="18" charset="0"/>
+                <a:cs typeface="Times New Roman" panose="02020603050405020304" pitchFamily="18" charset="0"/>
+              </a:rPr>
+              <a:t> Combine personal vehicle routing with bus, metro, and train schedules to suggest hybrid multimodal travel options, reducing traffic congestion and promoting sustainable urban mobility.</a:t>
+            </a:r>
+          </a:p>
+          <a:p>
+            <a:pPr>
+              <a:lnSpc>
+                <a:spcPct val="160000"/>
+              </a:lnSpc>
+            </a:pPr>
+            <a:endParaRPr lang="en-US" dirty="0">
+              <a:latin typeface="Times New Roman" panose="02020603050405020304" pitchFamily="18" charset="0"/>
+              <a:cs typeface="Times New Roman" panose="02020603050405020304" pitchFamily="18" charset="0"/>
+            </a:endParaRPr>
+          </a:p>
+        </p:txBody>
+      </p:sp>
+    </p:spTree>
+    <p:extLst>
+      <p:ext uri="{BB962C8B-B14F-4D97-AF65-F5344CB8AC3E}">
+        <p14:creationId xmlns:p14="http://schemas.microsoft.com/office/powerpoint/2010/main" val="2860901386"/>
+      </p:ext>
+    </p:extLst>
+  </p:cSld>
+  <p:clrMapOvr>
+    <a:masterClrMapping/>
+  </p:clrMapOvr>
+</p:sld>
+</file>
+
+<file path=ppt/slides/slide15.xml><?xml version="1.0" encoding="utf-8"?>
+<p:sld xmlns:a="http://schemas.openxmlformats.org/drawingml/2006/main" xmlns:r="http://schemas.openxmlformats.org/officeDocument/2006/relationships" xmlns:p="http://schemas.openxmlformats.org/presentationml/2006/main">
+  <p:cSld>
+    <p:spTree>
+      <p:nvGrpSpPr>
+        <p:cNvPr id="1" name=""/>
+        <p:cNvGrpSpPr/>
+        <p:nvPr/>
+      </p:nvGrpSpPr>
+      <p:grpSpPr>
+        <a:xfrm>
+          <a:off x="0" y="0"/>
+          <a:ext cx="0" cy="0"/>
+          <a:chOff x="0" y="0"/>
+          <a:chExt cx="0" cy="0"/>
+        </a:xfrm>
+      </p:grpSpPr>
+      <p:sp>
+        <p:nvSpPr>
+          <p:cNvPr id="2" name="Title 1">
+            <a:extLst>
+              <a:ext uri="{FF2B5EF4-FFF2-40B4-BE49-F238E27FC236}">
                 <a16:creationId xmlns:a16="http://schemas.microsoft.com/office/drawing/2014/main" id="{6F81BC5D-D718-4890-9FC6-407C0B30EC8F}"/>
               </a:ext>
             </a:extLst>
@@ -9002,7 +10108,263 @@
 </p:sld>
 </file>
 
-<file path=ppt/slides/slide13.xml><?xml version="1.0" encoding="utf-8"?>
+<file path=ppt/slides/slide16.xml><?xml version="1.0" encoding="utf-8"?>
+<p:sld xmlns:a="http://schemas.openxmlformats.org/drawingml/2006/main" xmlns:r="http://schemas.openxmlformats.org/officeDocument/2006/relationships" xmlns:p="http://schemas.openxmlformats.org/presentationml/2006/main">
+  <p:cSld>
+    <p:spTree>
+      <p:nvGrpSpPr>
+        <p:cNvPr id="1" name=""/>
+        <p:cNvGrpSpPr/>
+        <p:nvPr/>
+      </p:nvGrpSpPr>
+      <p:grpSpPr>
+        <a:xfrm>
+          <a:off x="0" y="0"/>
+          <a:ext cx="0" cy="0"/>
+          <a:chOff x="0" y="0"/>
+          <a:chExt cx="0" cy="0"/>
+        </a:xfrm>
+      </p:grpSpPr>
+      <p:sp>
+        <p:nvSpPr>
+          <p:cNvPr id="2" name="Title 1">
+            <a:extLst>
+              <a:ext uri="{FF2B5EF4-FFF2-40B4-BE49-F238E27FC236}">
+                <a16:creationId xmlns:a16="http://schemas.microsoft.com/office/drawing/2014/main" id="{50CD4F82-9DC3-E7CC-47EA-1B79FA8295B0}"/>
+              </a:ext>
+            </a:extLst>
+          </p:cNvPr>
+          <p:cNvSpPr>
+            <a:spLocks noGrp="1"/>
+          </p:cNvSpPr>
+          <p:nvPr>
+            <p:ph type="title"/>
+          </p:nvPr>
+        </p:nvSpPr>
+        <p:spPr>
+          <a:xfrm>
+            <a:off x="1640156" y="523526"/>
+            <a:ext cx="8911687" cy="1280890"/>
+          </a:xfrm>
+        </p:spPr>
+        <p:txBody>
+          <a:bodyPr>
+            <a:normAutofit/>
+          </a:bodyPr>
+          <a:lstStyle/>
+          <a:p>
+            <a:pPr algn="ctr"/>
+            <a:r>
+              <a:rPr lang="en-US" sz="4000" dirty="0">
+                <a:latin typeface="Times New Roman" panose="02020603050405020304" pitchFamily="18" charset="0"/>
+                <a:cs typeface="Times New Roman" panose="02020603050405020304" pitchFamily="18" charset="0"/>
+              </a:rPr>
+              <a:t>REFERENCES</a:t>
+            </a:r>
+          </a:p>
+        </p:txBody>
+      </p:sp>
+      <p:sp>
+        <p:nvSpPr>
+          <p:cNvPr id="3" name="Content Placeholder 2">
+            <a:extLst>
+              <a:ext uri="{FF2B5EF4-FFF2-40B4-BE49-F238E27FC236}">
+                <a16:creationId xmlns:a16="http://schemas.microsoft.com/office/drawing/2014/main" id="{E5BB3711-AA17-1021-01AF-71D7004A4C53}"/>
+              </a:ext>
+            </a:extLst>
+          </p:cNvPr>
+          <p:cNvSpPr>
+            <a:spLocks noGrp="1"/>
+          </p:cNvSpPr>
+          <p:nvPr>
+            <p:ph idx="1"/>
+          </p:nvPr>
+        </p:nvSpPr>
+        <p:spPr>
+          <a:xfrm>
+            <a:off x="1638300" y="1362456"/>
+            <a:ext cx="8915400" cy="4818888"/>
+          </a:xfrm>
+        </p:spPr>
+        <p:txBody>
+          <a:bodyPr>
+            <a:normAutofit/>
+          </a:bodyPr>
+          <a:lstStyle/>
+          <a:p>
+            <a:r>
+              <a:rPr lang="en-US" dirty="0">
+                <a:latin typeface="Times New Roman" panose="02020603050405020304" pitchFamily="18" charset="0"/>
+                <a:cs typeface="Times New Roman" panose="02020603050405020304" pitchFamily="18" charset="0"/>
+              </a:rPr>
+              <a:t>B. Aslam, F. Khan, "Eco-Routing: Energy-Efficient Routing for Vehicles using Road and Traffic Information," </a:t>
+            </a:r>
+            <a:r>
+              <a:rPr lang="en-US" i="1" dirty="0">
+                <a:latin typeface="Times New Roman" panose="02020603050405020304" pitchFamily="18" charset="0"/>
+                <a:cs typeface="Times New Roman" panose="02020603050405020304" pitchFamily="18" charset="0"/>
+              </a:rPr>
+              <a:t>IEEE Transactions on Intelligent Transportation Systems</a:t>
+            </a:r>
+            <a:r>
+              <a:rPr lang="en-US" dirty="0">
+                <a:latin typeface="Times New Roman" panose="02020603050405020304" pitchFamily="18" charset="0"/>
+                <a:cs typeface="Times New Roman" panose="02020603050405020304" pitchFamily="18" charset="0"/>
+              </a:rPr>
+              <a:t>, 2019.</a:t>
+            </a:r>
+          </a:p>
+          <a:p>
+            <a:r>
+              <a:rPr lang="en-US" dirty="0">
+                <a:latin typeface="Times New Roman" panose="02020603050405020304" pitchFamily="18" charset="0"/>
+                <a:cs typeface="Times New Roman" panose="02020603050405020304" pitchFamily="18" charset="0"/>
+              </a:rPr>
+              <a:t>S. S. A. Shah et al., "Machine Learning-Based Fuel Consumption Prediction Using Vehicle Telematics Data," </a:t>
+            </a:r>
+            <a:r>
+              <a:rPr lang="en-US" i="1" dirty="0">
+                <a:latin typeface="Times New Roman" panose="02020603050405020304" pitchFamily="18" charset="0"/>
+                <a:cs typeface="Times New Roman" panose="02020603050405020304" pitchFamily="18" charset="0"/>
+              </a:rPr>
+              <a:t>Applied Energy</a:t>
+            </a:r>
+            <a:r>
+              <a:rPr lang="en-US" dirty="0">
+                <a:latin typeface="Times New Roman" panose="02020603050405020304" pitchFamily="18" charset="0"/>
+                <a:cs typeface="Times New Roman" panose="02020603050405020304" pitchFamily="18" charset="0"/>
+              </a:rPr>
+              <a:t>, vol. 260, 2020.</a:t>
+            </a:r>
+          </a:p>
+          <a:p>
+            <a:r>
+              <a:rPr lang="en-US" dirty="0">
+                <a:latin typeface="Times New Roman" panose="02020603050405020304" pitchFamily="18" charset="0"/>
+                <a:cs typeface="Times New Roman" panose="02020603050405020304" pitchFamily="18" charset="0"/>
+              </a:rPr>
+              <a:t>K. Boriboonsomsin and M. Barth, "Eco-Driving: Modeling and Control for Fuel Efficiency," </a:t>
+            </a:r>
+            <a:r>
+              <a:rPr lang="en-US" i="1" dirty="0">
+                <a:latin typeface="Times New Roman" panose="02020603050405020304" pitchFamily="18" charset="0"/>
+                <a:cs typeface="Times New Roman" panose="02020603050405020304" pitchFamily="18" charset="0"/>
+              </a:rPr>
+              <a:t>IEEE ITS</a:t>
+            </a:r>
+            <a:r>
+              <a:rPr lang="en-US" dirty="0">
+                <a:latin typeface="Times New Roman" panose="02020603050405020304" pitchFamily="18" charset="0"/>
+                <a:cs typeface="Times New Roman" panose="02020603050405020304" pitchFamily="18" charset="0"/>
+              </a:rPr>
+              <a:t>, 2014.</a:t>
+            </a:r>
+          </a:p>
+          <a:p>
+            <a:r>
+              <a:rPr lang="en-US" dirty="0">
+                <a:latin typeface="Times New Roman" panose="02020603050405020304" pitchFamily="18" charset="0"/>
+                <a:cs typeface="Times New Roman" panose="02020603050405020304" pitchFamily="18" charset="0"/>
+              </a:rPr>
+              <a:t>M. Barth and K. Boriboonsomsin, "Energy and Emissions Impact of Freeway Speed Limits and Lane Management Strategies," </a:t>
+            </a:r>
+            <a:r>
+              <a:rPr lang="en-US" i="1" dirty="0">
+                <a:latin typeface="Times New Roman" panose="02020603050405020304" pitchFamily="18" charset="0"/>
+                <a:cs typeface="Times New Roman" panose="02020603050405020304" pitchFamily="18" charset="0"/>
+              </a:rPr>
+              <a:t>Transportation Research Record</a:t>
+            </a:r>
+            <a:r>
+              <a:rPr lang="en-US" dirty="0">
+                <a:latin typeface="Times New Roman" panose="02020603050405020304" pitchFamily="18" charset="0"/>
+                <a:cs typeface="Times New Roman" panose="02020603050405020304" pitchFamily="18" charset="0"/>
+              </a:rPr>
+              <a:t>, 2008.</a:t>
+            </a:r>
+          </a:p>
+          <a:p>
+            <a:r>
+              <a:rPr lang="en-US" dirty="0">
+                <a:latin typeface="Times New Roman" panose="02020603050405020304" pitchFamily="18" charset="0"/>
+                <a:cs typeface="Times New Roman" panose="02020603050405020304" pitchFamily="18" charset="0"/>
+              </a:rPr>
+              <a:t>J. Kwon et al., "Impact of Road Grade on Vehicle Fuel Consumption," </a:t>
+            </a:r>
+            <a:r>
+              <a:rPr lang="en-US" i="1" dirty="0">
+                <a:latin typeface="Times New Roman" panose="02020603050405020304" pitchFamily="18" charset="0"/>
+                <a:cs typeface="Times New Roman" panose="02020603050405020304" pitchFamily="18" charset="0"/>
+              </a:rPr>
+              <a:t>Journal of Transportation Engineering</a:t>
+            </a:r>
+            <a:r>
+              <a:rPr lang="en-US" dirty="0">
+                <a:latin typeface="Times New Roman" panose="02020603050405020304" pitchFamily="18" charset="0"/>
+                <a:cs typeface="Times New Roman" panose="02020603050405020304" pitchFamily="18" charset="0"/>
+              </a:rPr>
+              <a:t>, 2013.</a:t>
+            </a:r>
+          </a:p>
+          <a:p>
+            <a:r>
+              <a:rPr lang="en-US" dirty="0">
+                <a:latin typeface="Times New Roman" panose="02020603050405020304" pitchFamily="18" charset="0"/>
+                <a:cs typeface="Times New Roman" panose="02020603050405020304" pitchFamily="18" charset="0"/>
+              </a:rPr>
+              <a:t>L. Sun et al., "Predicting Vehicle Energy Consumption Using Machine Learning Incorporating Road Grade and Driver </a:t>
+            </a:r>
+            <a:r>
+              <a:rPr lang="en-US" dirty="0" err="1">
+                <a:latin typeface="Times New Roman" panose="02020603050405020304" pitchFamily="18" charset="0"/>
+                <a:cs typeface="Times New Roman" panose="02020603050405020304" pitchFamily="18" charset="0"/>
+              </a:rPr>
+              <a:t>Behaviour</a:t>
+            </a:r>
+            <a:r>
+              <a:rPr lang="en-US" dirty="0">
+                <a:latin typeface="Times New Roman" panose="02020603050405020304" pitchFamily="18" charset="0"/>
+                <a:cs typeface="Times New Roman" panose="02020603050405020304" pitchFamily="18" charset="0"/>
+              </a:rPr>
+              <a:t>," </a:t>
+            </a:r>
+            <a:r>
+              <a:rPr lang="en-US" i="1" dirty="0">
+                <a:latin typeface="Times New Roman" panose="02020603050405020304" pitchFamily="18" charset="0"/>
+                <a:cs typeface="Times New Roman" panose="02020603050405020304" pitchFamily="18" charset="0"/>
+              </a:rPr>
+              <a:t>Energy</a:t>
+            </a:r>
+            <a:r>
+              <a:rPr lang="en-US" dirty="0">
+                <a:latin typeface="Times New Roman" panose="02020603050405020304" pitchFamily="18" charset="0"/>
+                <a:cs typeface="Times New Roman" panose="02020603050405020304" pitchFamily="18" charset="0"/>
+              </a:rPr>
+              <a:t>, 2021.</a:t>
+            </a:r>
+          </a:p>
+          <a:p>
+            <a:endParaRPr lang="en-US" dirty="0">
+              <a:latin typeface="Times New Roman" panose="02020603050405020304" pitchFamily="18" charset="0"/>
+              <a:cs typeface="Times New Roman" panose="02020603050405020304" pitchFamily="18" charset="0"/>
+            </a:endParaRPr>
+          </a:p>
+        </p:txBody>
+      </p:sp>
+    </p:spTree>
+    <p:extLst>
+      <p:ext uri="{BB962C8B-B14F-4D97-AF65-F5344CB8AC3E}">
+        <p14:creationId xmlns:p14="http://schemas.microsoft.com/office/powerpoint/2010/main" val="3134736965"/>
+      </p:ext>
+    </p:extLst>
+  </p:cSld>
+  <p:clrMapOvr>
+    <a:masterClrMapping/>
+  </p:clrMapOvr>
+</p:sld>
+</file>
+
+<file path=ppt/slides/slide17.xml><?xml version="1.0" encoding="utf-8"?>
 <p:sld xmlns:a="http://schemas.openxmlformats.org/drawingml/2006/main" xmlns:r="http://schemas.openxmlformats.org/officeDocument/2006/relationships" xmlns:p="http://schemas.openxmlformats.org/presentationml/2006/main">
   <p:cSld>
     <p:spTree>
@@ -9307,41 +10669,7 @@
                 <a:latin typeface="Times New Roman" panose="02020603050405020304" pitchFamily="18" charset="0"/>
                 <a:cs typeface="Times New Roman" panose="02020603050405020304" pitchFamily="18" charset="0"/>
               </a:rPr>
-              <a:t> They do not consider fuel usage, slope, driver </a:t>
-            </a:r>
-            <a:r>
-              <a:rPr kumimoji="0" lang="en-US" altLang="en-US" sz="2600" i="0" u="none" strike="noStrike" cap="none" normalizeH="0" baseline="0" dirty="0" err="1">
-                <a:ln>
-                  <a:noFill/>
-                </a:ln>
-                <a:solidFill>
-                  <a:schemeClr val="tx1">
-                    <a:lumMod val="95000"/>
-                    <a:lumOff val="5000"/>
-                  </a:schemeClr>
-                </a:solidFill>
-                <a:effectLst/>
-                <a:latin typeface="Times New Roman" panose="02020603050405020304" pitchFamily="18" charset="0"/>
-                <a:cs typeface="Times New Roman" panose="02020603050405020304" pitchFamily="18" charset="0"/>
-              </a:rPr>
-              <a:t>behaviour</a:t>
-            </a:r>
-            <a:r>
-              <a:rPr kumimoji="0" lang="en-US" altLang="en-US" sz="2600" i="0" u="none" strike="noStrike" cap="none" normalizeH="0" baseline="0" dirty="0">
-                <a:ln>
-                  <a:noFill/>
-                </a:ln>
-                <a:solidFill>
-                  <a:schemeClr val="tx1">
-                    <a:lumMod val="95000"/>
-                    <a:lumOff val="5000"/>
-                  </a:schemeClr>
-                </a:solidFill>
-                <a:effectLst/>
-                <a:latin typeface="Times New Roman" panose="02020603050405020304" pitchFamily="18" charset="0"/>
-                <a:cs typeface="Times New Roman" panose="02020603050405020304" pitchFamily="18" charset="0"/>
-              </a:rPr>
-              <a:t>, or engine load.</a:t>
+              <a:t> They do not consider fuel usage, slope, driver behavior, or engine load.</a:t>
             </a:r>
           </a:p>
           <a:p>
@@ -9376,41 +10704,7 @@
                 <a:latin typeface="Times New Roman" panose="02020603050405020304" pitchFamily="18" charset="0"/>
                 <a:cs typeface="Times New Roman" panose="02020603050405020304" pitchFamily="18" charset="0"/>
               </a:rPr>
-              <a:t> Our project solves this by using AI, </a:t>
-            </a:r>
-            <a:r>
-              <a:rPr kumimoji="0" lang="en-US" altLang="en-US" sz="2600" i="0" u="none" strike="noStrike" cap="none" normalizeH="0" baseline="0" dirty="0" err="1">
-                <a:ln>
-                  <a:noFill/>
-                </a:ln>
-                <a:solidFill>
-                  <a:schemeClr val="tx1">
-                    <a:lumMod val="95000"/>
-                    <a:lumOff val="5000"/>
-                  </a:schemeClr>
-                </a:solidFill>
-                <a:effectLst/>
-                <a:latin typeface="Times New Roman" panose="02020603050405020304" pitchFamily="18" charset="0"/>
-                <a:cs typeface="Times New Roman" panose="02020603050405020304" pitchFamily="18" charset="0"/>
-              </a:rPr>
-              <a:t>IoV</a:t>
-            </a:r>
-            <a:r>
-              <a:rPr kumimoji="0" lang="en-US" altLang="en-US" sz="2600" i="0" u="none" strike="noStrike" cap="none" normalizeH="0" baseline="0" dirty="0">
-                <a:ln>
-                  <a:noFill/>
-                </a:ln>
-                <a:solidFill>
-                  <a:schemeClr val="tx1">
-                    <a:lumMod val="95000"/>
-                    <a:lumOff val="5000"/>
-                  </a:schemeClr>
-                </a:solidFill>
-                <a:effectLst/>
-                <a:latin typeface="Times New Roman" panose="02020603050405020304" pitchFamily="18" charset="0"/>
-                <a:cs typeface="Times New Roman" panose="02020603050405020304" pitchFamily="18" charset="0"/>
-              </a:rPr>
-              <a:t> data, Maps for fuel-optimized routing.</a:t>
+              <a:t> Our project solves this by using AI, IoV data, Maps for fuel-optimized routing.</a:t>
             </a:r>
           </a:p>
         </p:txBody>
@@ -9536,33 +10830,7 @@
                 <a:latin typeface="Times New Roman" panose="02020603050405020304" pitchFamily="18" charset="0"/>
                 <a:cs typeface="Times New Roman" panose="02020603050405020304" pitchFamily="18" charset="0"/>
               </a:rPr>
-              <a:t> Current navigation systems fail to consider driving </a:t>
-            </a:r>
-            <a:r>
-              <a:rPr lang="en-US" sz="2600" dirty="0" err="1">
-                <a:solidFill>
-                  <a:schemeClr val="tx1">
-                    <a:lumMod val="95000"/>
-                    <a:lumOff val="5000"/>
-                  </a:schemeClr>
-                </a:solidFill>
-                <a:latin typeface="Times New Roman" panose="02020603050405020304" pitchFamily="18" charset="0"/>
-                <a:cs typeface="Times New Roman" panose="02020603050405020304" pitchFamily="18" charset="0"/>
-              </a:rPr>
-              <a:t>behaviour</a:t>
-            </a:r>
-            <a:r>
-              <a:rPr lang="en-US" sz="2600" dirty="0">
-                <a:solidFill>
-                  <a:schemeClr val="tx1">
-                    <a:lumMod val="95000"/>
-                    <a:lumOff val="5000"/>
-                  </a:schemeClr>
-                </a:solidFill>
-                <a:latin typeface="Times New Roman" panose="02020603050405020304" pitchFamily="18" charset="0"/>
-                <a:cs typeface="Times New Roman" panose="02020603050405020304" pitchFamily="18" charset="0"/>
-              </a:rPr>
-              <a:t>, elevation, engine load, and real fuel data, resulting in inaccurate route recommendations.</a:t>
+              <a:t> Current navigation systems fail to consider driving behavior, elevation, engine load, and real fuel data, resulting in inaccurate route recommendations.</a:t>
             </a:r>
           </a:p>
           <a:p>
@@ -9962,7 +11230,7 @@
                 <a:latin typeface="Times New Roman" panose="02020603050405020304" pitchFamily="18" charset="0"/>
                 <a:cs typeface="Times New Roman" panose="02020603050405020304" pitchFamily="18" charset="0"/>
               </a:rPr>
-              <a:t> Uses </a:t>
+              <a:t> Uses eVED dataset for real driving &amp; sensor </a:t>
             </a:r>
             <a:r>
               <a:rPr lang="en-IN" sz="2800" dirty="0" err="1">
@@ -9975,7 +11243,7 @@
                 <a:latin typeface="Times New Roman" panose="02020603050405020304" pitchFamily="18" charset="0"/>
                 <a:cs typeface="Times New Roman" panose="02020603050405020304" pitchFamily="18" charset="0"/>
               </a:rPr>
-              <a:t>eVED</a:t>
+              <a:t>behavior</a:t>
             </a:r>
             <a:r>
               <a:rPr lang="en-IN" sz="2800" dirty="0">
@@ -9988,7 +11256,7 @@
                 <a:latin typeface="Times New Roman" panose="02020603050405020304" pitchFamily="18" charset="0"/>
                 <a:cs typeface="Times New Roman" panose="02020603050405020304" pitchFamily="18" charset="0"/>
               </a:rPr>
-              <a:t> dataset for real driving &amp; sensor behaviour.</a:t>
+              <a:t>.</a:t>
             </a:r>
           </a:p>
           <a:p>
@@ -10110,6 +11378,132 @@
           <p:cNvPr id="2" name="Title 1">
             <a:extLst>
               <a:ext uri="{FF2B5EF4-FFF2-40B4-BE49-F238E27FC236}">
+                <a16:creationId xmlns:a16="http://schemas.microsoft.com/office/drawing/2014/main" id="{01BA4320-DADC-7C86-6ABD-453D5901EF69}"/>
+              </a:ext>
+            </a:extLst>
+          </p:cNvPr>
+          <p:cNvSpPr>
+            <a:spLocks noGrp="1"/>
+          </p:cNvSpPr>
+          <p:nvPr>
+            <p:ph type="title"/>
+          </p:nvPr>
+        </p:nvSpPr>
+        <p:spPr>
+          <a:xfrm>
+            <a:off x="1640155" y="313214"/>
+            <a:ext cx="8911687" cy="1280890"/>
+          </a:xfrm>
+        </p:spPr>
+        <p:txBody>
+          <a:bodyPr>
+            <a:normAutofit/>
+          </a:bodyPr>
+          <a:lstStyle/>
+          <a:p>
+            <a:pPr algn="ctr"/>
+            <a:r>
+              <a:rPr lang="en-US" sz="4000" dirty="0">
+                <a:latin typeface="Times New Roman" panose="02020603050405020304" pitchFamily="18" charset="0"/>
+                <a:cs typeface="Times New Roman" panose="02020603050405020304" pitchFamily="18" charset="0"/>
+              </a:rPr>
+              <a:t>SYSTEM ARCHITECTURE</a:t>
+            </a:r>
+          </a:p>
+        </p:txBody>
+      </p:sp>
+      <p:pic>
+        <p:nvPicPr>
+          <p:cNvPr id="5" name="Content Placeholder 4">
+            <a:extLst>
+              <a:ext uri="{FF2B5EF4-FFF2-40B4-BE49-F238E27FC236}">
+                <a16:creationId xmlns:a16="http://schemas.microsoft.com/office/drawing/2014/main" id="{1D04A2AC-958A-B692-5D9C-1FF858F0C9C9}"/>
+              </a:ext>
+            </a:extLst>
+          </p:cNvPr>
+          <p:cNvPicPr>
+            <a:picLocks noGrp="1" noChangeAspect="1"/>
+          </p:cNvPicPr>
+          <p:nvPr>
+            <p:ph idx="1"/>
+          </p:nvPr>
+        </p:nvPicPr>
+        <p:blipFill>
+          <a:blip r:embed="rId2">
+            <a:clrChange>
+              <a:clrFrom>
+                <a:srgbClr val="FFFFFF"/>
+              </a:clrFrom>
+              <a:clrTo>
+                <a:srgbClr val="FFFFFF">
+                  <a:alpha val="0"/>
+                </a:srgbClr>
+              </a:clrTo>
+            </a:clrChange>
+            <a:extLst>
+              <a:ext uri="{BEBA8EAE-BF5A-486C-A8C5-ECC9F3942E4B}">
+                <a14:imgProps xmlns:a14="http://schemas.microsoft.com/office/drawing/2010/main">
+                  <a14:imgLayer r:embed="rId3">
+                    <a14:imgEffect>
+                      <a14:sharpenSoften amount="-25000"/>
+                    </a14:imgEffect>
+                  </a14:imgLayer>
+                </a14:imgProps>
+              </a:ext>
+              <a:ext uri="{28A0092B-C50C-407E-A947-70E740481C1C}">
+                <a14:useLocalDpi xmlns:a14="http://schemas.microsoft.com/office/drawing/2010/main" val="0"/>
+              </a:ext>
+            </a:extLst>
+          </a:blip>
+          <a:stretch>
+            <a:fillRect/>
+          </a:stretch>
+        </p:blipFill>
+        <p:spPr>
+          <a:xfrm>
+            <a:off x="2093641" y="1225295"/>
+            <a:ext cx="8458201" cy="5319491"/>
+          </a:xfrm>
+          <a:prstGeom prst="rect">
+            <a:avLst/>
+          </a:prstGeom>
+        </p:spPr>
+      </p:pic>
+    </p:spTree>
+    <p:extLst>
+      <p:ext uri="{BB962C8B-B14F-4D97-AF65-F5344CB8AC3E}">
+        <p14:creationId xmlns:p14="http://schemas.microsoft.com/office/powerpoint/2010/main" val="1830749076"/>
+      </p:ext>
+    </p:extLst>
+  </p:cSld>
+  <p:clrMapOvr>
+    <a:masterClrMapping/>
+  </p:clrMapOvr>
+</p:sld>
+</file>
+
+<file path=ppt/slides/slide7.xml><?xml version="1.0" encoding="utf-8"?>
+<p:sld xmlns:a="http://schemas.openxmlformats.org/drawingml/2006/main" xmlns:r="http://schemas.openxmlformats.org/officeDocument/2006/relationships" xmlns:p="http://schemas.openxmlformats.org/presentationml/2006/main">
+  <p:cSld>
+    <p:spTree>
+      <p:nvGrpSpPr>
+        <p:cNvPr id="1" name=""/>
+        <p:cNvGrpSpPr/>
+        <p:nvPr/>
+      </p:nvGrpSpPr>
+      <p:grpSpPr>
+        <a:xfrm>
+          <a:off x="0" y="0"/>
+          <a:ext cx="0" cy="0"/>
+          <a:chOff x="0" y="0"/>
+          <a:chExt cx="0" cy="0"/>
+        </a:xfrm>
+      </p:grpSpPr>
+      <p:sp>
+        <p:nvSpPr>
+          <p:cNvPr id="2" name="Title 1">
+            <a:extLst>
+              <a:ext uri="{FF2B5EF4-FFF2-40B4-BE49-F238E27FC236}">
                 <a16:creationId xmlns:a16="http://schemas.microsoft.com/office/drawing/2014/main" id="{DE493CBB-50E9-5DC4-416D-1668DAD84A24}"/>
               </a:ext>
             </a:extLst>
@@ -10123,7 +11517,7 @@
         </p:nvSpPr>
         <p:spPr>
           <a:xfrm>
-            <a:off x="1790700" y="517358"/>
+            <a:off x="1790700" y="298902"/>
             <a:ext cx="8610600" cy="666673"/>
           </a:xfrm>
         </p:spPr>
@@ -10168,8 +11562,8 @@
         </p:nvSpPr>
         <p:spPr>
           <a:xfrm>
-            <a:off x="890953" y="1591929"/>
-            <a:ext cx="7109635" cy="4967169"/>
+            <a:off x="1447176" y="1070721"/>
+            <a:ext cx="7109635" cy="5488377"/>
           </a:xfrm>
         </p:spPr>
         <p:txBody>
@@ -10178,12 +11572,11 @@
           </a:bodyPr>
           <a:lstStyle/>
           <a:p>
-            <a:pPr>
-              <a:buFont typeface="Courier New" panose="02070309020205020404" pitchFamily="49" charset="0"/>
-              <a:buChar char="o"/>
+            <a:pPr marL="0" indent="0">
+              <a:buNone/>
             </a:pPr>
             <a:r>
-              <a:rPr lang="en-IN" sz="2600" dirty="0">
+              <a:rPr lang="en-IN" sz="1600" dirty="0">
                 <a:solidFill>
                   <a:schemeClr val="tx1">
                     <a:lumMod val="95000"/>
@@ -10193,10 +11586,15 @@
                 <a:latin typeface="Times New Roman" panose="02020603050405020304" pitchFamily="18" charset="0"/>
                 <a:cs typeface="Times New Roman" panose="02020603050405020304" pitchFamily="18" charset="0"/>
               </a:rPr>
-              <a:t> Collect </a:t>
-            </a:r>
-            <a:r>
-              <a:rPr lang="en-IN" sz="2600" dirty="0" err="1">
+              <a:t>The system follows a modular pipeline architecture:</a:t>
+            </a:r>
+          </a:p>
+          <a:p>
+            <a:pPr marL="0" indent="0">
+              <a:buNone/>
+            </a:pPr>
+            <a:r>
+              <a:rPr lang="en-IN" sz="1600" dirty="0">
                 <a:solidFill>
                   <a:schemeClr val="tx1">
                     <a:lumMod val="95000"/>
@@ -10206,10 +11604,10 @@
                 <a:latin typeface="Times New Roman" panose="02020603050405020304" pitchFamily="18" charset="0"/>
                 <a:cs typeface="Times New Roman" panose="02020603050405020304" pitchFamily="18" charset="0"/>
               </a:rPr>
-              <a:t>eVED</a:t>
-            </a:r>
-            <a:r>
-              <a:rPr lang="en-IN" sz="2600" dirty="0">
+              <a:t>1. </a:t>
+            </a:r>
+            <a:r>
+              <a:rPr lang="en-IN" sz="1600" b="1" u="sng" dirty="0">
                 <a:solidFill>
                   <a:schemeClr val="tx1">
                     <a:lumMod val="95000"/>
@@ -10219,16 +11617,10 @@
                 <a:latin typeface="Times New Roman" panose="02020603050405020304" pitchFamily="18" charset="0"/>
                 <a:cs typeface="Times New Roman" panose="02020603050405020304" pitchFamily="18" charset="0"/>
               </a:rPr>
-              <a:t> dataset</a:t>
-            </a:r>
-          </a:p>
-          <a:p>
-            <a:pPr>
-              <a:buFont typeface="Courier New" panose="02070309020205020404" pitchFamily="49" charset="0"/>
-              <a:buChar char="o"/>
-            </a:pPr>
-            <a:r>
-              <a:rPr lang="en-IN" sz="2600" dirty="0">
+              <a:t>USER INPUT </a:t>
+            </a:r>
+            <a:r>
+              <a:rPr lang="en-IN" sz="1600" dirty="0">
                 <a:solidFill>
                   <a:schemeClr val="tx1">
                     <a:lumMod val="95000"/>
@@ -10238,16 +11630,15 @@
                 <a:latin typeface="Times New Roman" panose="02020603050405020304" pitchFamily="18" charset="0"/>
                 <a:cs typeface="Times New Roman" panose="02020603050405020304" pitchFamily="18" charset="0"/>
               </a:rPr>
-              <a:t> Preprocess &amp; extract driver behaviour features</a:t>
-            </a:r>
-          </a:p>
-          <a:p>
-            <a:pPr>
-              <a:buFont typeface="Courier New" panose="02070309020205020404" pitchFamily="49" charset="0"/>
-              <a:buChar char="o"/>
+              <a:t>→ Flask-based web interface collects source, destination, and vehicle/driver profile (speed, acceleration, HP, temperature, load).</a:t>
+            </a:r>
+          </a:p>
+          <a:p>
+            <a:pPr marL="0" indent="0">
+              <a:buNone/>
             </a:pPr>
             <a:r>
-              <a:rPr lang="en-IN" sz="2600" dirty="0">
+              <a:rPr lang="en-IN" sz="1600" dirty="0">
                 <a:solidFill>
                   <a:schemeClr val="tx1">
                     <a:lumMod val="95000"/>
@@ -10257,16 +11648,10 @@
                 <a:latin typeface="Times New Roman" panose="02020603050405020304" pitchFamily="18" charset="0"/>
                 <a:cs typeface="Times New Roman" panose="02020603050405020304" pitchFamily="18" charset="0"/>
               </a:rPr>
-              <a:t> Add elevation/slope from SRTM</a:t>
-            </a:r>
-          </a:p>
-          <a:p>
-            <a:pPr>
-              <a:buFont typeface="Courier New" panose="02070309020205020404" pitchFamily="49" charset="0"/>
-              <a:buChar char="o"/>
-            </a:pPr>
-            <a:r>
-              <a:rPr lang="en-IN" sz="2600" dirty="0">
+              <a:t>2. </a:t>
+            </a:r>
+            <a:r>
+              <a:rPr lang="en-IN" sz="1600" b="1" u="sng" dirty="0">
                 <a:solidFill>
                   <a:schemeClr val="tx1">
                     <a:lumMod val="95000"/>
@@ -10276,10 +11661,10 @@
                 <a:latin typeface="Times New Roman" panose="02020603050405020304" pitchFamily="18" charset="0"/>
                 <a:cs typeface="Times New Roman" panose="02020603050405020304" pitchFamily="18" charset="0"/>
               </a:rPr>
-              <a:t> Train ML model (Random Forest / </a:t>
-            </a:r>
-            <a:r>
-              <a:rPr lang="en-IN" sz="2600" dirty="0" err="1">
+              <a:t>GEOCODING</a:t>
+            </a:r>
+            <a:r>
+              <a:rPr lang="en-IN" sz="1600" dirty="0">
                 <a:solidFill>
                   <a:schemeClr val="tx1">
                     <a:lumMod val="95000"/>
@@ -10289,10 +11674,15 @@
                 <a:latin typeface="Times New Roman" panose="02020603050405020304" pitchFamily="18" charset="0"/>
                 <a:cs typeface="Times New Roman" panose="02020603050405020304" pitchFamily="18" charset="0"/>
               </a:rPr>
-              <a:t>XGBoost</a:t>
-            </a:r>
-            <a:r>
-              <a:rPr lang="en-IN" sz="2600" dirty="0">
+              <a:t> → Nominatim API converts location names to lat/lon coordinates.</a:t>
+            </a:r>
+          </a:p>
+          <a:p>
+            <a:pPr marL="0" indent="0">
+              <a:buNone/>
+            </a:pPr>
+            <a:r>
+              <a:rPr lang="en-IN" sz="1600" dirty="0">
                 <a:solidFill>
                   <a:schemeClr val="tx1">
                     <a:lumMod val="95000"/>
@@ -10302,16 +11692,10 @@
                 <a:latin typeface="Times New Roman" panose="02020603050405020304" pitchFamily="18" charset="0"/>
                 <a:cs typeface="Times New Roman" panose="02020603050405020304" pitchFamily="18" charset="0"/>
               </a:rPr>
-              <a:t>)</a:t>
-            </a:r>
-          </a:p>
-          <a:p>
-            <a:pPr>
-              <a:buFont typeface="Courier New" panose="02070309020205020404" pitchFamily="49" charset="0"/>
-              <a:buChar char="o"/>
-            </a:pPr>
-            <a:r>
-              <a:rPr lang="en-IN" sz="2600" dirty="0">
+              <a:t>3. </a:t>
+            </a:r>
+            <a:r>
+              <a:rPr lang="en-IN" sz="1600" b="1" u="sng" dirty="0">
                 <a:solidFill>
                   <a:schemeClr val="tx1">
                     <a:lumMod val="95000"/>
@@ -10321,10 +11705,10 @@
                 <a:latin typeface="Times New Roman" panose="02020603050405020304" pitchFamily="18" charset="0"/>
                 <a:cs typeface="Times New Roman" panose="02020603050405020304" pitchFamily="18" charset="0"/>
               </a:rPr>
-              <a:t> Generate multiple routes using </a:t>
-            </a:r>
-            <a:r>
-              <a:rPr lang="en-IN" sz="2600" dirty="0" err="1">
+              <a:t>ROUTE</a:t>
+            </a:r>
+            <a:r>
+              <a:rPr lang="en-IN" sz="1600" dirty="0">
                 <a:solidFill>
                   <a:schemeClr val="tx1">
                     <a:lumMod val="95000"/>
@@ -10334,10 +11718,10 @@
                 <a:latin typeface="Times New Roman" panose="02020603050405020304" pitchFamily="18" charset="0"/>
                 <a:cs typeface="Times New Roman" panose="02020603050405020304" pitchFamily="18" charset="0"/>
               </a:rPr>
-              <a:t>OSMnx</a:t>
-            </a:r>
-            <a:r>
-              <a:rPr lang="en-IN" sz="2600" dirty="0">
+              <a:t> </a:t>
+            </a:r>
+            <a:r>
+              <a:rPr lang="en-IN" sz="1600" b="1" u="sng" dirty="0">
                 <a:solidFill>
                   <a:schemeClr val="tx1">
                     <a:lumMod val="95000"/>
@@ -10347,16 +11731,10 @@
                 <a:latin typeface="Times New Roman" panose="02020603050405020304" pitchFamily="18" charset="0"/>
                 <a:cs typeface="Times New Roman" panose="02020603050405020304" pitchFamily="18" charset="0"/>
               </a:rPr>
-              <a:t>/OSRM</a:t>
-            </a:r>
-          </a:p>
-          <a:p>
-            <a:pPr>
-              <a:buFont typeface="Courier New" panose="02070309020205020404" pitchFamily="49" charset="0"/>
-              <a:buChar char="o"/>
-            </a:pPr>
-            <a:r>
-              <a:rPr lang="en-IN" sz="2600" dirty="0">
+              <a:t>GENERATION</a:t>
+            </a:r>
+            <a:r>
+              <a:rPr lang="en-IN" sz="1600" dirty="0">
                 <a:solidFill>
                   <a:schemeClr val="tx1">
                     <a:lumMod val="95000"/>
@@ -10366,16 +11744,15 @@
                 <a:latin typeface="Times New Roman" panose="02020603050405020304" pitchFamily="18" charset="0"/>
                 <a:cs typeface="Times New Roman" panose="02020603050405020304" pitchFamily="18" charset="0"/>
               </a:rPr>
-              <a:t> Predict fuel for each route segment</a:t>
-            </a:r>
-          </a:p>
-          <a:p>
-            <a:pPr>
-              <a:buFont typeface="Courier New" panose="02070309020205020404" pitchFamily="49" charset="0"/>
-              <a:buChar char="o"/>
+              <a:t> → OSRM + OpenStreetMap generates multiple candidate routes with full GeoJSON geometry.</a:t>
+            </a:r>
+          </a:p>
+          <a:p>
+            <a:pPr marL="0" indent="0">
+              <a:buNone/>
             </a:pPr>
             <a:r>
-              <a:rPr lang="en-IN" sz="2600" dirty="0">
+              <a:rPr lang="en-IN" sz="1600" dirty="0">
                 <a:solidFill>
                   <a:schemeClr val="tx1">
                     <a:lumMod val="95000"/>
@@ -10385,16 +11762,10 @@
                 <a:latin typeface="Times New Roman" panose="02020603050405020304" pitchFamily="18" charset="0"/>
                 <a:cs typeface="Times New Roman" panose="02020603050405020304" pitchFamily="18" charset="0"/>
               </a:rPr>
-              <a:t> Compare total fuel usage</a:t>
-            </a:r>
-          </a:p>
-          <a:p>
-            <a:pPr>
-              <a:buFont typeface="Courier New" panose="02070309020205020404" pitchFamily="49" charset="0"/>
-              <a:buChar char="o"/>
-            </a:pPr>
-            <a:r>
-              <a:rPr lang="en-IN" sz="2600" dirty="0">
+              <a:t>4. </a:t>
+            </a:r>
+            <a:r>
+              <a:rPr lang="en-IN" sz="1600" b="1" u="sng" dirty="0">
                 <a:solidFill>
                   <a:schemeClr val="tx1">
                     <a:lumMod val="95000"/>
@@ -10404,7 +11775,289 @@
                 <a:latin typeface="Times New Roman" panose="02020603050405020304" pitchFamily="18" charset="0"/>
                 <a:cs typeface="Times New Roman" panose="02020603050405020304" pitchFamily="18" charset="0"/>
               </a:rPr>
-              <a:t> Recommend best fuel-efficient route</a:t>
+              <a:t>FEATURE</a:t>
+            </a:r>
+            <a:r>
+              <a:rPr lang="en-IN" sz="1600" dirty="0">
+                <a:solidFill>
+                  <a:schemeClr val="tx1">
+                    <a:lumMod val="95000"/>
+                    <a:lumOff val="5000"/>
+                  </a:schemeClr>
+                </a:solidFill>
+                <a:latin typeface="Times New Roman" panose="02020603050405020304" pitchFamily="18" charset="0"/>
+                <a:cs typeface="Times New Roman" panose="02020603050405020304" pitchFamily="18" charset="0"/>
+              </a:rPr>
+              <a:t> </a:t>
+            </a:r>
+            <a:r>
+              <a:rPr lang="en-IN" sz="1600" b="1" u="sng" dirty="0">
+                <a:solidFill>
+                  <a:schemeClr val="tx1">
+                    <a:lumMod val="95000"/>
+                    <a:lumOff val="5000"/>
+                  </a:schemeClr>
+                </a:solidFill>
+                <a:latin typeface="Times New Roman" panose="02020603050405020304" pitchFamily="18" charset="0"/>
+                <a:cs typeface="Times New Roman" panose="02020603050405020304" pitchFamily="18" charset="0"/>
+              </a:rPr>
+              <a:t>EXTRACTION</a:t>
+            </a:r>
+            <a:r>
+              <a:rPr lang="en-IN" sz="1600" dirty="0">
+                <a:solidFill>
+                  <a:schemeClr val="tx1">
+                    <a:lumMod val="95000"/>
+                    <a:lumOff val="5000"/>
+                  </a:schemeClr>
+                </a:solidFill>
+                <a:latin typeface="Times New Roman" panose="02020603050405020304" pitchFamily="18" charset="0"/>
+                <a:cs typeface="Times New Roman" panose="02020603050405020304" pitchFamily="18" charset="0"/>
+              </a:rPr>
+              <a:t> → For each route segment: </a:t>
+            </a:r>
+          </a:p>
+          <a:p>
+            <a:pPr lvl="1">
+              <a:buFont typeface="Wingdings" panose="05000000000000000000" pitchFamily="2" charset="2"/>
+              <a:buChar char="§"/>
+            </a:pPr>
+            <a:r>
+              <a:rPr lang="en-IN" sz="1200" b="1" dirty="0">
+                <a:solidFill>
+                  <a:schemeClr val="tx1">
+                    <a:lumMod val="95000"/>
+                    <a:lumOff val="5000"/>
+                  </a:schemeClr>
+                </a:solidFill>
+                <a:latin typeface="Times New Roman" panose="02020603050405020304" pitchFamily="18" charset="0"/>
+                <a:cs typeface="Times New Roman" panose="02020603050405020304" pitchFamily="18" charset="0"/>
+              </a:rPr>
+              <a:t>Elevation &amp; slope from NASA SRTM (via OpenTopoData API) </a:t>
+            </a:r>
+          </a:p>
+          <a:p>
+            <a:pPr lvl="1">
+              <a:buFont typeface="Wingdings" panose="05000000000000000000" pitchFamily="2" charset="2"/>
+              <a:buChar char="§"/>
+            </a:pPr>
+            <a:r>
+              <a:rPr lang="en-IN" sz="1200" b="1" dirty="0">
+                <a:solidFill>
+                  <a:schemeClr val="tx1">
+                    <a:lumMod val="95000"/>
+                    <a:lumOff val="5000"/>
+                  </a:schemeClr>
+                </a:solidFill>
+                <a:latin typeface="Times New Roman" panose="02020603050405020304" pitchFamily="18" charset="0"/>
+                <a:cs typeface="Times New Roman" panose="02020603050405020304" pitchFamily="18" charset="0"/>
+              </a:rPr>
+              <a:t>Traffic congestion from time-based simulation module </a:t>
+            </a:r>
+          </a:p>
+          <a:p>
+            <a:pPr lvl="1">
+              <a:buFont typeface="Wingdings" panose="05000000000000000000" pitchFamily="2" charset="2"/>
+              <a:buChar char="§"/>
+            </a:pPr>
+            <a:r>
+              <a:rPr lang="en-IN" sz="1200" b="1" dirty="0">
+                <a:solidFill>
+                  <a:schemeClr val="tx1">
+                    <a:lumMod val="95000"/>
+                    <a:lumOff val="5000"/>
+                  </a:schemeClr>
+                </a:solidFill>
+                <a:latin typeface="Times New Roman" panose="02020603050405020304" pitchFamily="18" charset="0"/>
+                <a:cs typeface="Times New Roman" panose="02020603050405020304" pitchFamily="18" charset="0"/>
+              </a:rPr>
+              <a:t>9-feature vector built per segment</a:t>
+            </a:r>
+            <a:endParaRPr lang="en-IN" sz="1800" b="1" dirty="0">
+              <a:solidFill>
+                <a:schemeClr val="tx1">
+                  <a:lumMod val="95000"/>
+                  <a:lumOff val="5000"/>
+                </a:schemeClr>
+              </a:solidFill>
+              <a:latin typeface="Times New Roman" panose="02020603050405020304" pitchFamily="18" charset="0"/>
+              <a:cs typeface="Times New Roman" panose="02020603050405020304" pitchFamily="18" charset="0"/>
+            </a:endParaRPr>
+          </a:p>
+          <a:p>
+            <a:pPr marL="0" indent="0">
+              <a:buNone/>
+            </a:pPr>
+            <a:r>
+              <a:rPr lang="en-IN" sz="1600" dirty="0">
+                <a:solidFill>
+                  <a:schemeClr val="tx1">
+                    <a:lumMod val="95000"/>
+                    <a:lumOff val="5000"/>
+                  </a:schemeClr>
+                </a:solidFill>
+                <a:latin typeface="Times New Roman" panose="02020603050405020304" pitchFamily="18" charset="0"/>
+                <a:cs typeface="Times New Roman" panose="02020603050405020304" pitchFamily="18" charset="0"/>
+              </a:rPr>
+              <a:t>5. </a:t>
+            </a:r>
+            <a:r>
+              <a:rPr lang="en-IN" sz="1600" b="1" u="sng" dirty="0">
+                <a:solidFill>
+                  <a:schemeClr val="tx1">
+                    <a:lumMod val="95000"/>
+                    <a:lumOff val="5000"/>
+                  </a:schemeClr>
+                </a:solidFill>
+                <a:latin typeface="Times New Roman" panose="02020603050405020304" pitchFamily="18" charset="0"/>
+                <a:cs typeface="Times New Roman" panose="02020603050405020304" pitchFamily="18" charset="0"/>
+              </a:rPr>
+              <a:t>ML PREDICTION </a:t>
+            </a:r>
+            <a:r>
+              <a:rPr lang="en-IN" sz="1600" dirty="0">
+                <a:solidFill>
+                  <a:schemeClr val="tx1">
+                    <a:lumMod val="95000"/>
+                    <a:lumOff val="5000"/>
+                  </a:schemeClr>
+                </a:solidFill>
+                <a:latin typeface="Times New Roman" panose="02020603050405020304" pitchFamily="18" charset="0"/>
+                <a:cs typeface="Times New Roman" panose="02020603050405020304" pitchFamily="18" charset="0"/>
+              </a:rPr>
+              <a:t>→ XGBoost model (R² = 0.90) predicts fuel rate (L/hr) for each segment after StandardScaler normalization.</a:t>
+            </a:r>
+          </a:p>
+          <a:p>
+            <a:pPr marL="0" indent="0">
+              <a:buNone/>
+            </a:pPr>
+            <a:r>
+              <a:rPr lang="en-IN" sz="1600" dirty="0">
+                <a:solidFill>
+                  <a:schemeClr val="tx1">
+                    <a:lumMod val="95000"/>
+                    <a:lumOff val="5000"/>
+                  </a:schemeClr>
+                </a:solidFill>
+                <a:latin typeface="Times New Roman" panose="02020603050405020304" pitchFamily="18" charset="0"/>
+                <a:cs typeface="Times New Roman" panose="02020603050405020304" pitchFamily="18" charset="0"/>
+              </a:rPr>
+              <a:t>6. </a:t>
+            </a:r>
+            <a:r>
+              <a:rPr lang="en-IN" sz="1600" b="1" u="sng" dirty="0">
+                <a:solidFill>
+                  <a:schemeClr val="tx1">
+                    <a:lumMod val="95000"/>
+                    <a:lumOff val="5000"/>
+                  </a:schemeClr>
+                </a:solidFill>
+                <a:latin typeface="Times New Roman" panose="02020603050405020304" pitchFamily="18" charset="0"/>
+                <a:cs typeface="Times New Roman" panose="02020603050405020304" pitchFamily="18" charset="0"/>
+              </a:rPr>
+              <a:t>ROUTE</a:t>
+            </a:r>
+            <a:r>
+              <a:rPr lang="en-IN" sz="1600" dirty="0">
+                <a:solidFill>
+                  <a:schemeClr val="tx1">
+                    <a:lumMod val="95000"/>
+                    <a:lumOff val="5000"/>
+                  </a:schemeClr>
+                </a:solidFill>
+                <a:latin typeface="Times New Roman" panose="02020603050405020304" pitchFamily="18" charset="0"/>
+                <a:cs typeface="Times New Roman" panose="02020603050405020304" pitchFamily="18" charset="0"/>
+              </a:rPr>
+              <a:t> </a:t>
+            </a:r>
+            <a:r>
+              <a:rPr lang="en-IN" sz="1600" b="1" u="sng" dirty="0">
+                <a:solidFill>
+                  <a:schemeClr val="tx1">
+                    <a:lumMod val="95000"/>
+                    <a:lumOff val="5000"/>
+                  </a:schemeClr>
+                </a:solidFill>
+                <a:latin typeface="Times New Roman" panose="02020603050405020304" pitchFamily="18" charset="0"/>
+                <a:cs typeface="Times New Roman" panose="02020603050405020304" pitchFamily="18" charset="0"/>
+              </a:rPr>
+              <a:t>COMPARISON</a:t>
+            </a:r>
+            <a:r>
+              <a:rPr lang="en-IN" sz="1600" dirty="0">
+                <a:solidFill>
+                  <a:schemeClr val="tx1">
+                    <a:lumMod val="95000"/>
+                    <a:lumOff val="5000"/>
+                  </a:schemeClr>
+                </a:solidFill>
+                <a:latin typeface="Times New Roman" panose="02020603050405020304" pitchFamily="18" charset="0"/>
+                <a:cs typeface="Times New Roman" panose="02020603050405020304" pitchFamily="18" charset="0"/>
+              </a:rPr>
+              <a:t> → Segment fuel values are summed per route. The route with lowest total fuel is recommended.</a:t>
+            </a:r>
+          </a:p>
+          <a:p>
+            <a:pPr marL="0" indent="0">
+              <a:buNone/>
+            </a:pPr>
+            <a:r>
+              <a:rPr lang="en-IN" sz="1600" dirty="0">
+                <a:solidFill>
+                  <a:schemeClr val="tx1">
+                    <a:lumMod val="95000"/>
+                    <a:lumOff val="5000"/>
+                  </a:schemeClr>
+                </a:solidFill>
+                <a:latin typeface="Times New Roman" panose="02020603050405020304" pitchFamily="18" charset="0"/>
+                <a:cs typeface="Times New Roman" panose="02020603050405020304" pitchFamily="18" charset="0"/>
+              </a:rPr>
+              <a:t>7. </a:t>
+            </a:r>
+            <a:r>
+              <a:rPr lang="en-IN" sz="1600" b="1" u="sng" dirty="0">
+                <a:solidFill>
+                  <a:schemeClr val="tx1">
+                    <a:lumMod val="95000"/>
+                    <a:lumOff val="5000"/>
+                  </a:schemeClr>
+                </a:solidFill>
+                <a:latin typeface="Times New Roman" panose="02020603050405020304" pitchFamily="18" charset="0"/>
+                <a:cs typeface="Times New Roman" panose="02020603050405020304" pitchFamily="18" charset="0"/>
+              </a:rPr>
+              <a:t>OUTPUT</a:t>
+            </a:r>
+            <a:r>
+              <a:rPr lang="en-IN" sz="1600" dirty="0">
+                <a:solidFill>
+                  <a:schemeClr val="tx1">
+                    <a:lumMod val="95000"/>
+                    <a:lumOff val="5000"/>
+                  </a:schemeClr>
+                </a:solidFill>
+                <a:latin typeface="Times New Roman" panose="02020603050405020304" pitchFamily="18" charset="0"/>
+                <a:cs typeface="Times New Roman" panose="02020603050405020304" pitchFamily="18" charset="0"/>
+              </a:rPr>
+              <a:t> → Map visualization with route overlays, fuel estimates,</a:t>
+            </a:r>
+          </a:p>
+          <a:p>
+            <a:pPr marL="0" indent="0">
+              <a:buNone/>
+            </a:pPr>
+            <a:r>
+              <a:rPr lang="en-IN" sz="1600" dirty="0">
+                <a:solidFill>
+                  <a:schemeClr val="tx1">
+                    <a:lumMod val="95000"/>
+                    <a:lumOff val="5000"/>
+                  </a:schemeClr>
+                </a:solidFill>
+                <a:latin typeface="Times New Roman" panose="02020603050405020304" pitchFamily="18" charset="0"/>
+                <a:cs typeface="Times New Roman" panose="02020603050405020304" pitchFamily="18" charset="0"/>
+              </a:rPr>
+              <a:t>   CO₂ footprint, and Eco-Score displayed to user.</a:t>
             </a:r>
           </a:p>
         </p:txBody>
@@ -10438,7 +12091,7 @@
         </p:blipFill>
         <p:spPr>
           <a:xfrm>
-            <a:off x="8319067" y="1591928"/>
+            <a:off x="8693971" y="1162161"/>
             <a:ext cx="2981980" cy="4967169"/>
           </a:xfrm>
           <a:prstGeom prst="rect">
@@ -10467,279 +12120,6 @@
 </p:sld>
 </file>
 
-<file path=ppt/slides/slide7.xml><?xml version="1.0" encoding="utf-8"?>
-<p:sld xmlns:a="http://schemas.openxmlformats.org/drawingml/2006/main" xmlns:r="http://schemas.openxmlformats.org/officeDocument/2006/relationships" xmlns:p="http://schemas.openxmlformats.org/presentationml/2006/main">
-  <p:cSld>
-    <p:spTree>
-      <p:nvGrpSpPr>
-        <p:cNvPr id="1" name=""/>
-        <p:cNvGrpSpPr/>
-        <p:nvPr/>
-      </p:nvGrpSpPr>
-      <p:grpSpPr>
-        <a:xfrm>
-          <a:off x="0" y="0"/>
-          <a:ext cx="0" cy="0"/>
-          <a:chOff x="0" y="0"/>
-          <a:chExt cx="0" cy="0"/>
-        </a:xfrm>
-      </p:grpSpPr>
-      <p:sp>
-        <p:nvSpPr>
-          <p:cNvPr id="2" name="Title 1">
-            <a:extLst>
-              <a:ext uri="{FF2B5EF4-FFF2-40B4-BE49-F238E27FC236}">
-                <a16:creationId xmlns:a16="http://schemas.microsoft.com/office/drawing/2014/main" id="{32917303-1F0D-5B93-C6A3-B47B04244782}"/>
-              </a:ext>
-            </a:extLst>
-          </p:cNvPr>
-          <p:cNvSpPr>
-            <a:spLocks noGrp="1"/>
-          </p:cNvSpPr>
-          <p:nvPr>
-            <p:ph type="title"/>
-          </p:nvPr>
-        </p:nvSpPr>
-        <p:spPr>
-          <a:xfrm>
-            <a:off x="1147396" y="534253"/>
-            <a:ext cx="9897208" cy="1293028"/>
-          </a:xfrm>
-        </p:spPr>
-        <p:txBody>
-          <a:bodyPr>
-            <a:noAutofit/>
-          </a:bodyPr>
-          <a:lstStyle/>
-          <a:p>
-            <a:pPr algn="ctr"/>
-            <a:r>
-              <a:rPr lang="en-IN" sz="4000" dirty="0">
-                <a:solidFill>
-                  <a:schemeClr val="tx1">
-                    <a:lumMod val="95000"/>
-                    <a:lumOff val="5000"/>
-                  </a:schemeClr>
-                </a:solidFill>
-                <a:latin typeface="Times New Roman" panose="02020603050405020304" pitchFamily="18" charset="0"/>
-                <a:cs typeface="Times New Roman" panose="02020603050405020304" pitchFamily="18" charset="0"/>
-              </a:rPr>
-              <a:t>AI-BASED FUEL-EFFICIENT ROUTE OPTIMIZATION – </a:t>
-            </a:r>
-            <a:r>
-              <a:rPr lang="en-US" sz="4000" dirty="0">
-                <a:solidFill>
-                  <a:schemeClr val="tx1">
-                    <a:lumMod val="95000"/>
-                    <a:lumOff val="5000"/>
-                  </a:schemeClr>
-                </a:solidFill>
-                <a:latin typeface="Times New Roman" panose="02020603050405020304" pitchFamily="18" charset="0"/>
-                <a:cs typeface="Times New Roman" panose="02020603050405020304" pitchFamily="18" charset="0"/>
-              </a:rPr>
-              <a:t>ALGORITHM</a:t>
-            </a:r>
-            <a:r>
-              <a:rPr lang="en-IN" sz="4000" dirty="0">
-                <a:solidFill>
-                  <a:schemeClr val="tx1">
-                    <a:lumMod val="95000"/>
-                    <a:lumOff val="5000"/>
-                  </a:schemeClr>
-                </a:solidFill>
-                <a:latin typeface="Times New Roman" panose="02020603050405020304" pitchFamily="18" charset="0"/>
-                <a:cs typeface="Times New Roman" panose="02020603050405020304" pitchFamily="18" charset="0"/>
-              </a:rPr>
-              <a:t> STEPS</a:t>
-            </a:r>
-          </a:p>
-        </p:txBody>
-      </p:sp>
-      <p:sp>
-        <p:nvSpPr>
-          <p:cNvPr id="3" name="Content Placeholder 2">
-            <a:extLst>
-              <a:ext uri="{FF2B5EF4-FFF2-40B4-BE49-F238E27FC236}">
-                <a16:creationId xmlns:a16="http://schemas.microsoft.com/office/drawing/2014/main" id="{7D1B6679-6A98-0193-1864-16F509B66B54}"/>
-              </a:ext>
-            </a:extLst>
-          </p:cNvPr>
-          <p:cNvSpPr>
-            <a:spLocks noGrp="1"/>
-          </p:cNvSpPr>
-          <p:nvPr>
-            <p:ph idx="1"/>
-          </p:nvPr>
-        </p:nvSpPr>
-        <p:spPr>
-          <a:xfrm>
-            <a:off x="685800" y="1963720"/>
-            <a:ext cx="10820400" cy="4773257"/>
-          </a:xfrm>
-        </p:spPr>
-        <p:txBody>
-          <a:bodyPr>
-            <a:noAutofit/>
-          </a:bodyPr>
-          <a:lstStyle/>
-          <a:p>
-            <a:r>
-              <a:rPr lang="en-US" sz="2600" b="1" dirty="0">
-                <a:solidFill>
-                  <a:schemeClr val="tx1">
-                    <a:lumMod val="95000"/>
-                    <a:lumOff val="5000"/>
-                  </a:schemeClr>
-                </a:solidFill>
-                <a:latin typeface="Times New Roman" panose="02020603050405020304" pitchFamily="18" charset="0"/>
-                <a:cs typeface="Times New Roman" panose="02020603050405020304" pitchFamily="18" charset="0"/>
-              </a:rPr>
-              <a:t>Step 1: </a:t>
-            </a:r>
-            <a:r>
-              <a:rPr lang="en-US" sz="2600" dirty="0">
-                <a:solidFill>
-                  <a:schemeClr val="tx1">
-                    <a:lumMod val="95000"/>
-                    <a:lumOff val="5000"/>
-                  </a:schemeClr>
-                </a:solidFill>
-                <a:latin typeface="Times New Roman" panose="02020603050405020304" pitchFamily="18" charset="0"/>
-                <a:cs typeface="Times New Roman" panose="02020603050405020304" pitchFamily="18" charset="0"/>
-              </a:rPr>
-              <a:t>Generate all possible routes between the source and destination using OSM/OSRM.</a:t>
-            </a:r>
-          </a:p>
-          <a:p>
-            <a:r>
-              <a:rPr lang="en-US" sz="2600" b="1" dirty="0">
-                <a:solidFill>
-                  <a:schemeClr val="tx1">
-                    <a:lumMod val="95000"/>
-                    <a:lumOff val="5000"/>
-                  </a:schemeClr>
-                </a:solidFill>
-                <a:latin typeface="Times New Roman" panose="02020603050405020304" pitchFamily="18" charset="0"/>
-                <a:cs typeface="Times New Roman" panose="02020603050405020304" pitchFamily="18" charset="0"/>
-              </a:rPr>
-              <a:t>Step 2: </a:t>
-            </a:r>
-            <a:r>
-              <a:rPr lang="en-US" sz="2600" dirty="0">
-                <a:solidFill>
-                  <a:schemeClr val="tx1">
-                    <a:lumMod val="95000"/>
-                    <a:lumOff val="5000"/>
-                  </a:schemeClr>
-                </a:solidFill>
-                <a:latin typeface="Times New Roman" panose="02020603050405020304" pitchFamily="18" charset="0"/>
-                <a:cs typeface="Times New Roman" panose="02020603050405020304" pitchFamily="18" charset="0"/>
-              </a:rPr>
-              <a:t>Use the trained ML model to predict fuel consumption for each segment of every route.</a:t>
-            </a:r>
-          </a:p>
-          <a:p>
-            <a:r>
-              <a:rPr lang="en-US" sz="2600" dirty="0">
-                <a:solidFill>
-                  <a:schemeClr val="tx1">
-                    <a:lumMod val="95000"/>
-                    <a:lumOff val="5000"/>
-                  </a:schemeClr>
-                </a:solidFill>
-                <a:latin typeface="Times New Roman" panose="02020603050405020304" pitchFamily="18" charset="0"/>
-                <a:cs typeface="Times New Roman" panose="02020603050405020304" pitchFamily="18" charset="0"/>
-              </a:rPr>
-              <a:t>Step 3: Sum all the segment-level predictions to calculate the total fuel required for each route.</a:t>
-            </a:r>
-          </a:p>
-          <a:p>
-            <a:r>
-              <a:rPr lang="en-US" sz="2600" b="1" dirty="0">
-                <a:solidFill>
-                  <a:schemeClr val="tx1">
-                    <a:lumMod val="95000"/>
-                    <a:lumOff val="5000"/>
-                  </a:schemeClr>
-                </a:solidFill>
-                <a:latin typeface="Times New Roman" panose="02020603050405020304" pitchFamily="18" charset="0"/>
-                <a:cs typeface="Times New Roman" panose="02020603050405020304" pitchFamily="18" charset="0"/>
-              </a:rPr>
-              <a:t>Step 4: </a:t>
-            </a:r>
-            <a:r>
-              <a:rPr lang="en-US" sz="2600" dirty="0">
-                <a:solidFill>
-                  <a:schemeClr val="tx1">
-                    <a:lumMod val="95000"/>
-                    <a:lumOff val="5000"/>
-                  </a:schemeClr>
-                </a:solidFill>
-                <a:latin typeface="Times New Roman" panose="02020603050405020304" pitchFamily="18" charset="0"/>
-                <a:cs typeface="Times New Roman" panose="02020603050405020304" pitchFamily="18" charset="0"/>
-              </a:rPr>
-              <a:t>Compare all routes and select the one with the lowest total fuel consumption.</a:t>
-            </a:r>
-          </a:p>
-          <a:p>
-            <a:pPr marL="0" indent="0">
-              <a:buNone/>
-            </a:pPr>
-            <a:r>
-              <a:rPr lang="en-US" sz="2600" dirty="0">
-                <a:solidFill>
-                  <a:schemeClr val="tx1">
-                    <a:lumMod val="95000"/>
-                    <a:lumOff val="5000"/>
-                  </a:schemeClr>
-                </a:solidFill>
-                <a:latin typeface="Times New Roman" panose="02020603050405020304" pitchFamily="18" charset="0"/>
-                <a:cs typeface="Times New Roman" panose="02020603050405020304" pitchFamily="18" charset="0"/>
-              </a:rPr>
-              <a:t>This algorithm ensures that the selected route is not just shortest, but truly fuel-efficient based on </a:t>
-            </a:r>
-            <a:r>
-              <a:rPr lang="en-US" sz="2600" dirty="0" err="1">
-                <a:solidFill>
-                  <a:schemeClr val="tx1">
-                    <a:lumMod val="95000"/>
-                    <a:lumOff val="5000"/>
-                  </a:schemeClr>
-                </a:solidFill>
-                <a:latin typeface="Times New Roman" panose="02020603050405020304" pitchFamily="18" charset="0"/>
-                <a:cs typeface="Times New Roman" panose="02020603050405020304" pitchFamily="18" charset="0"/>
-              </a:rPr>
-              <a:t>behaviour</a:t>
-            </a:r>
-            <a:r>
-              <a:rPr lang="en-US" sz="2600" dirty="0">
-                <a:solidFill>
-                  <a:schemeClr val="tx1">
-                    <a:lumMod val="95000"/>
-                    <a:lumOff val="5000"/>
-                  </a:schemeClr>
-                </a:solidFill>
-                <a:latin typeface="Times New Roman" panose="02020603050405020304" pitchFamily="18" charset="0"/>
-                <a:cs typeface="Times New Roman" panose="02020603050405020304" pitchFamily="18" charset="0"/>
-              </a:rPr>
-              <a:t>, terrain, and traffic factors.</a:t>
-            </a:r>
-          </a:p>
-        </p:txBody>
-      </p:sp>
-    </p:spTree>
-    <p:extLst>
-      <p:ext uri="{BB962C8B-B14F-4D97-AF65-F5344CB8AC3E}">
-        <p14:creationId xmlns:p14="http://schemas.microsoft.com/office/powerpoint/2010/main" val="1503810143"/>
-      </p:ext>
-    </p:extLst>
-  </p:cSld>
-  <p:clrMapOvr>
-    <a:masterClrMapping/>
-  </p:clrMapOvr>
-</p:sld>
-</file>
-
 <file path=ppt/slides/slide8.xml><?xml version="1.0" encoding="utf-8"?>
 <p:sld xmlns:a="http://schemas.openxmlformats.org/drawingml/2006/main" xmlns:r="http://schemas.openxmlformats.org/officeDocument/2006/relationships" xmlns:p="http://schemas.openxmlformats.org/presentationml/2006/main">
   <p:cSld>
@@ -10762,7 +12142,7 @@
           <p:cNvPr id="2" name="Title 1">
             <a:extLst>
               <a:ext uri="{FF2B5EF4-FFF2-40B4-BE49-F238E27FC236}">
-                <a16:creationId xmlns:a16="http://schemas.microsoft.com/office/drawing/2014/main" id="{AC79467F-34C8-37FA-5608-B2897B3F2DBF}"/>
+                <a16:creationId xmlns:a16="http://schemas.microsoft.com/office/drawing/2014/main" id="{32917303-1F0D-5B93-C6A3-B47B04244782}"/>
               </a:ext>
             </a:extLst>
           </p:cNvPr>
@@ -10775,13 +12155,13 @@
         </p:nvSpPr>
         <p:spPr>
           <a:xfrm>
-            <a:off x="1473264" y="969743"/>
-            <a:ext cx="9245472" cy="858253"/>
+            <a:off x="1147396" y="534253"/>
+            <a:ext cx="9897208" cy="1293028"/>
           </a:xfrm>
         </p:spPr>
         <p:txBody>
           <a:bodyPr>
-            <a:normAutofit/>
+            <a:noAutofit/>
           </a:bodyPr>
           <a:lstStyle/>
           <a:p>
@@ -10797,7 +12177,33 @@
                 <a:latin typeface="Times New Roman" panose="02020603050405020304" pitchFamily="18" charset="0"/>
                 <a:cs typeface="Times New Roman" panose="02020603050405020304" pitchFamily="18" charset="0"/>
               </a:rPr>
-              <a:t>TECHNOLOGIES USED (TECH STACK)</a:t>
+              <a:t>AI-BASED FUEL-EFFICIENT ROUTE OPTIMIZATION – </a:t>
+            </a:r>
+            <a:r>
+              <a:rPr lang="en-US" sz="4000" dirty="0">
+                <a:solidFill>
+                  <a:schemeClr val="tx1">
+                    <a:lumMod val="95000"/>
+                    <a:lumOff val="5000"/>
+                  </a:schemeClr>
+                </a:solidFill>
+                <a:latin typeface="Times New Roman" panose="02020603050405020304" pitchFamily="18" charset="0"/>
+                <a:cs typeface="Times New Roman" panose="02020603050405020304" pitchFamily="18" charset="0"/>
+              </a:rPr>
+              <a:t>ALGORITHM</a:t>
+            </a:r>
+            <a:r>
+              <a:rPr lang="en-IN" sz="4000" dirty="0">
+                <a:solidFill>
+                  <a:schemeClr val="tx1">
+                    <a:lumMod val="95000"/>
+                    <a:lumOff val="5000"/>
+                  </a:schemeClr>
+                </a:solidFill>
+                <a:latin typeface="Times New Roman" panose="02020603050405020304" pitchFamily="18" charset="0"/>
+                <a:cs typeface="Times New Roman" panose="02020603050405020304" pitchFamily="18" charset="0"/>
+              </a:rPr>
+              <a:t> STEPS</a:t>
             </a:r>
           </a:p>
         </p:txBody>
@@ -10807,7 +12213,7 @@
           <p:cNvPr id="3" name="Content Placeholder 2">
             <a:extLst>
               <a:ext uri="{FF2B5EF4-FFF2-40B4-BE49-F238E27FC236}">
-                <a16:creationId xmlns:a16="http://schemas.microsoft.com/office/drawing/2014/main" id="{EE125DE4-D226-4656-86A5-7EF3EF3D4E0E}"/>
+                <a16:creationId xmlns:a16="http://schemas.microsoft.com/office/drawing/2014/main" id="{7D1B6679-6A98-0193-1864-16F509B66B54}"/>
               </a:ext>
             </a:extLst>
           </p:cNvPr>
@@ -10820,21 +12226,120 @@
         </p:nvSpPr>
         <p:spPr>
           <a:xfrm>
-            <a:off x="1591734" y="2301267"/>
-            <a:ext cx="3581845" cy="3586990"/>
+            <a:off x="685800" y="1963720"/>
+            <a:ext cx="10820400" cy="4773257"/>
           </a:xfrm>
         </p:spPr>
         <p:txBody>
           <a:bodyPr>
-            <a:normAutofit/>
+            <a:noAutofit/>
           </a:bodyPr>
           <a:lstStyle/>
+          <a:p>
+            <a:r>
+              <a:rPr lang="en-US" sz="2600" b="1" dirty="0">
+                <a:solidFill>
+                  <a:schemeClr val="tx1">
+                    <a:lumMod val="95000"/>
+                    <a:lumOff val="5000"/>
+                  </a:schemeClr>
+                </a:solidFill>
+                <a:latin typeface="Times New Roman" panose="02020603050405020304" pitchFamily="18" charset="0"/>
+                <a:cs typeface="Times New Roman" panose="02020603050405020304" pitchFamily="18" charset="0"/>
+              </a:rPr>
+              <a:t>Step 1: </a:t>
+            </a:r>
+            <a:r>
+              <a:rPr lang="en-US" sz="2600" dirty="0">
+                <a:solidFill>
+                  <a:schemeClr val="tx1">
+                    <a:lumMod val="95000"/>
+                    <a:lumOff val="5000"/>
+                  </a:schemeClr>
+                </a:solidFill>
+                <a:latin typeface="Times New Roman" panose="02020603050405020304" pitchFamily="18" charset="0"/>
+                <a:cs typeface="Times New Roman" panose="02020603050405020304" pitchFamily="18" charset="0"/>
+              </a:rPr>
+              <a:t>Generate all possible routes between the source and destination using OSM/OSRM.</a:t>
+            </a:r>
+          </a:p>
+          <a:p>
+            <a:r>
+              <a:rPr lang="en-US" sz="2600" b="1" dirty="0">
+                <a:solidFill>
+                  <a:schemeClr val="tx1">
+                    <a:lumMod val="95000"/>
+                    <a:lumOff val="5000"/>
+                  </a:schemeClr>
+                </a:solidFill>
+                <a:latin typeface="Times New Roman" panose="02020603050405020304" pitchFamily="18" charset="0"/>
+                <a:cs typeface="Times New Roman" panose="02020603050405020304" pitchFamily="18" charset="0"/>
+              </a:rPr>
+              <a:t>Step 2: </a:t>
+            </a:r>
+            <a:r>
+              <a:rPr lang="en-US" sz="2600" dirty="0">
+                <a:solidFill>
+                  <a:schemeClr val="tx1">
+                    <a:lumMod val="95000"/>
+                    <a:lumOff val="5000"/>
+                  </a:schemeClr>
+                </a:solidFill>
+                <a:latin typeface="Times New Roman" panose="02020603050405020304" pitchFamily="18" charset="0"/>
+                <a:cs typeface="Times New Roman" panose="02020603050405020304" pitchFamily="18" charset="0"/>
+              </a:rPr>
+              <a:t>Use the trained ML model to predict fuel consumption for each segment of every route.</a:t>
+            </a:r>
+          </a:p>
+          <a:p>
+            <a:r>
+              <a:rPr lang="en-US" sz="2600" dirty="0">
+                <a:solidFill>
+                  <a:schemeClr val="tx1">
+                    <a:lumMod val="95000"/>
+                    <a:lumOff val="5000"/>
+                  </a:schemeClr>
+                </a:solidFill>
+                <a:latin typeface="Times New Roman" panose="02020603050405020304" pitchFamily="18" charset="0"/>
+                <a:cs typeface="Times New Roman" panose="02020603050405020304" pitchFamily="18" charset="0"/>
+              </a:rPr>
+              <a:t>Step 3: Sum all the segment-level predictions to calculate the total fuel required for each route.</a:t>
+            </a:r>
+          </a:p>
+          <a:p>
+            <a:r>
+              <a:rPr lang="en-US" sz="2600" b="1" dirty="0">
+                <a:solidFill>
+                  <a:schemeClr val="tx1">
+                    <a:lumMod val="95000"/>
+                    <a:lumOff val="5000"/>
+                  </a:schemeClr>
+                </a:solidFill>
+                <a:latin typeface="Times New Roman" panose="02020603050405020304" pitchFamily="18" charset="0"/>
+                <a:cs typeface="Times New Roman" panose="02020603050405020304" pitchFamily="18" charset="0"/>
+              </a:rPr>
+              <a:t>Step 4: </a:t>
+            </a:r>
+            <a:r>
+              <a:rPr lang="en-US" sz="2600" dirty="0">
+                <a:solidFill>
+                  <a:schemeClr val="tx1">
+                    <a:lumMod val="95000"/>
+                    <a:lumOff val="5000"/>
+                  </a:schemeClr>
+                </a:solidFill>
+                <a:latin typeface="Times New Roman" panose="02020603050405020304" pitchFamily="18" charset="0"/>
+                <a:cs typeface="Times New Roman" panose="02020603050405020304" pitchFamily="18" charset="0"/>
+              </a:rPr>
+              <a:t>Compare all routes and select the one with the lowest total fuel consumption.</a:t>
+            </a:r>
+          </a:p>
           <a:p>
             <a:pPr marL="0" indent="0">
               <a:buNone/>
             </a:pPr>
             <a:r>
-              <a:rPr lang="en-US" sz="2600" b="1" dirty="0">
+              <a:rPr lang="en-US" sz="2600" dirty="0">
                 <a:solidFill>
                   <a:schemeClr val="tx1">
                     <a:lumMod val="95000"/>
@@ -10844,320 +12349,7 @@
                 <a:latin typeface="Times New Roman" panose="02020603050405020304" pitchFamily="18" charset="0"/>
                 <a:cs typeface="Times New Roman" panose="02020603050405020304" pitchFamily="18" charset="0"/>
               </a:rPr>
-              <a:t>Programming                   </a:t>
-            </a:r>
-          </a:p>
-          <a:p>
-            <a:pPr>
-              <a:buFont typeface="Courier New" panose="02070309020205020404" pitchFamily="49" charset="0"/>
-              <a:buChar char="o"/>
-            </a:pPr>
-            <a:r>
-              <a:rPr lang="en-US" sz="2600" dirty="0">
-                <a:solidFill>
-                  <a:schemeClr val="tx1">
-                    <a:lumMod val="95000"/>
-                    <a:lumOff val="5000"/>
-                  </a:schemeClr>
-                </a:solidFill>
-                <a:latin typeface="Times New Roman" panose="02020603050405020304" pitchFamily="18" charset="0"/>
-                <a:cs typeface="Times New Roman" panose="02020603050405020304" pitchFamily="18" charset="0"/>
-              </a:rPr>
-              <a:t> Python</a:t>
-            </a:r>
-          </a:p>
-          <a:p>
-            <a:pPr>
-              <a:buFont typeface="Courier New" panose="02070309020205020404" pitchFamily="49" charset="0"/>
-              <a:buChar char="o"/>
-            </a:pPr>
-            <a:r>
-              <a:rPr lang="en-US" sz="2600" dirty="0">
-                <a:solidFill>
-                  <a:schemeClr val="tx1">
-                    <a:lumMod val="95000"/>
-                    <a:lumOff val="5000"/>
-                  </a:schemeClr>
-                </a:solidFill>
-                <a:latin typeface="Times New Roman" panose="02020603050405020304" pitchFamily="18" charset="0"/>
-                <a:cs typeface="Times New Roman" panose="02020603050405020304" pitchFamily="18" charset="0"/>
-              </a:rPr>
-              <a:t> Flask (web interface)</a:t>
-            </a:r>
-          </a:p>
-          <a:p>
-            <a:pPr marL="0" indent="0">
-              <a:buNone/>
-            </a:pPr>
-            <a:r>
-              <a:rPr lang="en-US" sz="2600" b="1" dirty="0">
-                <a:solidFill>
-                  <a:schemeClr val="tx1">
-                    <a:lumMod val="95000"/>
-                    <a:lumOff val="5000"/>
-                  </a:schemeClr>
-                </a:solidFill>
-                <a:latin typeface="Times New Roman" panose="02020603050405020304" pitchFamily="18" charset="0"/>
-                <a:cs typeface="Times New Roman" panose="02020603050405020304" pitchFamily="18" charset="0"/>
-              </a:rPr>
-              <a:t>Machine Learning</a:t>
-            </a:r>
-          </a:p>
-          <a:p>
-            <a:pPr>
-              <a:buFont typeface="Courier New" panose="02070309020205020404" pitchFamily="49" charset="0"/>
-              <a:buChar char="o"/>
-            </a:pPr>
-            <a:r>
-              <a:rPr lang="en-US" sz="2600" dirty="0">
-                <a:solidFill>
-                  <a:schemeClr val="tx1">
-                    <a:lumMod val="95000"/>
-                    <a:lumOff val="5000"/>
-                  </a:schemeClr>
-                </a:solidFill>
-                <a:latin typeface="Times New Roman" panose="02020603050405020304" pitchFamily="18" charset="0"/>
-                <a:cs typeface="Times New Roman" panose="02020603050405020304" pitchFamily="18" charset="0"/>
-              </a:rPr>
-              <a:t> Scikit-learn</a:t>
-            </a:r>
-          </a:p>
-          <a:p>
-            <a:pPr>
-              <a:buFont typeface="Courier New" panose="02070309020205020404" pitchFamily="49" charset="0"/>
-              <a:buChar char="o"/>
-            </a:pPr>
-            <a:r>
-              <a:rPr lang="en-US" sz="2600" dirty="0">
-                <a:solidFill>
-                  <a:schemeClr val="tx1">
-                    <a:lumMod val="95000"/>
-                    <a:lumOff val="5000"/>
-                  </a:schemeClr>
-                </a:solidFill>
-                <a:latin typeface="Times New Roman" panose="02020603050405020304" pitchFamily="18" charset="0"/>
-                <a:cs typeface="Times New Roman" panose="02020603050405020304" pitchFamily="18" charset="0"/>
-              </a:rPr>
-              <a:t> </a:t>
-            </a:r>
-            <a:r>
-              <a:rPr lang="en-US" sz="2600" dirty="0" err="1">
-                <a:solidFill>
-                  <a:schemeClr val="tx1">
-                    <a:lumMod val="95000"/>
-                    <a:lumOff val="5000"/>
-                  </a:schemeClr>
-                </a:solidFill>
-                <a:latin typeface="Times New Roman" panose="02020603050405020304" pitchFamily="18" charset="0"/>
-                <a:cs typeface="Times New Roman" panose="02020603050405020304" pitchFamily="18" charset="0"/>
-              </a:rPr>
-              <a:t>XGBoost</a:t>
-            </a:r>
-            <a:endParaRPr lang="en-US" sz="2600" dirty="0">
-              <a:solidFill>
-                <a:schemeClr val="tx1">
-                  <a:lumMod val="95000"/>
-                  <a:lumOff val="5000"/>
-                </a:schemeClr>
-              </a:solidFill>
-              <a:latin typeface="Times New Roman" panose="02020603050405020304" pitchFamily="18" charset="0"/>
-              <a:cs typeface="Times New Roman" panose="02020603050405020304" pitchFamily="18" charset="0"/>
-            </a:endParaRPr>
-          </a:p>
-        </p:txBody>
-      </p:sp>
-      <p:sp>
-        <p:nvSpPr>
-          <p:cNvPr id="5" name="TextBox 4">
-            <a:extLst>
-              <a:ext uri="{FF2B5EF4-FFF2-40B4-BE49-F238E27FC236}">
-                <a16:creationId xmlns:a16="http://schemas.microsoft.com/office/drawing/2014/main" id="{EEE8BA7D-0838-7985-C0E9-69846FC55840}"/>
-              </a:ext>
-            </a:extLst>
-          </p:cNvPr>
-          <p:cNvSpPr txBox="1"/>
-          <p:nvPr/>
-        </p:nvSpPr>
-        <p:spPr>
-          <a:xfrm>
-            <a:off x="5414656" y="2595047"/>
-            <a:ext cx="6100010" cy="3293209"/>
-          </a:xfrm>
-          <a:prstGeom prst="rect">
-            <a:avLst/>
-          </a:prstGeom>
-          <a:noFill/>
-        </p:spPr>
-        <p:txBody>
-          <a:bodyPr wrap="square">
-            <a:spAutoFit/>
-          </a:bodyPr>
-          <a:lstStyle/>
-          <a:p>
-            <a:r>
-              <a:rPr lang="en-IN" sz="2600" b="1" dirty="0">
-                <a:solidFill>
-                  <a:schemeClr val="tx1">
-                    <a:lumMod val="95000"/>
-                    <a:lumOff val="5000"/>
-                  </a:schemeClr>
-                </a:solidFill>
-                <a:latin typeface="Times New Roman" panose="02020603050405020304" pitchFamily="18" charset="0"/>
-                <a:cs typeface="Times New Roman" panose="02020603050405020304" pitchFamily="18" charset="0"/>
-              </a:rPr>
-              <a:t>Routing / Maps</a:t>
-            </a:r>
-          </a:p>
-          <a:p>
-            <a:pPr marL="457200" indent="-457200">
-              <a:buFont typeface="Courier New" panose="02070309020205020404" pitchFamily="49" charset="0"/>
-              <a:buChar char="o"/>
-            </a:pPr>
-            <a:r>
-              <a:rPr lang="en-IN" sz="2600" dirty="0">
-                <a:solidFill>
-                  <a:schemeClr val="tx1">
-                    <a:lumMod val="95000"/>
-                    <a:lumOff val="5000"/>
-                  </a:schemeClr>
-                </a:solidFill>
-                <a:latin typeface="Times New Roman" panose="02020603050405020304" pitchFamily="18" charset="0"/>
-                <a:cs typeface="Times New Roman" panose="02020603050405020304" pitchFamily="18" charset="0"/>
-              </a:rPr>
-              <a:t>OSRM</a:t>
-            </a:r>
-          </a:p>
-          <a:p>
-            <a:pPr marL="457200" indent="-457200">
-              <a:buFont typeface="Courier New" panose="02070309020205020404" pitchFamily="49" charset="0"/>
-              <a:buChar char="o"/>
-            </a:pPr>
-            <a:r>
-              <a:rPr lang="en-IN" sz="2600" dirty="0" err="1">
-                <a:solidFill>
-                  <a:schemeClr val="tx1">
-                    <a:lumMod val="95000"/>
-                    <a:lumOff val="5000"/>
-                  </a:schemeClr>
-                </a:solidFill>
-                <a:latin typeface="Times New Roman" panose="02020603050405020304" pitchFamily="18" charset="0"/>
-                <a:cs typeface="Times New Roman" panose="02020603050405020304" pitchFamily="18" charset="0"/>
-              </a:rPr>
-              <a:t>OSMnx</a:t>
-            </a:r>
-            <a:endParaRPr lang="en-IN" sz="2600" dirty="0">
-              <a:solidFill>
-                <a:schemeClr val="tx1">
-                  <a:lumMod val="95000"/>
-                  <a:lumOff val="5000"/>
-                </a:schemeClr>
-              </a:solidFill>
-              <a:latin typeface="Times New Roman" panose="02020603050405020304" pitchFamily="18" charset="0"/>
-              <a:cs typeface="Times New Roman" panose="02020603050405020304" pitchFamily="18" charset="0"/>
-            </a:endParaRPr>
-          </a:p>
-          <a:p>
-            <a:pPr marL="457200" indent="-457200">
-              <a:buFont typeface="Courier New" panose="02070309020205020404" pitchFamily="49" charset="0"/>
-              <a:buChar char="o"/>
-            </a:pPr>
-            <a:r>
-              <a:rPr lang="en-IN" sz="2600" dirty="0">
-                <a:solidFill>
-                  <a:schemeClr val="tx1">
-                    <a:lumMod val="95000"/>
-                    <a:lumOff val="5000"/>
-                  </a:schemeClr>
-                </a:solidFill>
-                <a:latin typeface="Times New Roman" panose="02020603050405020304" pitchFamily="18" charset="0"/>
-                <a:cs typeface="Times New Roman" panose="02020603050405020304" pitchFamily="18" charset="0"/>
-              </a:rPr>
-              <a:t>OpenStreetMap</a:t>
-            </a:r>
-          </a:p>
-          <a:p>
-            <a:r>
-              <a:rPr lang="en-IN" sz="2600" b="1" dirty="0">
-                <a:solidFill>
-                  <a:schemeClr val="tx1">
-                    <a:lumMod val="95000"/>
-                    <a:lumOff val="5000"/>
-                  </a:schemeClr>
-                </a:solidFill>
-                <a:latin typeface="Times New Roman" panose="02020603050405020304" pitchFamily="18" charset="0"/>
-                <a:cs typeface="Times New Roman" panose="02020603050405020304" pitchFamily="18" charset="0"/>
-              </a:rPr>
-              <a:t>Data Sources</a:t>
-            </a:r>
-          </a:p>
-          <a:p>
-            <a:pPr marL="457200" indent="-457200">
-              <a:buFont typeface="Courier New" panose="02070309020205020404" pitchFamily="49" charset="0"/>
-              <a:buChar char="o"/>
-            </a:pPr>
-            <a:r>
-              <a:rPr lang="en-IN" sz="2600" dirty="0" err="1">
-                <a:solidFill>
-                  <a:schemeClr val="tx1">
-                    <a:lumMod val="95000"/>
-                    <a:lumOff val="5000"/>
-                  </a:schemeClr>
-                </a:solidFill>
-                <a:latin typeface="Times New Roman" panose="02020603050405020304" pitchFamily="18" charset="0"/>
-                <a:cs typeface="Times New Roman" panose="02020603050405020304" pitchFamily="18" charset="0"/>
-              </a:rPr>
-              <a:t>eVED</a:t>
-            </a:r>
-            <a:r>
-              <a:rPr lang="en-IN" sz="2600" dirty="0">
-                <a:solidFill>
-                  <a:schemeClr val="tx1">
-                    <a:lumMod val="95000"/>
-                    <a:lumOff val="5000"/>
-                  </a:schemeClr>
-                </a:solidFill>
-                <a:latin typeface="Times New Roman" panose="02020603050405020304" pitchFamily="18" charset="0"/>
-                <a:cs typeface="Times New Roman" panose="02020603050405020304" pitchFamily="18" charset="0"/>
-              </a:rPr>
-              <a:t> Dataset</a:t>
-            </a:r>
-          </a:p>
-          <a:p>
-            <a:pPr marL="457200" indent="-457200">
-              <a:buFont typeface="Courier New" panose="02070309020205020404" pitchFamily="49" charset="0"/>
-              <a:buChar char="o"/>
-            </a:pPr>
-            <a:r>
-              <a:rPr lang="en-IN" sz="2600" dirty="0">
-                <a:solidFill>
-                  <a:schemeClr val="tx1">
-                    <a:lumMod val="95000"/>
-                    <a:lumOff val="5000"/>
-                  </a:schemeClr>
-                </a:solidFill>
-                <a:latin typeface="Times New Roman" panose="02020603050405020304" pitchFamily="18" charset="0"/>
-                <a:cs typeface="Times New Roman" panose="02020603050405020304" pitchFamily="18" charset="0"/>
-              </a:rPr>
-              <a:t>NASA SRTM Elevation</a:t>
-            </a:r>
-          </a:p>
-          <a:p>
-            <a:pPr marL="457200" indent="-457200">
-              <a:buFont typeface="Courier New" panose="02070309020205020404" pitchFamily="49" charset="0"/>
-              <a:buChar char="o"/>
-            </a:pPr>
-            <a:r>
-              <a:rPr lang="en-IN" sz="2600" dirty="0">
-                <a:solidFill>
-                  <a:schemeClr val="tx1">
-                    <a:lumMod val="95000"/>
-                    <a:lumOff val="5000"/>
-                  </a:schemeClr>
-                </a:solidFill>
-                <a:latin typeface="Times New Roman" panose="02020603050405020304" pitchFamily="18" charset="0"/>
-                <a:cs typeface="Times New Roman" panose="02020603050405020304" pitchFamily="18" charset="0"/>
-              </a:rPr>
-              <a:t>Google Maps / TomTom Traffic API</a:t>
+              <a:t>This algorithm ensures that the selected route is not just shortest, but truly fuel-efficient based on behavior, terrain, and traffic factors.</a:t>
             </a:r>
           </a:p>
         </p:txBody>
@@ -11165,7 +12357,7 @@
     </p:spTree>
     <p:extLst>
       <p:ext uri="{BB962C8B-B14F-4D97-AF65-F5344CB8AC3E}">
-        <p14:creationId xmlns:p14="http://schemas.microsoft.com/office/powerpoint/2010/main" val="298293338"/>
+        <p14:creationId xmlns:p14="http://schemas.microsoft.com/office/powerpoint/2010/main" val="1503810143"/>
       </p:ext>
     </p:extLst>
   </p:cSld>
@@ -11197,7 +12389,7 @@
           <p:cNvPr id="2" name="Title 1">
             <a:extLst>
               <a:ext uri="{FF2B5EF4-FFF2-40B4-BE49-F238E27FC236}">
-                <a16:creationId xmlns:a16="http://schemas.microsoft.com/office/drawing/2014/main" id="{274550BE-19B8-6016-C12D-BBB8175C74B5}"/>
+                <a16:creationId xmlns:a16="http://schemas.microsoft.com/office/drawing/2014/main" id="{BF820363-20D4-8553-CD2B-619436C728B7}"/>
               </a:ext>
             </a:extLst>
           </p:cNvPr>
@@ -11210,8 +12402,8 @@
         </p:nvSpPr>
         <p:spPr>
           <a:xfrm>
-            <a:off x="1797666" y="832758"/>
-            <a:ext cx="8596668" cy="798095"/>
+            <a:off x="1640156" y="232015"/>
+            <a:ext cx="8911687" cy="1280890"/>
           </a:xfrm>
         </p:spPr>
         <p:txBody>
@@ -11222,17 +12414,11 @@
           <a:p>
             <a:pPr algn="ctr"/>
             <a:r>
-              <a:rPr lang="en-IN" sz="4000" dirty="0">
-                <a:solidFill>
-                  <a:schemeClr val="tx1">
-                    <a:lumMod val="95000"/>
-                    <a:lumOff val="5000"/>
-                  </a:schemeClr>
-                </a:solidFill>
-                <a:latin typeface="Times New Roman" panose="02020603050405020304" pitchFamily="18" charset="0"/>
-                <a:cs typeface="Times New Roman" panose="02020603050405020304" pitchFamily="18" charset="0"/>
-              </a:rPr>
-              <a:t>BENEFITS</a:t>
+              <a:rPr lang="en-US" sz="4000" dirty="0">
+                <a:latin typeface="Times New Roman" panose="02020603050405020304" pitchFamily="18" charset="0"/>
+                <a:cs typeface="Times New Roman" panose="02020603050405020304" pitchFamily="18" charset="0"/>
+              </a:rPr>
+              <a:t>DATASET DETAILS AND FEATURES</a:t>
             </a:r>
           </a:p>
         </p:txBody>
@@ -11242,7 +12428,7 @@
           <p:cNvPr id="3" name="Content Placeholder 2">
             <a:extLst>
               <a:ext uri="{FF2B5EF4-FFF2-40B4-BE49-F238E27FC236}">
-                <a16:creationId xmlns:a16="http://schemas.microsoft.com/office/drawing/2014/main" id="{3DEF2935-CCEA-6BEA-6EBF-58C2156FA466}"/>
+                <a16:creationId xmlns:a16="http://schemas.microsoft.com/office/drawing/2014/main" id="{639D785E-AAAD-5E60-D14A-F09AA4C0CA85}"/>
               </a:ext>
             </a:extLst>
           </p:cNvPr>
@@ -11255,153 +12441,1000 @@
         </p:nvSpPr>
         <p:spPr>
           <a:xfrm>
-            <a:off x="2274261" y="1841126"/>
-            <a:ext cx="8120073" cy="4501799"/>
+            <a:off x="683675" y="1285526"/>
+            <a:ext cx="6376189" cy="4840954"/>
           </a:xfrm>
         </p:spPr>
         <p:txBody>
           <a:bodyPr>
-            <a:noAutofit/>
+            <a:normAutofit/>
           </a:bodyPr>
           <a:lstStyle/>
           <a:p>
-            <a:pPr>
-              <a:lnSpc>
-                <a:spcPct val="150000"/>
-              </a:lnSpc>
-              <a:buFont typeface="Courier New" panose="02070309020205020404" pitchFamily="49" charset="0"/>
-              <a:buChar char="o"/>
+            <a:pPr marL="0" indent="0">
+              <a:buNone/>
             </a:pPr>
             <a:r>
-              <a:rPr lang="en-IN" sz="2600" dirty="0">
-                <a:solidFill>
-                  <a:schemeClr val="tx1">
-                    <a:lumMod val="95000"/>
-                    <a:lumOff val="5000"/>
-                  </a:schemeClr>
-                </a:solidFill>
-                <a:latin typeface="Times New Roman" panose="02020603050405020304" pitchFamily="18" charset="0"/>
-                <a:cs typeface="Times New Roman" panose="02020603050405020304" pitchFamily="18" charset="0"/>
-              </a:rPr>
-              <a:t> Saves fuel cost</a:t>
-            </a:r>
-          </a:p>
-          <a:p>
-            <a:pPr>
-              <a:lnSpc>
-                <a:spcPct val="150000"/>
-              </a:lnSpc>
-              <a:buFont typeface="Courier New" panose="02070309020205020404" pitchFamily="49" charset="0"/>
-              <a:buChar char="o"/>
+              <a:rPr lang="en-US" sz="2400" b="1" u="sng" dirty="0">
+                <a:latin typeface="Times New Roman" panose="02020603050405020304" pitchFamily="18" charset="0"/>
+                <a:cs typeface="Times New Roman" panose="02020603050405020304" pitchFamily="18" charset="0"/>
+              </a:rPr>
+              <a:t>Dataset Overview</a:t>
+            </a:r>
+            <a:endParaRPr lang="en-US" sz="2400" u="sng" dirty="0">
+              <a:latin typeface="Times New Roman" panose="02020603050405020304" pitchFamily="18" charset="0"/>
+              <a:cs typeface="Times New Roman" panose="02020603050405020304" pitchFamily="18" charset="0"/>
+            </a:endParaRPr>
+          </a:p>
+          <a:p>
+            <a:r>
+              <a:rPr lang="en-US" sz="2000" dirty="0">
+                <a:latin typeface="Times New Roman" panose="02020603050405020304" pitchFamily="18" charset="0"/>
+                <a:cs typeface="Times New Roman" panose="02020603050405020304" pitchFamily="18" charset="0"/>
+              </a:rPr>
+              <a:t>Name: eVED-Inspired Indian IoV Fuel Consumption Dataset</a:t>
+            </a:r>
+          </a:p>
+          <a:p>
+            <a:r>
+              <a:rPr lang="en-US" sz="2000" dirty="0">
+                <a:latin typeface="Times New Roman" panose="02020603050405020304" pitchFamily="18" charset="0"/>
+                <a:cs typeface="Times New Roman" panose="02020603050405020304" pitchFamily="18" charset="0"/>
+              </a:rPr>
+              <a:t>Type: Synthetic, physics-based (modeled after the Extended Vehicle Energy Dataset)</a:t>
+            </a:r>
+          </a:p>
+          <a:p>
+            <a:r>
+              <a:rPr lang="en-US" sz="2000" dirty="0">
+                <a:latin typeface="Times New Roman" panose="02020603050405020304" pitchFamily="18" charset="0"/>
+                <a:cs typeface="Times New Roman" panose="02020603050405020304" pitchFamily="18" charset="0"/>
+              </a:rPr>
+              <a:t>Size: 5,000 samples</a:t>
+            </a:r>
+          </a:p>
+          <a:p>
+            <a:r>
+              <a:rPr lang="en-US" sz="2000" dirty="0">
+                <a:latin typeface="Times New Roman" panose="02020603050405020304" pitchFamily="18" charset="0"/>
+                <a:cs typeface="Times New Roman" panose="02020603050405020304" pitchFamily="18" charset="0"/>
+              </a:rPr>
+              <a:t>Target Variable: Fuel Rate (Liters per hour)</a:t>
+            </a:r>
+          </a:p>
+          <a:p>
+            <a:r>
+              <a:rPr lang="en-US" sz="2000" dirty="0">
+                <a:latin typeface="Times New Roman" panose="02020603050405020304" pitchFamily="18" charset="0"/>
+                <a:cs typeface="Times New Roman" panose="02020603050405020304" pitchFamily="18" charset="0"/>
+              </a:rPr>
+              <a:t>Coverage: 10 Indian cities (Mumbai, Delhi, Bangalore, Kolkata, Chennai, Hyderabad, Pune, Jaipur, Lucknow, Ahmedabad)</a:t>
+            </a:r>
+          </a:p>
+          <a:p>
+            <a:r>
+              <a:rPr lang="en-US" sz="2000" dirty="0">
+                <a:latin typeface="Times New Roman" panose="02020603050405020304" pitchFamily="18" charset="0"/>
+                <a:cs typeface="Times New Roman" panose="02020603050405020304" pitchFamily="18" charset="0"/>
+              </a:rPr>
+              <a:t>Vehicle Classes: Hatchback, Sedan, SUV, MUV.</a:t>
+            </a:r>
+          </a:p>
+          <a:p>
+            <a:pPr marL="0" indent="0">
+              <a:buNone/>
             </a:pPr>
-            <a:r>
-              <a:rPr lang="en-IN" sz="2600" dirty="0">
-                <a:solidFill>
-                  <a:schemeClr val="tx1">
-                    <a:lumMod val="95000"/>
-                    <a:lumOff val="5000"/>
-                  </a:schemeClr>
-                </a:solidFill>
-                <a:latin typeface="Times New Roman" panose="02020603050405020304" pitchFamily="18" charset="0"/>
-                <a:cs typeface="Times New Roman" panose="02020603050405020304" pitchFamily="18" charset="0"/>
-              </a:rPr>
-              <a:t> Reduces CO₂ emissions</a:t>
-            </a:r>
-          </a:p>
-          <a:p>
-            <a:pPr>
-              <a:lnSpc>
-                <a:spcPct val="150000"/>
-              </a:lnSpc>
-              <a:buFont typeface="Courier New" panose="02070309020205020404" pitchFamily="49" charset="0"/>
-              <a:buChar char="o"/>
+            <a:endParaRPr lang="en-US" sz="2000" dirty="0">
+              <a:latin typeface="Times New Roman" panose="02020603050405020304" pitchFamily="18" charset="0"/>
+              <a:cs typeface="Times New Roman" panose="02020603050405020304" pitchFamily="18" charset="0"/>
+            </a:endParaRPr>
+          </a:p>
+          <a:p>
+            <a:pPr marL="0" indent="0">
+              <a:buNone/>
             </a:pPr>
-            <a:r>
-              <a:rPr lang="en-IN" sz="2600" dirty="0">
-                <a:solidFill>
-                  <a:schemeClr val="tx1">
-                    <a:lumMod val="95000"/>
-                    <a:lumOff val="5000"/>
-                  </a:schemeClr>
-                </a:solidFill>
-                <a:latin typeface="Times New Roman" panose="02020603050405020304" pitchFamily="18" charset="0"/>
-                <a:cs typeface="Times New Roman" panose="02020603050405020304" pitchFamily="18" charset="0"/>
-              </a:rPr>
-              <a:t> Considers real driving behaviour</a:t>
-            </a:r>
-          </a:p>
-          <a:p>
-            <a:pPr>
-              <a:lnSpc>
-                <a:spcPct val="150000"/>
-              </a:lnSpc>
-              <a:buFont typeface="Courier New" panose="02070309020205020404" pitchFamily="49" charset="0"/>
-              <a:buChar char="o"/>
+            <a:endParaRPr lang="en-US" sz="2000" dirty="0">
+              <a:latin typeface="Times New Roman" panose="02020603050405020304" pitchFamily="18" charset="0"/>
+              <a:cs typeface="Times New Roman" panose="02020603050405020304" pitchFamily="18" charset="0"/>
+            </a:endParaRPr>
+          </a:p>
+          <a:p>
+            <a:pPr marL="0" indent="0">
+              <a:buNone/>
             </a:pPr>
-            <a:r>
-              <a:rPr lang="en-IN" sz="2600" dirty="0">
-                <a:solidFill>
-                  <a:schemeClr val="tx1">
-                    <a:lumMod val="95000"/>
-                    <a:lumOff val="5000"/>
-                  </a:schemeClr>
-                </a:solidFill>
-                <a:latin typeface="Times New Roman" panose="02020603050405020304" pitchFamily="18" charset="0"/>
-                <a:cs typeface="Times New Roman" panose="02020603050405020304" pitchFamily="18" charset="0"/>
-              </a:rPr>
-              <a:t> Better than traditional shortest-path apps</a:t>
-            </a:r>
-          </a:p>
-          <a:p>
-            <a:pPr>
-              <a:lnSpc>
-                <a:spcPct val="150000"/>
-              </a:lnSpc>
-              <a:buFont typeface="Courier New" panose="02070309020205020404" pitchFamily="49" charset="0"/>
-              <a:buChar char="o"/>
+            <a:endParaRPr lang="en-US" sz="2000" dirty="0">
+              <a:latin typeface="Times New Roman" panose="02020603050405020304" pitchFamily="18" charset="0"/>
+              <a:cs typeface="Times New Roman" panose="02020603050405020304" pitchFamily="18" charset="0"/>
+            </a:endParaRPr>
+          </a:p>
+          <a:p>
+            <a:pPr marL="0" indent="0">
+              <a:buNone/>
             </a:pPr>
-            <a:r>
-              <a:rPr lang="en-IN" sz="2600" dirty="0">
-                <a:solidFill>
-                  <a:schemeClr val="tx1">
-                    <a:lumMod val="95000"/>
-                    <a:lumOff val="5000"/>
-                  </a:schemeClr>
-                </a:solidFill>
-                <a:latin typeface="Times New Roman" panose="02020603050405020304" pitchFamily="18" charset="0"/>
-                <a:cs typeface="Times New Roman" panose="02020603050405020304" pitchFamily="18" charset="0"/>
-              </a:rPr>
-              <a:t> Suitable for navigation apps &amp; logistics</a:t>
-            </a:r>
-          </a:p>
-          <a:p>
-            <a:pPr>
-              <a:lnSpc>
-                <a:spcPct val="150000"/>
-              </a:lnSpc>
-              <a:buFont typeface="Courier New" panose="02070309020205020404" pitchFamily="49" charset="0"/>
-              <a:buChar char="o"/>
+            <a:endParaRPr lang="en-US" sz="2000" dirty="0">
+              <a:latin typeface="Times New Roman" panose="02020603050405020304" pitchFamily="18" charset="0"/>
+              <a:cs typeface="Times New Roman" panose="02020603050405020304" pitchFamily="18" charset="0"/>
+            </a:endParaRPr>
+          </a:p>
+          <a:p>
+            <a:pPr marL="0" indent="0">
+              <a:buNone/>
             </a:pPr>
-            <a:r>
-              <a:rPr lang="en-IN" sz="2600" dirty="0">
-                <a:solidFill>
-                  <a:schemeClr val="tx1">
-                    <a:lumMod val="95000"/>
-                    <a:lumOff val="5000"/>
-                  </a:schemeClr>
-                </a:solidFill>
-                <a:latin typeface="Times New Roman" panose="02020603050405020304" pitchFamily="18" charset="0"/>
-                <a:cs typeface="Times New Roman" panose="02020603050405020304" pitchFamily="18" charset="0"/>
-              </a:rPr>
-              <a:t>Supports sustainable transportation</a:t>
-            </a:r>
+            <a:endParaRPr lang="en-US" sz="2000" dirty="0">
+              <a:latin typeface="Times New Roman" panose="02020603050405020304" pitchFamily="18" charset="0"/>
+              <a:cs typeface="Times New Roman" panose="02020603050405020304" pitchFamily="18" charset="0"/>
+            </a:endParaRPr>
+          </a:p>
+          <a:p>
+            <a:endParaRPr lang="en-US" sz="2000" dirty="0">
+              <a:latin typeface="Times New Roman" panose="02020603050405020304" pitchFamily="18" charset="0"/>
+              <a:cs typeface="Times New Roman" panose="02020603050405020304" pitchFamily="18" charset="0"/>
+            </a:endParaRPr>
+          </a:p>
+        </p:txBody>
+      </p:sp>
+      <p:graphicFrame>
+        <p:nvGraphicFramePr>
+          <p:cNvPr id="10" name="Table 9">
+            <a:extLst>
+              <a:ext uri="{FF2B5EF4-FFF2-40B4-BE49-F238E27FC236}">
+                <a16:creationId xmlns:a16="http://schemas.microsoft.com/office/drawing/2014/main" id="{CF6B10E8-50F3-1D9B-1E07-6E5E32F6106D}"/>
+              </a:ext>
+            </a:extLst>
+          </p:cNvPr>
+          <p:cNvGraphicFramePr>
+            <a:graphicFrameLocks noGrp="1"/>
+          </p:cNvGraphicFramePr>
+          <p:nvPr>
+            <p:extLst>
+              <p:ext uri="{D42A27DB-BD31-4B8C-83A1-F6EECF244321}">
+                <p14:modId xmlns:p14="http://schemas.microsoft.com/office/powerpoint/2010/main" val="3843716024"/>
+              </p:ext>
+            </p:extLst>
+          </p:nvPr>
+        </p:nvGraphicFramePr>
+        <p:xfrm>
+          <a:off x="7326195" y="1685210"/>
+          <a:ext cx="4545759" cy="4038934"/>
+        </p:xfrm>
+        <a:graphic>
+          <a:graphicData uri="http://schemas.openxmlformats.org/drawingml/2006/table">
+            <a:tbl>
+              <a:tblPr>
+                <a:tableStyleId>{5940675A-B579-460E-94D1-54222C63F5DA}</a:tableStyleId>
+              </a:tblPr>
+              <a:tblGrid>
+                <a:gridCol w="1515253">
+                  <a:extLst>
+                    <a:ext uri="{9D8B030D-6E8A-4147-A177-3AD203B41FA5}">
+                      <a16:colId xmlns:a16="http://schemas.microsoft.com/office/drawing/2014/main" val="4095758801"/>
+                    </a:ext>
+                  </a:extLst>
+                </a:gridCol>
+                <a:gridCol w="1515253">
+                  <a:extLst>
+                    <a:ext uri="{9D8B030D-6E8A-4147-A177-3AD203B41FA5}">
+                      <a16:colId xmlns:a16="http://schemas.microsoft.com/office/drawing/2014/main" val="1234016272"/>
+                    </a:ext>
+                  </a:extLst>
+                </a:gridCol>
+                <a:gridCol w="1515253">
+                  <a:extLst>
+                    <a:ext uri="{9D8B030D-6E8A-4147-A177-3AD203B41FA5}">
+                      <a16:colId xmlns:a16="http://schemas.microsoft.com/office/drawing/2014/main" val="2374954389"/>
+                    </a:ext>
+                  </a:extLst>
+                </a:gridCol>
+              </a:tblGrid>
+              <a:tr h="255639">
+                <a:tc>
+                  <a:txBody>
+                    <a:bodyPr/>
+                    <a:lstStyle/>
+                    <a:p>
+                      <a:pPr indent="0" algn="l">
+                        <a:buNone/>
+                      </a:pPr>
+                      <a:r>
+                        <a:rPr lang="en-US" sz="1050" b="0" dirty="0">
+                          <a:effectLst/>
+                        </a:rPr>
+                        <a:t>Feature</a:t>
+                      </a:r>
+                      <a:endParaRPr lang="en-US" sz="1050" b="0" dirty="0">
+                        <a:effectLst/>
+                        <a:latin typeface="Times New Roman" panose="02020603050405020304" pitchFamily="18" charset="0"/>
+                        <a:cs typeface="Times New Roman" panose="02020603050405020304" pitchFamily="18" charset="0"/>
+                      </a:endParaRPr>
+                    </a:p>
+                  </a:txBody>
+                  <a:tcPr marL="60722" marR="60722" marT="30361" marB="30361" anchor="ctr"/>
+                </a:tc>
+                <a:tc>
+                  <a:txBody>
+                    <a:bodyPr/>
+                    <a:lstStyle/>
+                    <a:p>
+                      <a:pPr indent="0" algn="l">
+                        <a:buNone/>
+                      </a:pPr>
+                      <a:r>
+                        <a:rPr lang="en-US" sz="1050" b="0" dirty="0">
+                          <a:effectLst/>
+                        </a:rPr>
+                        <a:t>Description</a:t>
+                      </a:r>
+                      <a:endParaRPr lang="en-US" sz="1050" b="0" dirty="0">
+                        <a:effectLst/>
+                        <a:latin typeface="Times New Roman" panose="02020603050405020304" pitchFamily="18" charset="0"/>
+                        <a:cs typeface="Times New Roman" panose="02020603050405020304" pitchFamily="18" charset="0"/>
+                      </a:endParaRPr>
+                    </a:p>
+                  </a:txBody>
+                  <a:tcPr marL="60722" marR="60722" marT="30361" marB="30361" anchor="ctr"/>
+                </a:tc>
+                <a:tc>
+                  <a:txBody>
+                    <a:bodyPr/>
+                    <a:lstStyle/>
+                    <a:p>
+                      <a:pPr indent="0" algn="l">
+                        <a:buNone/>
+                      </a:pPr>
+                      <a:r>
+                        <a:rPr lang="en-US" sz="1050" b="0" dirty="0">
+                          <a:effectLst/>
+                        </a:rPr>
+                        <a:t>Unit</a:t>
+                      </a:r>
+                      <a:endParaRPr lang="en-US" sz="1050" b="0" dirty="0">
+                        <a:effectLst/>
+                        <a:latin typeface="Times New Roman" panose="02020603050405020304" pitchFamily="18" charset="0"/>
+                        <a:cs typeface="Times New Roman" panose="02020603050405020304" pitchFamily="18" charset="0"/>
+                      </a:endParaRPr>
+                    </a:p>
+                  </a:txBody>
+                  <a:tcPr marL="60722" marR="60722" marT="30361" marB="30361" anchor="ctr"/>
+                </a:tc>
+                <a:extLst>
+                  <a:ext uri="{0D108BD9-81ED-4DB2-BD59-A6C34878D82A}">
+                    <a16:rowId xmlns:a16="http://schemas.microsoft.com/office/drawing/2014/main" val="1858966261"/>
+                  </a:ext>
+                </a:extLst>
+              </a:tr>
+              <a:tr h="255639">
+                <a:tc>
+                  <a:txBody>
+                    <a:bodyPr/>
+                    <a:lstStyle/>
+                    <a:p>
+                      <a:pPr indent="0">
+                        <a:buNone/>
+                      </a:pPr>
+                      <a:r>
+                        <a:rPr lang="en-US" sz="1050" dirty="0">
+                          <a:effectLst/>
+                        </a:rPr>
+                        <a:t>Speed</a:t>
+                      </a:r>
+                      <a:endParaRPr lang="en-US" sz="1050" dirty="0">
+                        <a:effectLst/>
+                        <a:latin typeface="Times New Roman" panose="02020603050405020304" pitchFamily="18" charset="0"/>
+                        <a:cs typeface="Times New Roman" panose="02020603050405020304" pitchFamily="18" charset="0"/>
+                      </a:endParaRPr>
+                    </a:p>
+                  </a:txBody>
+                  <a:tcPr marL="60722" marR="60722" marT="30361" marB="30361" anchor="ctr"/>
+                </a:tc>
+                <a:tc>
+                  <a:txBody>
+                    <a:bodyPr/>
+                    <a:lstStyle/>
+                    <a:p>
+                      <a:pPr indent="0">
+                        <a:buNone/>
+                      </a:pPr>
+                      <a:r>
+                        <a:rPr lang="en-US" sz="1050" dirty="0">
+                          <a:effectLst/>
+                        </a:rPr>
+                        <a:t>Vehicle speed</a:t>
+                      </a:r>
+                      <a:endParaRPr lang="en-US" sz="1050" dirty="0">
+                        <a:effectLst/>
+                        <a:latin typeface="Times New Roman" panose="02020603050405020304" pitchFamily="18" charset="0"/>
+                        <a:cs typeface="Times New Roman" panose="02020603050405020304" pitchFamily="18" charset="0"/>
+                      </a:endParaRPr>
+                    </a:p>
+                  </a:txBody>
+                  <a:tcPr marL="60722" marR="60722" marT="30361" marB="30361" anchor="ctr"/>
+                </a:tc>
+                <a:tc>
+                  <a:txBody>
+                    <a:bodyPr/>
+                    <a:lstStyle/>
+                    <a:p>
+                      <a:pPr indent="0">
+                        <a:buNone/>
+                      </a:pPr>
+                      <a:r>
+                        <a:rPr lang="en-US" sz="1050" dirty="0">
+                          <a:effectLst/>
+                        </a:rPr>
+                        <a:t>km/h</a:t>
+                      </a:r>
+                      <a:endParaRPr lang="en-US" sz="1050" dirty="0">
+                        <a:effectLst/>
+                        <a:latin typeface="Times New Roman" panose="02020603050405020304" pitchFamily="18" charset="0"/>
+                        <a:cs typeface="Times New Roman" panose="02020603050405020304" pitchFamily="18" charset="0"/>
+                      </a:endParaRPr>
+                    </a:p>
+                  </a:txBody>
+                  <a:tcPr marL="60722" marR="60722" marT="30361" marB="30361" anchor="ctr"/>
+                </a:tc>
+                <a:extLst>
+                  <a:ext uri="{0D108BD9-81ED-4DB2-BD59-A6C34878D82A}">
+                    <a16:rowId xmlns:a16="http://schemas.microsoft.com/office/drawing/2014/main" val="2270366974"/>
+                  </a:ext>
+                </a:extLst>
+              </a:tr>
+              <a:tr h="440957">
+                <a:tc>
+                  <a:txBody>
+                    <a:bodyPr/>
+                    <a:lstStyle/>
+                    <a:p>
+                      <a:pPr indent="0">
+                        <a:buNone/>
+                      </a:pPr>
+                      <a:r>
+                        <a:rPr lang="en-US" sz="1050" dirty="0">
+                          <a:effectLst/>
+                        </a:rPr>
+                        <a:t>Acceleration</a:t>
+                      </a:r>
+                      <a:endParaRPr lang="en-US" sz="1050" dirty="0">
+                        <a:effectLst/>
+                        <a:latin typeface="Times New Roman" panose="02020603050405020304" pitchFamily="18" charset="0"/>
+                        <a:cs typeface="Times New Roman" panose="02020603050405020304" pitchFamily="18" charset="0"/>
+                      </a:endParaRPr>
+                    </a:p>
+                  </a:txBody>
+                  <a:tcPr marL="60722" marR="60722" marT="30361" marB="30361" anchor="ctr"/>
+                </a:tc>
+                <a:tc>
+                  <a:txBody>
+                    <a:bodyPr/>
+                    <a:lstStyle/>
+                    <a:p>
+                      <a:pPr indent="0">
+                        <a:buNone/>
+                      </a:pPr>
+                      <a:r>
+                        <a:rPr lang="en-US" sz="1050" dirty="0">
+                          <a:effectLst/>
+                        </a:rPr>
+                        <a:t>Rate of speed change</a:t>
+                      </a:r>
+                      <a:endParaRPr lang="en-US" sz="1050" dirty="0">
+                        <a:effectLst/>
+                        <a:latin typeface="Times New Roman" panose="02020603050405020304" pitchFamily="18" charset="0"/>
+                        <a:cs typeface="Times New Roman" panose="02020603050405020304" pitchFamily="18" charset="0"/>
+                      </a:endParaRPr>
+                    </a:p>
+                  </a:txBody>
+                  <a:tcPr marL="60722" marR="60722" marT="30361" marB="30361" anchor="ctr"/>
+                </a:tc>
+                <a:tc>
+                  <a:txBody>
+                    <a:bodyPr/>
+                    <a:lstStyle/>
+                    <a:p>
+                      <a:pPr indent="0">
+                        <a:buNone/>
+                      </a:pPr>
+                      <a:r>
+                        <a:rPr lang="en-US" sz="1050" dirty="0">
+                          <a:effectLst/>
+                        </a:rPr>
+                        <a:t>m/s²</a:t>
+                      </a:r>
+                      <a:endParaRPr lang="en-US" sz="1050" dirty="0">
+                        <a:effectLst/>
+                        <a:latin typeface="Times New Roman" panose="02020603050405020304" pitchFamily="18" charset="0"/>
+                        <a:cs typeface="Times New Roman" panose="02020603050405020304" pitchFamily="18" charset="0"/>
+                      </a:endParaRPr>
+                    </a:p>
+                  </a:txBody>
+                  <a:tcPr marL="60722" marR="60722" marT="30361" marB="30361" anchor="ctr"/>
+                </a:tc>
+                <a:extLst>
+                  <a:ext uri="{0D108BD9-81ED-4DB2-BD59-A6C34878D82A}">
+                    <a16:rowId xmlns:a16="http://schemas.microsoft.com/office/drawing/2014/main" val="3387955327"/>
+                  </a:ext>
+                </a:extLst>
+              </a:tr>
+              <a:tr h="440957">
+                <a:tc>
+                  <a:txBody>
+                    <a:bodyPr/>
+                    <a:lstStyle/>
+                    <a:p>
+                      <a:pPr indent="0">
+                        <a:buNone/>
+                      </a:pPr>
+                      <a:r>
+                        <a:rPr lang="en-US" sz="1050" dirty="0">
+                          <a:effectLst/>
+                        </a:rPr>
+                        <a:t>Slope</a:t>
+                      </a:r>
+                      <a:endParaRPr lang="en-US" sz="1050" dirty="0">
+                        <a:effectLst/>
+                        <a:latin typeface="Times New Roman" panose="02020603050405020304" pitchFamily="18" charset="0"/>
+                        <a:cs typeface="Times New Roman" panose="02020603050405020304" pitchFamily="18" charset="0"/>
+                      </a:endParaRPr>
+                    </a:p>
+                  </a:txBody>
+                  <a:tcPr marL="60722" marR="60722" marT="30361" marB="30361" anchor="ctr"/>
+                </a:tc>
+                <a:tc>
+                  <a:txBody>
+                    <a:bodyPr/>
+                    <a:lstStyle/>
+                    <a:p>
+                      <a:pPr indent="0">
+                        <a:buNone/>
+                      </a:pPr>
+                      <a:r>
+                        <a:rPr lang="en-US" sz="1050" dirty="0">
+                          <a:effectLst/>
+                        </a:rPr>
+                        <a:t>Road gradient (uphill/downhill)</a:t>
+                      </a:r>
+                      <a:endParaRPr lang="en-US" sz="1050" dirty="0">
+                        <a:effectLst/>
+                        <a:latin typeface="Times New Roman" panose="02020603050405020304" pitchFamily="18" charset="0"/>
+                        <a:cs typeface="Times New Roman" panose="02020603050405020304" pitchFamily="18" charset="0"/>
+                      </a:endParaRPr>
+                    </a:p>
+                  </a:txBody>
+                  <a:tcPr marL="60722" marR="60722" marT="30361" marB="30361" anchor="ctr"/>
+                </a:tc>
+                <a:tc>
+                  <a:txBody>
+                    <a:bodyPr/>
+                    <a:lstStyle/>
+                    <a:p>
+                      <a:pPr indent="0">
+                        <a:buNone/>
+                      </a:pPr>
+                      <a:r>
+                        <a:rPr lang="en-US" sz="1050" dirty="0">
+                          <a:effectLst/>
+                        </a:rPr>
+                        <a:t>degrees</a:t>
+                      </a:r>
+                      <a:endParaRPr lang="en-US" sz="1050" dirty="0">
+                        <a:effectLst/>
+                        <a:latin typeface="Times New Roman" panose="02020603050405020304" pitchFamily="18" charset="0"/>
+                        <a:cs typeface="Times New Roman" panose="02020603050405020304" pitchFamily="18" charset="0"/>
+                      </a:endParaRPr>
+                    </a:p>
+                  </a:txBody>
+                  <a:tcPr marL="60722" marR="60722" marT="30361" marB="30361" anchor="ctr"/>
+                </a:tc>
+                <a:extLst>
+                  <a:ext uri="{0D108BD9-81ED-4DB2-BD59-A6C34878D82A}">
+                    <a16:rowId xmlns:a16="http://schemas.microsoft.com/office/drawing/2014/main" val="1369674537"/>
+                  </a:ext>
+                </a:extLst>
+              </a:tr>
+              <a:tr h="255639">
+                <a:tc>
+                  <a:txBody>
+                    <a:bodyPr/>
+                    <a:lstStyle/>
+                    <a:p>
+                      <a:pPr indent="0">
+                        <a:buNone/>
+                      </a:pPr>
+                      <a:r>
+                        <a:rPr lang="en-US" sz="1050" dirty="0">
+                          <a:effectLst/>
+                        </a:rPr>
+                        <a:t>Distance</a:t>
+                      </a:r>
+                      <a:endParaRPr lang="en-US" sz="1050" dirty="0">
+                        <a:effectLst/>
+                        <a:latin typeface="Times New Roman" panose="02020603050405020304" pitchFamily="18" charset="0"/>
+                        <a:cs typeface="Times New Roman" panose="02020603050405020304" pitchFamily="18" charset="0"/>
+                      </a:endParaRPr>
+                    </a:p>
+                  </a:txBody>
+                  <a:tcPr marL="60722" marR="60722" marT="30361" marB="30361" anchor="ctr"/>
+                </a:tc>
+                <a:tc>
+                  <a:txBody>
+                    <a:bodyPr/>
+                    <a:lstStyle/>
+                    <a:p>
+                      <a:pPr indent="0">
+                        <a:buNone/>
+                      </a:pPr>
+                      <a:r>
+                        <a:rPr lang="en-US" sz="1050" dirty="0">
+                          <a:effectLst/>
+                        </a:rPr>
+                        <a:t>Segment length</a:t>
+                      </a:r>
+                      <a:endParaRPr lang="en-US" sz="1050" dirty="0">
+                        <a:effectLst/>
+                        <a:latin typeface="Times New Roman" panose="02020603050405020304" pitchFamily="18" charset="0"/>
+                        <a:cs typeface="Times New Roman" panose="02020603050405020304" pitchFamily="18" charset="0"/>
+                      </a:endParaRPr>
+                    </a:p>
+                  </a:txBody>
+                  <a:tcPr marL="60722" marR="60722" marT="30361" marB="30361" anchor="ctr"/>
+                </a:tc>
+                <a:tc>
+                  <a:txBody>
+                    <a:bodyPr/>
+                    <a:lstStyle/>
+                    <a:p>
+                      <a:pPr indent="0">
+                        <a:buNone/>
+                      </a:pPr>
+                      <a:r>
+                        <a:rPr lang="en-US" sz="1050" dirty="0">
+                          <a:effectLst/>
+                        </a:rPr>
+                        <a:t>km</a:t>
+                      </a:r>
+                      <a:endParaRPr lang="en-US" sz="1050" dirty="0">
+                        <a:effectLst/>
+                        <a:latin typeface="Times New Roman" panose="02020603050405020304" pitchFamily="18" charset="0"/>
+                        <a:cs typeface="Times New Roman" panose="02020603050405020304" pitchFamily="18" charset="0"/>
+                      </a:endParaRPr>
+                    </a:p>
+                  </a:txBody>
+                  <a:tcPr marL="60722" marR="60722" marT="30361" marB="30361" anchor="ctr"/>
+                </a:tc>
+                <a:extLst>
+                  <a:ext uri="{0D108BD9-81ED-4DB2-BD59-A6C34878D82A}">
+                    <a16:rowId xmlns:a16="http://schemas.microsoft.com/office/drawing/2014/main" val="3496914960"/>
+                  </a:ext>
+                </a:extLst>
+              </a:tr>
+              <a:tr h="440957">
+                <a:tc>
+                  <a:txBody>
+                    <a:bodyPr/>
+                    <a:lstStyle/>
+                    <a:p>
+                      <a:pPr indent="0">
+                        <a:buNone/>
+                      </a:pPr>
+                      <a:r>
+                        <a:rPr lang="en-US" sz="1050" dirty="0">
+                          <a:effectLst/>
+                        </a:rPr>
+                        <a:t>Congestion</a:t>
+                      </a:r>
+                      <a:endParaRPr lang="en-US" sz="1050" dirty="0">
+                        <a:effectLst/>
+                        <a:latin typeface="Times New Roman" panose="02020603050405020304" pitchFamily="18" charset="0"/>
+                        <a:cs typeface="Times New Roman" panose="02020603050405020304" pitchFamily="18" charset="0"/>
+                      </a:endParaRPr>
+                    </a:p>
+                  </a:txBody>
+                  <a:tcPr marL="60722" marR="60722" marT="30361" marB="30361" anchor="ctr"/>
+                </a:tc>
+                <a:tc>
+                  <a:txBody>
+                    <a:bodyPr/>
+                    <a:lstStyle/>
+                    <a:p>
+                      <a:pPr indent="0">
+                        <a:buNone/>
+                      </a:pPr>
+                      <a:r>
+                        <a:rPr lang="en-US" sz="1050" dirty="0">
+                          <a:effectLst/>
+                        </a:rPr>
+                        <a:t>Traffic congestion level</a:t>
+                      </a:r>
+                      <a:endParaRPr lang="en-US" sz="1050" dirty="0">
+                        <a:effectLst/>
+                        <a:latin typeface="Times New Roman" panose="02020603050405020304" pitchFamily="18" charset="0"/>
+                        <a:cs typeface="Times New Roman" panose="02020603050405020304" pitchFamily="18" charset="0"/>
+                      </a:endParaRPr>
+                    </a:p>
+                  </a:txBody>
+                  <a:tcPr marL="60722" marR="60722" marT="30361" marB="30361" anchor="ctr"/>
+                </a:tc>
+                <a:tc>
+                  <a:txBody>
+                    <a:bodyPr/>
+                    <a:lstStyle/>
+                    <a:p>
+                      <a:pPr indent="0">
+                        <a:buNone/>
+                      </a:pPr>
+                      <a:r>
+                        <a:rPr lang="en-US" sz="1050" dirty="0">
+                          <a:effectLst/>
+                        </a:rPr>
+                        <a:t>0 / 1 / 2</a:t>
+                      </a:r>
+                      <a:endParaRPr lang="en-US" sz="1050" dirty="0">
+                        <a:effectLst/>
+                        <a:latin typeface="Times New Roman" panose="02020603050405020304" pitchFamily="18" charset="0"/>
+                        <a:cs typeface="Times New Roman" panose="02020603050405020304" pitchFamily="18" charset="0"/>
+                      </a:endParaRPr>
+                    </a:p>
+                  </a:txBody>
+                  <a:tcPr marL="60722" marR="60722" marT="30361" marB="30361" anchor="ctr"/>
+                </a:tc>
+                <a:extLst>
+                  <a:ext uri="{0D108BD9-81ED-4DB2-BD59-A6C34878D82A}">
+                    <a16:rowId xmlns:a16="http://schemas.microsoft.com/office/drawing/2014/main" val="3288373498"/>
+                  </a:ext>
+                </a:extLst>
+              </a:tr>
+              <a:tr h="626275">
+                <a:tc>
+                  <a:txBody>
+                    <a:bodyPr/>
+                    <a:lstStyle/>
+                    <a:p>
+                      <a:pPr indent="0">
+                        <a:buNone/>
+                      </a:pPr>
+                      <a:r>
+                        <a:rPr lang="en-US" sz="1050" dirty="0">
+                          <a:effectLst/>
+                        </a:rPr>
+                        <a:t>Temperature</a:t>
+                      </a:r>
+                      <a:endParaRPr lang="en-US" sz="1050" dirty="0">
+                        <a:effectLst/>
+                        <a:latin typeface="Times New Roman" panose="02020603050405020304" pitchFamily="18" charset="0"/>
+                        <a:cs typeface="Times New Roman" panose="02020603050405020304" pitchFamily="18" charset="0"/>
+                      </a:endParaRPr>
+                    </a:p>
+                  </a:txBody>
+                  <a:tcPr marL="60722" marR="60722" marT="30361" marB="30361" anchor="ctr"/>
+                </a:tc>
+                <a:tc>
+                  <a:txBody>
+                    <a:bodyPr/>
+                    <a:lstStyle/>
+                    <a:p>
+                      <a:pPr indent="0">
+                        <a:buNone/>
+                      </a:pPr>
+                      <a:r>
+                        <a:rPr lang="en-US" sz="1050" dirty="0">
+                          <a:effectLst/>
+                        </a:rPr>
+                        <a:t>Ambient temperature (affects A/C load)</a:t>
+                      </a:r>
+                      <a:endParaRPr lang="en-US" sz="1050" dirty="0">
+                        <a:effectLst/>
+                        <a:latin typeface="Times New Roman" panose="02020603050405020304" pitchFamily="18" charset="0"/>
+                        <a:cs typeface="Times New Roman" panose="02020603050405020304" pitchFamily="18" charset="0"/>
+                      </a:endParaRPr>
+                    </a:p>
+                  </a:txBody>
+                  <a:tcPr marL="60722" marR="60722" marT="30361" marB="30361" anchor="ctr"/>
+                </a:tc>
+                <a:tc>
+                  <a:txBody>
+                    <a:bodyPr/>
+                    <a:lstStyle/>
+                    <a:p>
+                      <a:pPr indent="0">
+                        <a:buNone/>
+                      </a:pPr>
+                      <a:r>
+                        <a:rPr lang="en-US" sz="1050" dirty="0">
+                          <a:effectLst/>
+                        </a:rPr>
+                        <a:t>°C</a:t>
+                      </a:r>
+                      <a:endParaRPr lang="en-US" sz="1050" dirty="0">
+                        <a:effectLst/>
+                        <a:latin typeface="Times New Roman" panose="02020603050405020304" pitchFamily="18" charset="0"/>
+                        <a:cs typeface="Times New Roman" panose="02020603050405020304" pitchFamily="18" charset="0"/>
+                      </a:endParaRPr>
+                    </a:p>
+                  </a:txBody>
+                  <a:tcPr marL="60722" marR="60722" marT="30361" marB="30361" anchor="ctr"/>
+                </a:tc>
+                <a:extLst>
+                  <a:ext uri="{0D108BD9-81ED-4DB2-BD59-A6C34878D82A}">
+                    <a16:rowId xmlns:a16="http://schemas.microsoft.com/office/drawing/2014/main" val="5173296"/>
+                  </a:ext>
+                </a:extLst>
+              </a:tr>
+              <a:tr h="440957">
+                <a:tc>
+                  <a:txBody>
+                    <a:bodyPr/>
+                    <a:lstStyle/>
+                    <a:p>
+                      <a:pPr indent="0">
+                        <a:buNone/>
+                      </a:pPr>
+                      <a:r>
+                        <a:rPr lang="en-US" sz="1050" dirty="0">
+                          <a:effectLst/>
+                        </a:rPr>
+                        <a:t>StopGoFrequency</a:t>
+                      </a:r>
+                      <a:endParaRPr lang="en-US" sz="1050" dirty="0">
+                        <a:effectLst/>
+                        <a:latin typeface="Times New Roman" panose="02020603050405020304" pitchFamily="18" charset="0"/>
+                        <a:cs typeface="Times New Roman" panose="02020603050405020304" pitchFamily="18" charset="0"/>
+                      </a:endParaRPr>
+                    </a:p>
+                  </a:txBody>
+                  <a:tcPr marL="60722" marR="60722" marT="30361" marB="30361" anchor="ctr"/>
+                </a:tc>
+                <a:tc>
+                  <a:txBody>
+                    <a:bodyPr/>
+                    <a:lstStyle/>
+                    <a:p>
+                      <a:pPr indent="0">
+                        <a:buNone/>
+                      </a:pPr>
+                      <a:r>
+                        <a:rPr lang="en-US" sz="1050" dirty="0">
+                          <a:effectLst/>
+                        </a:rPr>
+                        <a:t>Number of stops per segment</a:t>
+                      </a:r>
+                      <a:endParaRPr lang="en-US" sz="1050" dirty="0">
+                        <a:effectLst/>
+                        <a:latin typeface="Times New Roman" panose="02020603050405020304" pitchFamily="18" charset="0"/>
+                        <a:cs typeface="Times New Roman" panose="02020603050405020304" pitchFamily="18" charset="0"/>
+                      </a:endParaRPr>
+                    </a:p>
+                  </a:txBody>
+                  <a:tcPr marL="60722" marR="60722" marT="30361" marB="30361" anchor="ctr"/>
+                </a:tc>
+                <a:tc>
+                  <a:txBody>
+                    <a:bodyPr/>
+                    <a:lstStyle/>
+                    <a:p>
+                      <a:pPr indent="0">
+                        <a:buNone/>
+                      </a:pPr>
+                      <a:r>
+                        <a:rPr lang="en-US" sz="1050" dirty="0">
+                          <a:effectLst/>
+                        </a:rPr>
+                        <a:t>count</a:t>
+                      </a:r>
+                      <a:endParaRPr lang="en-US" sz="1050" dirty="0">
+                        <a:effectLst/>
+                        <a:latin typeface="Times New Roman" panose="02020603050405020304" pitchFamily="18" charset="0"/>
+                        <a:cs typeface="Times New Roman" panose="02020603050405020304" pitchFamily="18" charset="0"/>
+                      </a:endParaRPr>
+                    </a:p>
+                  </a:txBody>
+                  <a:tcPr marL="60722" marR="60722" marT="30361" marB="30361" anchor="ctr"/>
+                </a:tc>
+                <a:extLst>
+                  <a:ext uri="{0D108BD9-81ED-4DB2-BD59-A6C34878D82A}">
+                    <a16:rowId xmlns:a16="http://schemas.microsoft.com/office/drawing/2014/main" val="1804701547"/>
+                  </a:ext>
+                </a:extLst>
+              </a:tr>
+              <a:tr h="440957">
+                <a:tc>
+                  <a:txBody>
+                    <a:bodyPr/>
+                    <a:lstStyle/>
+                    <a:p>
+                      <a:pPr indent="0">
+                        <a:buNone/>
+                      </a:pPr>
+                      <a:r>
+                        <a:rPr lang="en-US" sz="1050" dirty="0">
+                          <a:effectLst/>
+                        </a:rPr>
+                        <a:t>Engine Load</a:t>
+                      </a:r>
+                      <a:endParaRPr lang="en-US" sz="1050" dirty="0">
+                        <a:effectLst/>
+                        <a:latin typeface="Times New Roman" panose="02020603050405020304" pitchFamily="18" charset="0"/>
+                        <a:cs typeface="Times New Roman" panose="02020603050405020304" pitchFamily="18" charset="0"/>
+                      </a:endParaRPr>
+                    </a:p>
+                  </a:txBody>
+                  <a:tcPr marL="60722" marR="60722" marT="30361" marB="30361" anchor="ctr"/>
+                </a:tc>
+                <a:tc>
+                  <a:txBody>
+                    <a:bodyPr/>
+                    <a:lstStyle/>
+                    <a:p>
+                      <a:pPr indent="0">
+                        <a:buNone/>
+                      </a:pPr>
+                      <a:r>
+                        <a:rPr lang="en-US" sz="1050" dirty="0">
+                          <a:effectLst/>
+                        </a:rPr>
+                        <a:t>Engine load percentage</a:t>
+                      </a:r>
+                      <a:endParaRPr lang="en-US" sz="1050" dirty="0">
+                        <a:effectLst/>
+                        <a:latin typeface="Times New Roman" panose="02020603050405020304" pitchFamily="18" charset="0"/>
+                        <a:cs typeface="Times New Roman" panose="02020603050405020304" pitchFamily="18" charset="0"/>
+                      </a:endParaRPr>
+                    </a:p>
+                  </a:txBody>
+                  <a:tcPr marL="60722" marR="60722" marT="30361" marB="30361" anchor="ctr"/>
+                </a:tc>
+                <a:tc>
+                  <a:txBody>
+                    <a:bodyPr/>
+                    <a:lstStyle/>
+                    <a:p>
+                      <a:pPr indent="0">
+                        <a:buNone/>
+                      </a:pPr>
+                      <a:r>
+                        <a:rPr lang="en-US" sz="1050" dirty="0">
+                          <a:effectLst/>
+                        </a:rPr>
+                        <a:t>%</a:t>
+                      </a:r>
+                      <a:endParaRPr lang="en-US" sz="1050" dirty="0">
+                        <a:effectLst/>
+                        <a:latin typeface="Times New Roman" panose="02020603050405020304" pitchFamily="18" charset="0"/>
+                        <a:cs typeface="Times New Roman" panose="02020603050405020304" pitchFamily="18" charset="0"/>
+                      </a:endParaRPr>
+                    </a:p>
+                  </a:txBody>
+                  <a:tcPr marL="60722" marR="60722" marT="30361" marB="30361" anchor="ctr"/>
+                </a:tc>
+                <a:extLst>
+                  <a:ext uri="{0D108BD9-81ED-4DB2-BD59-A6C34878D82A}">
+                    <a16:rowId xmlns:a16="http://schemas.microsoft.com/office/drawing/2014/main" val="3085635139"/>
+                  </a:ext>
+                </a:extLst>
+              </a:tr>
+              <a:tr h="440957">
+                <a:tc>
+                  <a:txBody>
+                    <a:bodyPr/>
+                    <a:lstStyle/>
+                    <a:p>
+                      <a:pPr indent="0">
+                        <a:buNone/>
+                      </a:pPr>
+                      <a:r>
+                        <a:rPr lang="en-US" sz="1050" dirty="0">
+                          <a:effectLst/>
+                        </a:rPr>
+                        <a:t>Horsepower</a:t>
+                      </a:r>
+                      <a:endParaRPr lang="en-US" sz="1050" dirty="0">
+                        <a:effectLst/>
+                        <a:latin typeface="Times New Roman" panose="02020603050405020304" pitchFamily="18" charset="0"/>
+                        <a:cs typeface="Times New Roman" panose="02020603050405020304" pitchFamily="18" charset="0"/>
+                      </a:endParaRPr>
+                    </a:p>
+                  </a:txBody>
+                  <a:tcPr marL="60722" marR="60722" marT="30361" marB="30361" anchor="ctr"/>
+                </a:tc>
+                <a:tc>
+                  <a:txBody>
+                    <a:bodyPr/>
+                    <a:lstStyle/>
+                    <a:p>
+                      <a:pPr indent="0">
+                        <a:buNone/>
+                      </a:pPr>
+                      <a:r>
+                        <a:rPr lang="en-US" sz="1050" dirty="0">
+                          <a:effectLst/>
+                        </a:rPr>
+                        <a:t>Vehicle engine power</a:t>
+                      </a:r>
+                      <a:endParaRPr lang="en-US" sz="1050" dirty="0">
+                        <a:effectLst/>
+                        <a:latin typeface="Times New Roman" panose="02020603050405020304" pitchFamily="18" charset="0"/>
+                        <a:cs typeface="Times New Roman" panose="02020603050405020304" pitchFamily="18" charset="0"/>
+                      </a:endParaRPr>
+                    </a:p>
+                  </a:txBody>
+                  <a:tcPr marL="60722" marR="60722" marT="30361" marB="30361" anchor="ctr"/>
+                </a:tc>
+                <a:tc>
+                  <a:txBody>
+                    <a:bodyPr/>
+                    <a:lstStyle/>
+                    <a:p>
+                      <a:pPr indent="0">
+                        <a:buNone/>
+                      </a:pPr>
+                      <a:r>
+                        <a:rPr lang="en-US" sz="1050" dirty="0">
+                          <a:effectLst/>
+                        </a:rPr>
+                        <a:t>HP</a:t>
+                      </a:r>
+                      <a:endParaRPr lang="en-US" sz="1050" dirty="0">
+                        <a:effectLst/>
+                        <a:latin typeface="Times New Roman" panose="02020603050405020304" pitchFamily="18" charset="0"/>
+                        <a:cs typeface="Times New Roman" panose="02020603050405020304" pitchFamily="18" charset="0"/>
+                      </a:endParaRPr>
+                    </a:p>
+                  </a:txBody>
+                  <a:tcPr marL="60722" marR="60722" marT="30361" marB="30361" anchor="ctr"/>
+                </a:tc>
+                <a:extLst>
+                  <a:ext uri="{0D108BD9-81ED-4DB2-BD59-A6C34878D82A}">
+                    <a16:rowId xmlns:a16="http://schemas.microsoft.com/office/drawing/2014/main" val="3834729356"/>
+                  </a:ext>
+                </a:extLst>
+              </a:tr>
+            </a:tbl>
+          </a:graphicData>
+        </a:graphic>
+      </p:graphicFrame>
+      <p:sp>
+        <p:nvSpPr>
+          <p:cNvPr id="14" name="TextBox 13">
+            <a:extLst>
+              <a:ext uri="{FF2B5EF4-FFF2-40B4-BE49-F238E27FC236}">
+                <a16:creationId xmlns:a16="http://schemas.microsoft.com/office/drawing/2014/main" id="{AF0A72C4-530E-5C07-14C1-272002C28037}"/>
+              </a:ext>
+            </a:extLst>
+          </p:cNvPr>
+          <p:cNvSpPr txBox="1"/>
+          <p:nvPr/>
+        </p:nvSpPr>
+        <p:spPr>
+          <a:xfrm>
+            <a:off x="8028432" y="1315878"/>
+            <a:ext cx="3209276" cy="646331"/>
+          </a:xfrm>
+          <a:prstGeom prst="rect">
+            <a:avLst/>
+          </a:prstGeom>
+          <a:noFill/>
+        </p:spPr>
+        <p:txBody>
+          <a:bodyPr wrap="none" rtlCol="0">
+            <a:spAutoFit/>
+          </a:bodyPr>
+          <a:lstStyle/>
+          <a:p>
+            <a:r>
+              <a:rPr lang="en-US" b="1" u="sng" dirty="0">
+                <a:latin typeface="Times New Roman" panose="02020603050405020304" pitchFamily="18" charset="0"/>
+                <a:cs typeface="Times New Roman" panose="02020603050405020304" pitchFamily="18" charset="0"/>
+              </a:rPr>
+              <a:t>9 Features Used for ML Model</a:t>
+            </a:r>
+          </a:p>
+          <a:p>
+            <a:endParaRPr lang="en-US" dirty="0"/>
           </a:p>
         </p:txBody>
       </p:sp>
     </p:spTree>
     <p:extLst>
       <p:ext uri="{BB962C8B-B14F-4D97-AF65-F5344CB8AC3E}">
-        <p14:creationId xmlns:p14="http://schemas.microsoft.com/office/powerpoint/2010/main" val="3857748052"/>
+        <p14:creationId xmlns:p14="http://schemas.microsoft.com/office/powerpoint/2010/main" val="3186585360"/>
       </p:ext>
     </p:extLst>
   </p:cSld>
